--- a/lecons/F3/24_FORM4_LESSON20_Middle_Course.pptx
+++ b/lecons/F3/24_FORM4_LESSON20_Middle_Course.pptx
@@ -50,9 +50,14 @@
     <p:sldId id="298" r:id="rId44"/>
     <p:sldId id="299" r:id="rId45"/>
     <p:sldId id="300" r:id="rId46"/>
+    <p:sldId id="301" r:id="rId47"/>
+    <p:sldId id="302" r:id="rId48"/>
+    <p:sldId id="303" r:id="rId49"/>
+    <p:sldId id="304" r:id="rId50"/>
+    <p:sldId id="305" r:id="rId51"/>
   </p:sldIdLst>
   <p:notesMasterIdLst>
-    <p:notesMasterId r:id="rId47"/>
+    <p:notesMasterId r:id="rId52"/>
   </p:notesMasterIdLst>
   <p:sldSz cx="12192000" cy="6858000"/>
   <p:notesSz cx="6858000" cy="12192000"/>
@@ -634,7 +639,7 @@
           <a:p>
             <a:r>
               <a:rPr lang="en-US" dirty="0"/>
-              <a:t>Listen carefully to this situation from real life. From the Benue Bridge in Garoua, Adama sees that the river bends. On the outside of the bend, the bank is steep. On the inside, there is a gentle beach of sand. Think about it, because I am going to ask you some questions.</a:t>
+              <a:t>Listen carefully to this situation from real life. From the Benue Bridge in Garoua, Adama sees that the river makes big bends. On the outside of each bend the bank is steep and falls into the water, while on the inside there is a gentle beach of sand. He asks: "Why is one bank steep and the other gentle?" Think about it, because I am going to ask you some questions.</a:t>
             </a:r>
             <a:endParaRPr lang="en-US" dirty="0"/>
           </a:p>
@@ -810,7 +815,7 @@
           <a:p>
             <a:r>
               <a:rPr lang="en-US" dirty="0"/>
-              <a:t>Good. Adama does not know why the two banks are different.</a:t>
+              <a:t>Good. Adama does not understand why the two banks of a bend are different.</a:t>
             </a:r>
             <a:endParaRPr lang="en-US" dirty="0"/>
           </a:p>
@@ -898,7 +903,7 @@
           <a:p>
             <a:r>
               <a:rPr lang="en-US" dirty="0"/>
-              <a:t>Question 2: Describe the two banks. Think for a moment, then raise your hand to answer.</a:t>
+              <a:t>Question 2: Describe the outside of the bend. Think for a moment, then raise your hand to answer.</a:t>
             </a:r>
             <a:endParaRPr lang="en-US" dirty="0"/>
           </a:p>
@@ -986,7 +991,7 @@
           <a:p>
             <a:r>
               <a:rPr lang="en-US" dirty="0"/>
-              <a:t>Good. Steep outside; gentle and sandy inside.</a:t>
+              <a:t>Good. The bank is steep.</a:t>
             </a:r>
             <a:endParaRPr lang="en-US" dirty="0"/>
           </a:p>
@@ -1074,7 +1079,7 @@
           <a:p>
             <a:r>
               <a:rPr lang="en-US" dirty="0"/>
-              <a:t>Question 3: What do we call a big bend in a river? Think for a moment, then raise your hand to answer.</a:t>
+              <a:t>Question 3: Describe the inside of the bend. Think for a moment, then raise your hand to answer.</a:t>
             </a:r>
             <a:endParaRPr lang="en-US" dirty="0"/>
           </a:p>
@@ -1162,7 +1167,7 @@
           <a:p>
             <a:r>
               <a:rPr lang="en-US" dirty="0"/>
-              <a:t>Good. A meander.</a:t>
+              <a:t>Good. It is a gentle beach of sand.</a:t>
             </a:r>
             <a:endParaRPr lang="en-US" dirty="0"/>
           </a:p>
@@ -1426,7 +1431,7 @@
           <a:p>
             <a:r>
               <a:rPr lang="en-US" dirty="0"/>
-              <a:t>Activity 1. Look carefully at this picture: a river with big bends, seen from the sky. Observe every detail before I ask the question.</a:t>
+              <a:t>Activity 1. Look carefully at this animation: animation: how a river carries its load. Watch the animation to the end; it will play again.</a:t>
             </a:r>
             <a:endParaRPr lang="en-US" dirty="0"/>
           </a:p>
@@ -1602,7 +1607,7 @@
           <a:p>
             <a:r>
               <a:rPr lang="en-US" dirty="0"/>
-              <a:t>Here is the question for Activity 1: What do we call these big bends? Take one minute to think and write your answer in your rough notebook.</a:t>
+              <a:t>Here is the question for Activity 1: How does the river carry the big stones along its bed? Take one minute to think and write your answer in your rough notebook.</a:t>
             </a:r>
             <a:endParaRPr lang="en-US" dirty="0"/>
           </a:p>
@@ -1690,7 +1695,7 @@
           <a:p>
             <a:r>
               <a:rPr lang="en-US" dirty="0"/>
-              <a:t>Let us check the answer together. Meanders.</a:t>
+              <a:t>Let us check the answer together. It rolls them: this is traction.</a:t>
             </a:r>
             <a:endParaRPr lang="en-US" dirty="0"/>
           </a:p>
@@ -1778,7 +1783,7 @@
           <a:p>
             <a:r>
               <a:rPr lang="en-US" dirty="0"/>
-              <a:t>Activity 2. Look carefully at this animation: animation: a meander grows. Watch the animation to the end; it will play again.</a:t>
+              <a:t>Activity 2. Look carefully at this picture: a river with big bends. Observe every detail before I ask the question.</a:t>
             </a:r>
             <a:endParaRPr lang="en-US" dirty="0"/>
           </a:p>
@@ -1866,7 +1871,7 @@
           <a:p>
             <a:r>
               <a:rPr lang="en-US" dirty="0"/>
-              <a:t>Here is the question for Activity 2: Where does the water erode? Where does it deposit? Take one minute to think and write your answer in your rough notebook.</a:t>
+              <a:t>Here is the question for Activity 2: What do we call these big bends of a river? Take one minute to think and write your answer in your rough notebook.</a:t>
             </a:r>
             <a:endParaRPr lang="en-US" dirty="0"/>
           </a:p>
@@ -1954,7 +1959,7 @@
           <a:p>
             <a:r>
               <a:rPr lang="en-US" dirty="0"/>
-              <a:t>Let us check the answer together. It erodes the outside of the bend and deposits on the inside.</a:t>
+              <a:t>Let us check the answer together. Meanders.</a:t>
             </a:r>
             <a:endParaRPr lang="en-US" dirty="0"/>
           </a:p>
@@ -2042,7 +2047,7 @@
           <a:p>
             <a:r>
               <a:rPr lang="en-US" dirty="0"/>
-              <a:t>Activity 3. Look carefully at this diagram: a cross-section of a meander. Observe every detail before I ask the question.</a:t>
+              <a:t>Activity 3. Look carefully at this animation: animation: erosion and deposition in a meander. Watch the animation to the end; it will play again.</a:t>
             </a:r>
             <a:endParaRPr lang="en-US" dirty="0"/>
           </a:p>
@@ -2130,7 +2135,7 @@
           <a:p>
             <a:r>
               <a:rPr lang="en-US" dirty="0"/>
-              <a:t>Here is the question for Activity 3: What is the steep bank on the outside of the bend called? Take one minute to think and write your answer in your rough notebook.</a:t>
+              <a:t>Here is the question for Activity 3: On which side of the bend does the water erode? Take one minute to think and write your answer in your rough notebook.</a:t>
             </a:r>
             <a:endParaRPr lang="en-US" dirty="0"/>
           </a:p>
@@ -2218,7 +2223,7 @@
           <a:p>
             <a:r>
               <a:rPr lang="en-US" dirty="0"/>
-              <a:t>Let us check the answer together. A river cliff.</a:t>
+              <a:t>Let us check the answer together. On the outside.</a:t>
             </a:r>
             <a:endParaRPr lang="en-US" dirty="0"/>
           </a:p>
@@ -2306,7 +2311,7 @@
           <a:p>
             <a:r>
               <a:rPr lang="en-US" dirty="0"/>
-              <a:t>Now we are going to copy the board summary. Write the title and the headings neatly in your notebooks. I will give you enough time for each slide, so do not rush.</a:t>
+              <a:t>Here is the next question: On which side does it deposit? Take one minute to think and write your answer in your rough notebook.</a:t>
             </a:r>
             <a:endParaRPr lang="en-US" dirty="0"/>
           </a:p>
@@ -2394,7 +2399,7 @@
           <a:p>
             <a:r>
               <a:rPr lang="en-US" dirty="0"/>
-              <a:t>Let us copy Characteristics of the Middle Course. The middle course has the following characteristics. On this slide we have Slope and Valley. Write each point on a new line, with the key term first, and explain it in your own words when we revise. When you finish, we go to the next slide.</a:t>
+              <a:t>Let us check the answer together. On the inside.</a:t>
             </a:r>
             <a:endParaRPr lang="en-US" dirty="0"/>
           </a:p>
@@ -2570,7 +2575,7 @@
           <a:p>
             <a:r>
               <a:rPr lang="en-US" dirty="0"/>
-              <a:t>We continue with Characteristics of the Middle Course. On this slide we have Main process. Write each point on a new line, with the key term first, and explain it in your own words when we revise.</a:t>
+              <a:t>Now we are going to copy the board summary. Write the title and the headings neatly in your notebooks. I will give you enough time for each slide, so do not rush.</a:t>
             </a:r>
             <a:endParaRPr lang="en-US" dirty="0"/>
           </a:p>
@@ -2658,7 +2663,7 @@
           <a:p>
             <a:r>
               <a:rPr lang="en-US" dirty="0"/>
-              <a:t>Let us copy Landforms of the Middle Course. The middle course has the following landforms. On this slide we have Meander and River cliff. Write each point on a new line, with the key term first, and explain it in your own words when we revise. When you finish, we go to the next slide.</a:t>
+              <a:t>Let us copy the definitions. The key terms of this lesson are defined as follows. On this slide we have Middle course and Lateral erosion. Write each point on a new line, with the key term first, and explain it in your own words when we revise.</a:t>
             </a:r>
             <a:endParaRPr lang="en-US" dirty="0"/>
           </a:p>
@@ -2746,7 +2751,7 @@
           <a:p>
             <a:r>
               <a:rPr lang="en-US" dirty="0"/>
-              <a:t>We continue with Landforms of the Middle Course. On this slide we have Slip-off slope. Write each point on a new line, with the key term first, and explain it in your own words when we revise.</a:t>
+              <a:t>Let us copy Characteristics. The middle course has the following characteristics. On this slide we have Gentle slope and Wider valley. Write each point on a new line, with the key term first, and explain it in your own words when we revise. When you finish, we go to the next slide.</a:t>
             </a:r>
             <a:endParaRPr lang="en-US" dirty="0"/>
           </a:p>
@@ -2834,7 +2839,7 @@
           <a:p>
             <a:r>
               <a:rPr lang="en-US" dirty="0"/>
-              <a:t>Now draw this illustration in your notebook: a meander. Give it a title and label it clearly.</a:t>
+              <a:t>We continue with Characteristics. On this slide we have More water and Lateral erosion. Write each point on a new line, with the key term first, and explain it in your own words when we revise.</a:t>
             </a:r>
             <a:endParaRPr lang="en-US" dirty="0"/>
           </a:p>
@@ -2922,7 +2927,7 @@
           <a:p>
             <a:r>
               <a:rPr lang="en-US" dirty="0"/>
-              <a:t>Now let us check what you have understood. Question 1: What is a meander? Answer in your exercise book.</a:t>
+              <a:t>Let us copy Transport of the Load. The river carries its load in the following ways. Copy the point on Traction on the left, then draw the diagram on the right: how a river transports its load. Give it a title and label it clearly.</a:t>
             </a:r>
             <a:endParaRPr lang="en-US" dirty="0"/>
           </a:p>
@@ -3010,7 +3015,7 @@
           <a:p>
             <a:r>
               <a:rPr lang="en-US" dirty="0"/>
-              <a:t>The expected answer is: a big bend in a river. If you got it right, well done.</a:t>
+              <a:t>We continue with Transport of the Load. On this slide we have Saltation, Suspension and Solution. Write each point on a new line, with the key term first, and explain it in your own words when we revise.</a:t>
             </a:r>
             <a:endParaRPr lang="en-US" dirty="0"/>
           </a:p>
@@ -3098,7 +3103,7 @@
           <a:p>
             <a:r>
               <a:rPr lang="en-US" dirty="0"/>
-              <a:t>Now let us check what you have understood. Question 2: Why is the outside of a bend steep? Answer in your exercise book.</a:t>
+              <a:t>Let us copy Landforms of the Middle Course. The middle course has the following landforms. Copy the point on Meander on the left, then draw the diagram on the right: a meander. Give it a title and label it clearly.</a:t>
             </a:r>
             <a:endParaRPr lang="en-US" dirty="0"/>
           </a:p>
@@ -3186,7 +3191,7 @@
           <a:p>
             <a:r>
               <a:rPr lang="en-US" dirty="0"/>
-              <a:t>The expected answer is: the fast water erodes it. If you got it right, well done.</a:t>
+              <a:t>Copy the point on River cliff on the left, then draw the diagram on the right: river cliff and slip-off slope. Give it a title and label it clearly.</a:t>
             </a:r>
             <a:endParaRPr lang="en-US" dirty="0"/>
           </a:p>
@@ -3274,7 +3279,7 @@
           <a:p>
             <a:r>
               <a:rPr lang="en-US" dirty="0"/>
-              <a:t>For those who need more practice, fill in the blanks in your exercise book. The answers are: number 1, meander; number 2, cliff; number 3, slope.</a:t>
+              <a:t>We continue with Landforms of the Middle Course. On this slide we have Slip-off slope and Open V-shaped valley. Write each point on a new line, with the key term first, and explain it in your own words when we revise.</a:t>
             </a:r>
             <a:endParaRPr lang="en-US" dirty="0"/>
           </a:p>
@@ -3362,7 +3367,7 @@
           <a:p>
             <a:r>
               <a:rPr lang="en-US" dirty="0"/>
-              <a:t>For your homework: Look at a map of the Niger Delta or the Nile Delta in your atlas. Draw its shape and name the sea it reaches. We shall correct it at the beginning of our next lesson.</a:t>
+              <a:t>Now let us check what you have understood. Question 1: What is a meander? Answer in your exercise book.</a:t>
             </a:r>
             <a:endParaRPr lang="en-US" dirty="0"/>
           </a:p>
@@ -3538,7 +3543,7 @@
           <a:p>
             <a:r>
               <a:rPr lang="en-US" dirty="0"/>
-              <a:t>Our next lesson will be on Lesson 21: The Lower Course of a River. Thank you for your attention, and see you next time.</a:t>
+              <a:t>The expected answer is: a big bend in a river. If you got it right, well done.</a:t>
             </a:r>
             <a:endParaRPr lang="en-US" dirty="0"/>
           </a:p>
@@ -3626,7 +3631,7 @@
           <a:p>
             <a:r>
               <a:rPr lang="en-US" dirty="0"/>
-              <a:t>Let us play the bilingual game. I say a word in English, and you give me the French word. Then we do the reverse.</a:t>
+              <a:t>Now let us check what you have understood. Question 2: Why is the outside of a bend steep? Answer in your exercise book.</a:t>
             </a:r>
             <a:endParaRPr lang="en-US" dirty="0"/>
           </a:p>
@@ -3714,7 +3719,7 @@
           <a:p>
             <a:r>
               <a:rPr lang="en-US" dirty="0"/>
-              <a:t>I record this information in the official logbook of the class after the lesson.</a:t>
+              <a:t>The expected answer is: the fast water erodes it. If you got it right, well done.</a:t>
             </a:r>
             <a:endParaRPr lang="en-US" dirty="0"/>
           </a:p>
@@ -3802,7 +3807,7 @@
           <a:p>
             <a:r>
               <a:rPr lang="en-US" dirty="0"/>
-              <a:t>I complete the second page of the logbook: the matter taught, the evaluation, the homework and the attendance.</a:t>
+              <a:t>For those who need more practice, fill in the blanks in your exercise book. The answers are: number 1, meander; number 2, cliff; number 3, slope.</a:t>
             </a:r>
             <a:endParaRPr lang="en-US" dirty="0"/>
           </a:p>
@@ -3890,7 +3895,7 @@
           <a:p>
             <a:r>
               <a:rPr lang="en-US" dirty="0"/>
-              <a:t>This slide is for me, the teacher: it gives the timing of the lesson and what to do if the projector is not available.</a:t>
+              <a:t>For your homework: Look at a map of the Niger Delta or the Nile Delta in your atlas. Draw its shape and name the sea it reaches. We shall correct it at the beginning of our next lesson.</a:t>
             </a:r>
             <a:endParaRPr lang="en-US" dirty="0"/>
           </a:p>
@@ -3978,7 +3983,7 @@
           <a:p>
             <a:r>
               <a:rPr lang="en-US" dirty="0"/>
-              <a:t>These are the references and picture credits used to prepare this lesson.</a:t>
+              <a:t>Our next lesson will be on Lesson 21: The Lower Course of a River. Thank you for your attention, and see you next time.</a:t>
             </a:r>
             <a:endParaRPr lang="en-US" dirty="0"/>
           </a:p>
@@ -4002,6 +4007,358 @@
             <a:fld id="{F7021451-1387-4CA6-816F-3879F97B5CBC}" type="slidenum">
               <a:rPr lang="en-US"/>
               <a:t>45</a:t>
+            </a:fld>
+            <a:endParaRPr lang="en-US"/>
+          </a:p>
+        </p:txBody>
+      </p:sp>
+    </p:spTree>
+    <p:extLst>
+      <p:ext uri="{BB962C8B-B14F-4D97-AF65-F5344CB8AC3E}">
+        <p14:creationId xmlns:p14="http://schemas.microsoft.com/office/powerpoint/2010/main" val="1024086991"/>
+      </p:ext>
+    </p:extLst>
+  </p:cSld>
+  <p:clrMapOvr>
+    <a:masterClrMapping/>
+  </p:clrMapOvr>
+</p:notes>
+</file>
+
+<file path=ppt/notesSlides/notesSlide46.xml><?xml version="1.0" encoding="utf-8"?>
+<p:notes xmlns:a="http://schemas.openxmlformats.org/drawingml/2006/main" xmlns:r="http://schemas.openxmlformats.org/officeDocument/2006/relationships" xmlns:p="http://schemas.openxmlformats.org/presentationml/2006/main">
+  <p:cSld>
+    <p:spTree>
+      <p:nvGrpSpPr>
+        <p:cNvPr id="1" name=""/>
+        <p:cNvGrpSpPr/>
+        <p:nvPr/>
+      </p:nvGrpSpPr>
+      <p:grpSpPr>
+        <a:xfrm>
+          <a:off x="0" y="0"/>
+          <a:ext cx="0" cy="0"/>
+          <a:chOff x="0" y="0"/>
+          <a:chExt cx="0" cy="0"/>
+        </a:xfrm>
+      </p:grpSpPr>
+      <p:sp>
+        <p:nvSpPr>
+          <p:cNvPr id="2" name="Slide Image Placeholder 1"/>
+          <p:cNvSpPr>
+            <a:spLocks noGrp="1" noRot="1" noChangeAspect="1"/>
+          </p:cNvSpPr>
+          <p:nvPr>
+            <p:ph type="sldImg"/>
+          </p:nvPr>
+        </p:nvSpPr>
+        <p:spPr/>
+      </p:sp>
+      <p:sp>
+        <p:nvSpPr>
+          <p:cNvPr id="3" name="Notes Placeholder 2"/>
+          <p:cNvSpPr>
+            <a:spLocks noGrp="1"/>
+          </p:cNvSpPr>
+          <p:nvPr>
+            <p:ph type="body" idx="1"/>
+          </p:nvPr>
+        </p:nvSpPr>
+        <p:spPr/>
+        <p:txBody>
+          <a:bodyPr/>
+          <a:lstStyle/>
+          <a:p>
+            <a:r>
+              <a:rPr lang="en-US" dirty="0"/>
+              <a:t>Let us play the bilingual game. I say a word in English, and you give me the French word. Then we do the reverse.</a:t>
+            </a:r>
+            <a:endParaRPr lang="en-US" dirty="0"/>
+          </a:p>
+        </p:txBody>
+      </p:sp>
+      <p:sp>
+        <p:nvSpPr>
+          <p:cNvPr id="4" name="Slide Number Placeholder 3"/>
+          <p:cNvSpPr>
+            <a:spLocks noGrp="1"/>
+          </p:cNvSpPr>
+          <p:nvPr>
+            <p:ph type="sldNum" sz="quarter" idx="10"/>
+          </p:nvPr>
+        </p:nvSpPr>
+        <p:spPr/>
+        <p:txBody>
+          <a:bodyPr/>
+          <a:lstStyle/>
+          <a:p>
+            <a:fld id="{F7021451-1387-4CA6-816F-3879F97B5CBC}" type="slidenum">
+              <a:rPr lang="en-US"/>
+              <a:t>46</a:t>
+            </a:fld>
+            <a:endParaRPr lang="en-US"/>
+          </a:p>
+        </p:txBody>
+      </p:sp>
+    </p:spTree>
+    <p:extLst>
+      <p:ext uri="{BB962C8B-B14F-4D97-AF65-F5344CB8AC3E}">
+        <p14:creationId xmlns:p14="http://schemas.microsoft.com/office/powerpoint/2010/main" val="1024086991"/>
+      </p:ext>
+    </p:extLst>
+  </p:cSld>
+  <p:clrMapOvr>
+    <a:masterClrMapping/>
+  </p:clrMapOvr>
+</p:notes>
+</file>
+
+<file path=ppt/notesSlides/notesSlide47.xml><?xml version="1.0" encoding="utf-8"?>
+<p:notes xmlns:a="http://schemas.openxmlformats.org/drawingml/2006/main" xmlns:r="http://schemas.openxmlformats.org/officeDocument/2006/relationships" xmlns:p="http://schemas.openxmlformats.org/presentationml/2006/main">
+  <p:cSld>
+    <p:spTree>
+      <p:nvGrpSpPr>
+        <p:cNvPr id="1" name=""/>
+        <p:cNvGrpSpPr/>
+        <p:nvPr/>
+      </p:nvGrpSpPr>
+      <p:grpSpPr>
+        <a:xfrm>
+          <a:off x="0" y="0"/>
+          <a:ext cx="0" cy="0"/>
+          <a:chOff x="0" y="0"/>
+          <a:chExt cx="0" cy="0"/>
+        </a:xfrm>
+      </p:grpSpPr>
+      <p:sp>
+        <p:nvSpPr>
+          <p:cNvPr id="2" name="Slide Image Placeholder 1"/>
+          <p:cNvSpPr>
+            <a:spLocks noGrp="1" noRot="1" noChangeAspect="1"/>
+          </p:cNvSpPr>
+          <p:nvPr>
+            <p:ph type="sldImg"/>
+          </p:nvPr>
+        </p:nvSpPr>
+        <p:spPr/>
+      </p:sp>
+      <p:sp>
+        <p:nvSpPr>
+          <p:cNvPr id="3" name="Notes Placeholder 2"/>
+          <p:cNvSpPr>
+            <a:spLocks noGrp="1"/>
+          </p:cNvSpPr>
+          <p:nvPr>
+            <p:ph type="body" idx="1"/>
+          </p:nvPr>
+        </p:nvSpPr>
+        <p:spPr/>
+        <p:txBody>
+          <a:bodyPr/>
+          <a:lstStyle/>
+          <a:p>
+            <a:r>
+              <a:rPr lang="en-US" dirty="0"/>
+              <a:t>I record this information in the official logbook of the class after the lesson.</a:t>
+            </a:r>
+            <a:endParaRPr lang="en-US" dirty="0"/>
+          </a:p>
+        </p:txBody>
+      </p:sp>
+      <p:sp>
+        <p:nvSpPr>
+          <p:cNvPr id="4" name="Slide Number Placeholder 3"/>
+          <p:cNvSpPr>
+            <a:spLocks noGrp="1"/>
+          </p:cNvSpPr>
+          <p:nvPr>
+            <p:ph type="sldNum" sz="quarter" idx="10"/>
+          </p:nvPr>
+        </p:nvSpPr>
+        <p:spPr/>
+        <p:txBody>
+          <a:bodyPr/>
+          <a:lstStyle/>
+          <a:p>
+            <a:fld id="{F7021451-1387-4CA6-816F-3879F97B5CBC}" type="slidenum">
+              <a:rPr lang="en-US"/>
+              <a:t>47</a:t>
+            </a:fld>
+            <a:endParaRPr lang="en-US"/>
+          </a:p>
+        </p:txBody>
+      </p:sp>
+    </p:spTree>
+    <p:extLst>
+      <p:ext uri="{BB962C8B-B14F-4D97-AF65-F5344CB8AC3E}">
+        <p14:creationId xmlns:p14="http://schemas.microsoft.com/office/powerpoint/2010/main" val="1024086991"/>
+      </p:ext>
+    </p:extLst>
+  </p:cSld>
+  <p:clrMapOvr>
+    <a:masterClrMapping/>
+  </p:clrMapOvr>
+</p:notes>
+</file>
+
+<file path=ppt/notesSlides/notesSlide48.xml><?xml version="1.0" encoding="utf-8"?>
+<p:notes xmlns:a="http://schemas.openxmlformats.org/drawingml/2006/main" xmlns:r="http://schemas.openxmlformats.org/officeDocument/2006/relationships" xmlns:p="http://schemas.openxmlformats.org/presentationml/2006/main">
+  <p:cSld>
+    <p:spTree>
+      <p:nvGrpSpPr>
+        <p:cNvPr id="1" name=""/>
+        <p:cNvGrpSpPr/>
+        <p:nvPr/>
+      </p:nvGrpSpPr>
+      <p:grpSpPr>
+        <a:xfrm>
+          <a:off x="0" y="0"/>
+          <a:ext cx="0" cy="0"/>
+          <a:chOff x="0" y="0"/>
+          <a:chExt cx="0" cy="0"/>
+        </a:xfrm>
+      </p:grpSpPr>
+      <p:sp>
+        <p:nvSpPr>
+          <p:cNvPr id="2" name="Slide Image Placeholder 1"/>
+          <p:cNvSpPr>
+            <a:spLocks noGrp="1" noRot="1" noChangeAspect="1"/>
+          </p:cNvSpPr>
+          <p:nvPr>
+            <p:ph type="sldImg"/>
+          </p:nvPr>
+        </p:nvSpPr>
+        <p:spPr/>
+      </p:sp>
+      <p:sp>
+        <p:nvSpPr>
+          <p:cNvPr id="3" name="Notes Placeholder 2"/>
+          <p:cNvSpPr>
+            <a:spLocks noGrp="1"/>
+          </p:cNvSpPr>
+          <p:nvPr>
+            <p:ph type="body" idx="1"/>
+          </p:nvPr>
+        </p:nvSpPr>
+        <p:spPr/>
+        <p:txBody>
+          <a:bodyPr/>
+          <a:lstStyle/>
+          <a:p>
+            <a:r>
+              <a:rPr lang="en-US" dirty="0"/>
+              <a:t>I complete the second page of the logbook: the matter taught, the evaluation, the homework and the attendance.</a:t>
+            </a:r>
+            <a:endParaRPr lang="en-US" dirty="0"/>
+          </a:p>
+        </p:txBody>
+      </p:sp>
+      <p:sp>
+        <p:nvSpPr>
+          <p:cNvPr id="4" name="Slide Number Placeholder 3"/>
+          <p:cNvSpPr>
+            <a:spLocks noGrp="1"/>
+          </p:cNvSpPr>
+          <p:nvPr>
+            <p:ph type="sldNum" sz="quarter" idx="10"/>
+          </p:nvPr>
+        </p:nvSpPr>
+        <p:spPr/>
+        <p:txBody>
+          <a:bodyPr/>
+          <a:lstStyle/>
+          <a:p>
+            <a:fld id="{F7021451-1387-4CA6-816F-3879F97B5CBC}" type="slidenum">
+              <a:rPr lang="en-US"/>
+              <a:t>48</a:t>
+            </a:fld>
+            <a:endParaRPr lang="en-US"/>
+          </a:p>
+        </p:txBody>
+      </p:sp>
+    </p:spTree>
+    <p:extLst>
+      <p:ext uri="{BB962C8B-B14F-4D97-AF65-F5344CB8AC3E}">
+        <p14:creationId xmlns:p14="http://schemas.microsoft.com/office/powerpoint/2010/main" val="1024086991"/>
+      </p:ext>
+    </p:extLst>
+  </p:cSld>
+  <p:clrMapOvr>
+    <a:masterClrMapping/>
+  </p:clrMapOvr>
+</p:notes>
+</file>
+
+<file path=ppt/notesSlides/notesSlide49.xml><?xml version="1.0" encoding="utf-8"?>
+<p:notes xmlns:a="http://schemas.openxmlformats.org/drawingml/2006/main" xmlns:r="http://schemas.openxmlformats.org/officeDocument/2006/relationships" xmlns:p="http://schemas.openxmlformats.org/presentationml/2006/main">
+  <p:cSld>
+    <p:spTree>
+      <p:nvGrpSpPr>
+        <p:cNvPr id="1" name=""/>
+        <p:cNvGrpSpPr/>
+        <p:nvPr/>
+      </p:nvGrpSpPr>
+      <p:grpSpPr>
+        <a:xfrm>
+          <a:off x="0" y="0"/>
+          <a:ext cx="0" cy="0"/>
+          <a:chOff x="0" y="0"/>
+          <a:chExt cx="0" cy="0"/>
+        </a:xfrm>
+      </p:grpSpPr>
+      <p:sp>
+        <p:nvSpPr>
+          <p:cNvPr id="2" name="Slide Image Placeholder 1"/>
+          <p:cNvSpPr>
+            <a:spLocks noGrp="1" noRot="1" noChangeAspect="1"/>
+          </p:cNvSpPr>
+          <p:nvPr>
+            <p:ph type="sldImg"/>
+          </p:nvPr>
+        </p:nvSpPr>
+        <p:spPr/>
+      </p:sp>
+      <p:sp>
+        <p:nvSpPr>
+          <p:cNvPr id="3" name="Notes Placeholder 2"/>
+          <p:cNvSpPr>
+            <a:spLocks noGrp="1"/>
+          </p:cNvSpPr>
+          <p:nvPr>
+            <p:ph type="body" idx="1"/>
+          </p:nvPr>
+        </p:nvSpPr>
+        <p:spPr/>
+        <p:txBody>
+          <a:bodyPr/>
+          <a:lstStyle/>
+          <a:p>
+            <a:r>
+              <a:rPr lang="en-US" dirty="0"/>
+              <a:t>This slide is for me, the teacher: it gives the timing of the lesson and what to do if the projector is not available.</a:t>
+            </a:r>
+            <a:endParaRPr lang="en-US" dirty="0"/>
+          </a:p>
+        </p:txBody>
+      </p:sp>
+      <p:sp>
+        <p:nvSpPr>
+          <p:cNvPr id="4" name="Slide Number Placeholder 3"/>
+          <p:cNvSpPr>
+            <a:spLocks noGrp="1"/>
+          </p:cNvSpPr>
+          <p:nvPr>
+            <p:ph type="sldNum" sz="quarter" idx="10"/>
+          </p:nvPr>
+        </p:nvSpPr>
+        <p:spPr/>
+        <p:txBody>
+          <a:bodyPr/>
+          <a:lstStyle/>
+          <a:p>
+            <a:fld id="{F7021451-1387-4CA6-816F-3879F97B5CBC}" type="slidenum">
+              <a:rPr lang="en-US"/>
+              <a:t>49</a:t>
             </a:fld>
             <a:endParaRPr lang="en-US"/>
           </a:p>
@@ -4090,6 +4447,94 @@
             <a:fld id="{F7021451-1387-4CA6-816F-3879F97B5CBC}" type="slidenum">
               <a:rPr lang="en-US"/>
               <a:t>5</a:t>
+            </a:fld>
+            <a:endParaRPr lang="en-US"/>
+          </a:p>
+        </p:txBody>
+      </p:sp>
+    </p:spTree>
+    <p:extLst>
+      <p:ext uri="{BB962C8B-B14F-4D97-AF65-F5344CB8AC3E}">
+        <p14:creationId xmlns:p14="http://schemas.microsoft.com/office/powerpoint/2010/main" val="1024086991"/>
+      </p:ext>
+    </p:extLst>
+  </p:cSld>
+  <p:clrMapOvr>
+    <a:masterClrMapping/>
+  </p:clrMapOvr>
+</p:notes>
+</file>
+
+<file path=ppt/notesSlides/notesSlide50.xml><?xml version="1.0" encoding="utf-8"?>
+<p:notes xmlns:a="http://schemas.openxmlformats.org/drawingml/2006/main" xmlns:r="http://schemas.openxmlformats.org/officeDocument/2006/relationships" xmlns:p="http://schemas.openxmlformats.org/presentationml/2006/main">
+  <p:cSld>
+    <p:spTree>
+      <p:nvGrpSpPr>
+        <p:cNvPr id="1" name=""/>
+        <p:cNvGrpSpPr/>
+        <p:nvPr/>
+      </p:nvGrpSpPr>
+      <p:grpSpPr>
+        <a:xfrm>
+          <a:off x="0" y="0"/>
+          <a:ext cx="0" cy="0"/>
+          <a:chOff x="0" y="0"/>
+          <a:chExt cx="0" cy="0"/>
+        </a:xfrm>
+      </p:grpSpPr>
+      <p:sp>
+        <p:nvSpPr>
+          <p:cNvPr id="2" name="Slide Image Placeholder 1"/>
+          <p:cNvSpPr>
+            <a:spLocks noGrp="1" noRot="1" noChangeAspect="1"/>
+          </p:cNvSpPr>
+          <p:nvPr>
+            <p:ph type="sldImg"/>
+          </p:nvPr>
+        </p:nvSpPr>
+        <p:spPr/>
+      </p:sp>
+      <p:sp>
+        <p:nvSpPr>
+          <p:cNvPr id="3" name="Notes Placeholder 2"/>
+          <p:cNvSpPr>
+            <a:spLocks noGrp="1"/>
+          </p:cNvSpPr>
+          <p:nvPr>
+            <p:ph type="body" idx="1"/>
+          </p:nvPr>
+        </p:nvSpPr>
+        <p:spPr/>
+        <p:txBody>
+          <a:bodyPr/>
+          <a:lstStyle/>
+          <a:p>
+            <a:r>
+              <a:rPr lang="en-US" dirty="0"/>
+              <a:t>These are the references and picture credits used to prepare this lesson.</a:t>
+            </a:r>
+            <a:endParaRPr lang="en-US" dirty="0"/>
+          </a:p>
+        </p:txBody>
+      </p:sp>
+      <p:sp>
+        <p:nvSpPr>
+          <p:cNvPr id="4" name="Slide Number Placeholder 3"/>
+          <p:cNvSpPr>
+            <a:spLocks noGrp="1"/>
+          </p:cNvSpPr>
+          <p:nvPr>
+            <p:ph type="sldNum" sz="quarter" idx="10"/>
+          </p:nvPr>
+        </p:nvSpPr>
+        <p:spPr/>
+        <p:txBody>
+          <a:bodyPr/>
+          <a:lstStyle/>
+          <a:p>
+            <a:fld id="{F7021451-1387-4CA6-816F-3879F97B5CBC}" type="slidenum">
+              <a:rPr lang="en-US"/>
+              <a:t>50</a:t>
             </a:fld>
             <a:endParaRPr lang="en-US"/>
           </a:p>
@@ -5798,7 +6243,7 @@
         <p:spPr>
           <a:xfrm>
             <a:off x="0" y="658368"/>
-            <a:ext cx="5120640" cy="5833872"/>
+            <a:ext cx="2468880" cy="5833872"/>
           </a:xfrm>
           <a:prstGeom prst="rect">
             <a:avLst/>
@@ -5813,8 +6258,8 @@
         </p:nvSpPr>
         <p:spPr>
           <a:xfrm>
-            <a:off x="5349240" y="1005840"/>
-            <a:ext cx="6522415" cy="731520"/>
+            <a:off x="2697480" y="1005840"/>
+            <a:ext cx="9174175" cy="731520"/>
           </a:xfrm>
           <a:prstGeom prst="rect">
             <a:avLst/>
@@ -5854,8 +6299,8 @@
         </p:nvSpPr>
         <p:spPr>
           <a:xfrm>
-            <a:off x="5349240" y="1783080"/>
-            <a:ext cx="6522415" cy="4663440"/>
+            <a:off x="2697480" y="1783080"/>
+            <a:ext cx="9174175" cy="4663440"/>
           </a:xfrm>
           <a:prstGeom prst="rect">
             <a:avLst/>
@@ -5882,7 +6327,7 @@
                 <a:ea typeface="Times New Roman" pitchFamily="34" charset="-122"/>
                 <a:cs typeface="Times New Roman" pitchFamily="34" charset="-120"/>
               </a:rPr>
-              <a:t>From the Benue Bridge in Garoua, Adama sees that the river bends. On the outside of the bend, the bank is steep. On the inside, there is a gentle beach of sand.</a:t>
+              <a:t>From the Benue Bridge in Garoua, Adama sees that the river makes big bends. On the outside of each bend the bank is steep and falls into the water, while on the inside there is a gentle beach of sand. He asks: "Why is one bank steep and the other gentle?"</a:t>
             </a:r>
             <a:endParaRPr lang="en-US" sz="4000" dirty="0"/>
           </a:p>
@@ -6320,7 +6765,7 @@
                 <a:ea typeface="Times New Roman" pitchFamily="34" charset="-122"/>
                 <a:cs typeface="Times New Roman" pitchFamily="34" charset="-120"/>
               </a:rPr>
-              <a:t>Adama does not know why the two banks are different.</a:t>
+              <a:t>Adama does not understand why the two banks of a bend are different.</a:t>
             </a:r>
             <a:endParaRPr lang="en-US" sz="4000" dirty="0"/>
           </a:p>
@@ -6539,7 +6984,7 @@
                 <a:ea typeface="Times New Roman" pitchFamily="34" charset="-122"/>
                 <a:cs typeface="Times New Roman" pitchFamily="34" charset="-120"/>
               </a:rPr>
-              <a:t>Describe the two banks.</a:t>
+              <a:t>Describe the outside of the bend.</a:t>
             </a:r>
             <a:endParaRPr lang="en-US" sz="4000" dirty="0"/>
           </a:p>
@@ -6758,7 +7203,7 @@
                 <a:ea typeface="Times New Roman" pitchFamily="34" charset="-122"/>
                 <a:cs typeface="Times New Roman" pitchFamily="34" charset="-120"/>
               </a:rPr>
-              <a:t>Steep outside; gentle and sandy inside.</a:t>
+              <a:t>The bank is steep.</a:t>
             </a:r>
             <a:endParaRPr lang="en-US" sz="4000" dirty="0"/>
           </a:p>
@@ -6977,7 +7422,7 @@
                 <a:ea typeface="Times New Roman" pitchFamily="34" charset="-122"/>
                 <a:cs typeface="Times New Roman" pitchFamily="34" charset="-120"/>
               </a:rPr>
-              <a:t>What do we call a big bend in a river?</a:t>
+              <a:t>Describe the inside of the bend.</a:t>
             </a:r>
             <a:endParaRPr lang="en-US" sz="4000" dirty="0"/>
           </a:p>
@@ -7196,7 +7641,7 @@
                 <a:ea typeface="Times New Roman" pitchFamily="34" charset="-122"/>
                 <a:cs typeface="Times New Roman" pitchFamily="34" charset="-120"/>
               </a:rPr>
-              <a:t>A meander.</a:t>
+              <a:t>It is a gentle beach of sand.</a:t>
             </a:r>
             <a:endParaRPr lang="en-US" sz="4000" dirty="0"/>
           </a:p>
@@ -7746,7 +8191,7 @@
                 <a:ea typeface="Calibri" pitchFamily="34" charset="-122"/>
                 <a:cs typeface="Calibri" pitchFamily="34" charset="-120"/>
               </a:rPr>
-              <a:t>2. MEANDERS</a:t>
+              <a:t>1. CHARACTERISTICS AND PROCESSES</a:t>
             </a:r>
             <a:endParaRPr lang="en-US" sz="1400" dirty="0"/>
           </a:p>
@@ -7793,7 +8238,7 @@
       </p:sp>
       <p:pic>
         <p:nvPicPr>
-          <p:cNvPr id="4" name="Image 0" descr="/home/claude/f4/img/v2/f4_meander.jpg">    </p:cNvPr>
+          <p:cNvPr id="4" name="Image 0" descr="/home/claude/f4/img/v2/load.gif">    </p:cNvPr>
           <p:cNvPicPr>
             <a:picLocks noChangeAspect="1"/>
           </p:cNvPicPr>
@@ -7807,8 +8252,8 @@
         </p:blipFill>
         <p:spPr>
           <a:xfrm>
-            <a:off x="2250369" y="1783080"/>
-            <a:ext cx="7690957" cy="4270248"/>
+            <a:off x="629930" y="1783080"/>
+            <a:ext cx="10931835" cy="4270248"/>
           </a:xfrm>
           <a:prstGeom prst="rect">
             <a:avLst/>
@@ -7848,7 +8293,7 @@
                 <a:ea typeface="Times New Roman" pitchFamily="34" charset="-122"/>
                 <a:cs typeface="Times New Roman" pitchFamily="34" charset="-120"/>
               </a:rPr>
-              <a:t>A river with big bends, seen from the sky.</a:t>
+              <a:t>Animation: how a river carries its load.</a:t>
             </a:r>
             <a:endParaRPr lang="en-US" sz="1800" dirty="0"/>
           </a:p>
@@ -8555,7 +9000,7 @@
                 <a:ea typeface="Calibri" pitchFamily="34" charset="-122"/>
                 <a:cs typeface="Calibri" pitchFamily="34" charset="-120"/>
               </a:rPr>
-              <a:t>2. MEANDERS</a:t>
+              <a:t>1. CHARACTERISTICS AND PROCESSES</a:t>
             </a:r>
             <a:endParaRPr lang="en-US" sz="1400" dirty="0"/>
           </a:p>
@@ -8662,7 +9107,7 @@
                 <a:ea typeface="Times New Roman" pitchFamily="34" charset="-122"/>
                 <a:cs typeface="Times New Roman" pitchFamily="34" charset="-120"/>
               </a:rPr>
-              <a:t>What do we call these big bends?</a:t>
+              <a:t>How does the river carry the big stones along its bed?</a:t>
             </a:r>
             <a:endParaRPr lang="en-US" sz="4000" dirty="0"/>
           </a:p>
@@ -8774,7 +9219,7 @@
                 <a:ea typeface="Calibri" pitchFamily="34" charset="-122"/>
                 <a:cs typeface="Calibri" pitchFamily="34" charset="-120"/>
               </a:rPr>
-              <a:t>2. MEANDERS</a:t>
+              <a:t>1. CHARACTERISTICS AND PROCESSES</a:t>
             </a:r>
             <a:endParaRPr lang="en-US" sz="1400" dirty="0"/>
           </a:p>
@@ -8881,7 +9326,7 @@
                 <a:ea typeface="Times New Roman" pitchFamily="34" charset="-122"/>
                 <a:cs typeface="Times New Roman" pitchFamily="34" charset="-120"/>
               </a:rPr>
-              <a:t>Meanders.</a:t>
+              <a:t>It rolls them: this is traction.</a:t>
             </a:r>
             <a:endParaRPr lang="en-US" sz="4000" dirty="0"/>
           </a:p>
@@ -8993,7 +9438,7 @@
                 <a:ea typeface="Calibri" pitchFamily="34" charset="-122"/>
                 <a:cs typeface="Calibri" pitchFamily="34" charset="-120"/>
               </a:rPr>
-              <a:t>2. MEANDERS</a:t>
+              <a:t>2. LANDFORMS OF THE MIDDLE COURSE</a:t>
             </a:r>
             <a:endParaRPr lang="en-US" sz="1400" dirty="0"/>
           </a:p>
@@ -9040,7 +9485,7 @@
       </p:sp>
       <p:pic>
         <p:nvPicPr>
-          <p:cNvPr id="4" name="Image 0" descr="/home/claude/f4/img/v2/meander.gif">    </p:cNvPr>
+          <p:cNvPr id="4" name="Image 0" descr="/home/claude/f4/img/v2/f4_meander.jpg">    </p:cNvPr>
           <p:cNvPicPr>
             <a:picLocks noChangeAspect="1"/>
           </p:cNvPicPr>
@@ -9054,8 +9499,8 @@
         </p:blipFill>
         <p:spPr>
           <a:xfrm>
-            <a:off x="629930" y="1783080"/>
-            <a:ext cx="10931835" cy="4270248"/>
+            <a:off x="2250369" y="1783080"/>
+            <a:ext cx="7690957" cy="4270248"/>
           </a:xfrm>
           <a:prstGeom prst="rect">
             <a:avLst/>
@@ -9095,7 +9540,7 @@
                 <a:ea typeface="Times New Roman" pitchFamily="34" charset="-122"/>
                 <a:cs typeface="Times New Roman" pitchFamily="34" charset="-120"/>
               </a:rPr>
-              <a:t>Animation: a meander grows.</a:t>
+              <a:t>A river with big bends.</a:t>
             </a:r>
             <a:endParaRPr lang="en-US" sz="1800" dirty="0"/>
           </a:p>
@@ -9207,7 +9652,7 @@
                 <a:ea typeface="Calibri" pitchFamily="34" charset="-122"/>
                 <a:cs typeface="Calibri" pitchFamily="34" charset="-120"/>
               </a:rPr>
-              <a:t>2. MEANDERS</a:t>
+              <a:t>2. LANDFORMS OF THE MIDDLE COURSE</a:t>
             </a:r>
             <a:endParaRPr lang="en-US" sz="1400" dirty="0"/>
           </a:p>
@@ -9314,7 +9759,7 @@
                 <a:ea typeface="Times New Roman" pitchFamily="34" charset="-122"/>
                 <a:cs typeface="Times New Roman" pitchFamily="34" charset="-120"/>
               </a:rPr>
-              <a:t>Where does the water erode? Where does it deposit?</a:t>
+              <a:t>What do we call these big bends of a river?</a:t>
             </a:r>
             <a:endParaRPr lang="en-US" sz="4000" dirty="0"/>
           </a:p>
@@ -9426,7 +9871,7 @@
                 <a:ea typeface="Calibri" pitchFamily="34" charset="-122"/>
                 <a:cs typeface="Calibri" pitchFamily="34" charset="-120"/>
               </a:rPr>
-              <a:t>2. MEANDERS</a:t>
+              <a:t>2. LANDFORMS OF THE MIDDLE COURSE</a:t>
             </a:r>
             <a:endParaRPr lang="en-US" sz="1400" dirty="0"/>
           </a:p>
@@ -9533,7 +9978,7 @@
                 <a:ea typeface="Times New Roman" pitchFamily="34" charset="-122"/>
                 <a:cs typeface="Times New Roman" pitchFamily="34" charset="-120"/>
               </a:rPr>
-              <a:t>It erodes the outside of the bend and deposits on the inside.</a:t>
+              <a:t>Meanders.</a:t>
             </a:r>
             <a:endParaRPr lang="en-US" sz="4000" dirty="0"/>
           </a:p>
@@ -9645,7 +10090,7 @@
                 <a:ea typeface="Calibri" pitchFamily="34" charset="-122"/>
                 <a:cs typeface="Calibri" pitchFamily="34" charset="-120"/>
               </a:rPr>
-              <a:t>2. RIVER CLIFF AND SLIP-OFF SLOPE</a:t>
+              <a:t>2. LANDFORMS OF THE MIDDLE COURSE</a:t>
             </a:r>
             <a:endParaRPr lang="en-US" sz="1400" dirty="0"/>
           </a:p>
@@ -9692,7 +10137,7 @@
       </p:sp>
       <p:pic>
         <p:nvPicPr>
-          <p:cNvPr id="4" name="Image 0" descr="/home/claude/f4/img/v2/rivercliff_big.png">    </p:cNvPr>
+          <p:cNvPr id="4" name="Image 0" descr="/home/claude/f4/img/v2/meander.gif">    </p:cNvPr>
           <p:cNvPicPr>
             <a:picLocks noChangeAspect="1"/>
           </p:cNvPicPr>
@@ -9747,7 +10192,7 @@
                 <a:ea typeface="Times New Roman" pitchFamily="34" charset="-122"/>
                 <a:cs typeface="Times New Roman" pitchFamily="34" charset="-120"/>
               </a:rPr>
-              <a:t>A cross-section of a meander.</a:t>
+              <a:t>Animation: erosion and deposition in a meander.</a:t>
             </a:r>
             <a:endParaRPr lang="en-US" sz="1800" dirty="0"/>
           </a:p>
@@ -9859,7 +10304,7 @@
                 <a:ea typeface="Calibri" pitchFamily="34" charset="-122"/>
                 <a:cs typeface="Calibri" pitchFamily="34" charset="-120"/>
               </a:rPr>
-              <a:t>2. RIVER CLIFF AND SLIP-OFF SLOPE</a:t>
+              <a:t>2. LANDFORMS OF THE MIDDLE COURSE</a:t>
             </a:r>
             <a:endParaRPr lang="en-US" sz="1400" dirty="0"/>
           </a:p>
@@ -9924,7 +10369,7 @@
                 <a:ea typeface="Times New Roman" pitchFamily="34" charset="-122"/>
                 <a:cs typeface="Times New Roman" pitchFamily="34" charset="-120"/>
               </a:rPr>
-              <a:t>Activity 3: Question</a:t>
+              <a:t>Activity 3: Question 1</a:t>
             </a:r>
             <a:endParaRPr lang="en-US" sz="3600" dirty="0"/>
           </a:p>
@@ -9966,7 +10411,7 @@
                 <a:ea typeface="Times New Roman" pitchFamily="34" charset="-122"/>
                 <a:cs typeface="Times New Roman" pitchFamily="34" charset="-120"/>
               </a:rPr>
-              <a:t>What is the steep bank on the outside of the bend called?</a:t>
+              <a:t>On which side of the bend does the water erode?</a:t>
             </a:r>
             <a:endParaRPr lang="en-US" sz="4000" dirty="0"/>
           </a:p>
@@ -10078,7 +10523,7 @@
                 <a:ea typeface="Calibri" pitchFamily="34" charset="-122"/>
                 <a:cs typeface="Calibri" pitchFamily="34" charset="-120"/>
               </a:rPr>
-              <a:t>2. RIVER CLIFF AND SLIP-OFF SLOPE</a:t>
+              <a:t>2. LANDFORMS OF THE MIDDLE COURSE</a:t>
             </a:r>
             <a:endParaRPr lang="en-US" sz="1400" dirty="0"/>
           </a:p>
@@ -10143,7 +10588,7 @@
                 <a:ea typeface="Times New Roman" pitchFamily="34" charset="-122"/>
                 <a:cs typeface="Times New Roman" pitchFamily="34" charset="-120"/>
               </a:rPr>
-              <a:t>Activity 3: Answer</a:t>
+              <a:t>Activity 3: Answer 1</a:t>
             </a:r>
             <a:endParaRPr lang="en-US" sz="3600" dirty="0"/>
           </a:p>
@@ -10185,7 +10630,7 @@
                 <a:ea typeface="Times New Roman" pitchFamily="34" charset="-122"/>
                 <a:cs typeface="Times New Roman" pitchFamily="34" charset="-120"/>
               </a:rPr>
-              <a:t>A river cliff.</a:t>
+              <a:t>On the outside.</a:t>
             </a:r>
             <a:endParaRPr lang="en-US" sz="4000" dirty="0"/>
           </a:p>
@@ -10297,7 +10742,7 @@
                 <a:ea typeface="Calibri" pitchFamily="34" charset="-122"/>
                 <a:cs typeface="Calibri" pitchFamily="34" charset="-120"/>
               </a:rPr>
-              <a:t>BOARD SUMMARY</a:t>
+              <a:t>2. LANDFORMS OF THE MIDDLE COURSE</a:t>
             </a:r>
             <a:endParaRPr lang="en-US" sz="1400" dirty="0"/>
           </a:p>
@@ -10362,7 +10807,7 @@
                 <a:ea typeface="Times New Roman" pitchFamily="34" charset="-122"/>
                 <a:cs typeface="Times New Roman" pitchFamily="34" charset="-120"/>
               </a:rPr>
-              <a:t>Board Summary</a:t>
+              <a:t>Activity 3: Question 2</a:t>
             </a:r>
             <a:endParaRPr lang="en-US" sz="3600" dirty="0"/>
           </a:p>
@@ -10396,7 +10841,7 @@
               <a:buNone/>
             </a:pPr>
             <a:r>
-              <a:rPr lang="en-US" sz="4000" b="1" dirty="0">
+              <a:rPr lang="en-US" sz="4000" dirty="0">
                 <a:solidFill>
                   <a:srgbClr val="111111"/>
                 </a:solidFill>
@@ -10404,47 +10849,7 @@
                 <a:ea typeface="Times New Roman" pitchFamily="34" charset="-122"/>
                 <a:cs typeface="Times New Roman" pitchFamily="34" charset="-120"/>
               </a:rPr>
-              <a:t>Topic: Denudation Processes, Landforms and Impacts on Man</a:t>
-            </a:r>
-            <a:endParaRPr lang="en-US" sz="4000" dirty="0"/>
-          </a:p>
-          <a:p>
-            <a:pPr algn="l" indent="0" marL="0">
-              <a:spcAft>
-                <a:spcPts val="800"/>
-              </a:spcAft>
-              <a:buNone/>
-            </a:pPr>
-            <a:r>
-              <a:rPr lang="en-US" sz="4000" b="1" dirty="0">
-                <a:solidFill>
-                  <a:srgbClr val="111111"/>
-                </a:solidFill>
-                <a:latin typeface="Times New Roman" pitchFamily="34" charset="0"/>
-                <a:ea typeface="Times New Roman" pitchFamily="34" charset="-122"/>
-                <a:cs typeface="Times New Roman" pitchFamily="34" charset="-120"/>
-              </a:rPr>
-              <a:t>Sub-topic: The Work of Rivers on the Landscape and Impacts on Man</a:t>
-            </a:r>
-            <a:endParaRPr lang="en-US" sz="4000" dirty="0"/>
-          </a:p>
-          <a:p>
-            <a:pPr algn="l" indent="0" marL="0">
-              <a:spcAft>
-                <a:spcPts val="800"/>
-              </a:spcAft>
-              <a:buNone/>
-            </a:pPr>
-            <a:r>
-              <a:rPr lang="en-US" sz="4000" b="1" dirty="0">
-                <a:solidFill>
-                  <a:srgbClr val="990011"/>
-                </a:solidFill>
-                <a:latin typeface="Times New Roman" pitchFamily="34" charset="0"/>
-                <a:ea typeface="Times New Roman" pitchFamily="34" charset="-122"/>
-                <a:cs typeface="Times New Roman" pitchFamily="34" charset="-120"/>
-              </a:rPr>
-              <a:t>Lesson 20: The Middle Course of a River</a:t>
+              <a:t>On which side does it deposit?</a:t>
             </a:r>
             <a:endParaRPr lang="en-US" sz="4000" dirty="0"/>
           </a:p>
@@ -10556,7 +10961,7 @@
                 <a:ea typeface="Calibri" pitchFamily="34" charset="-122"/>
                 <a:cs typeface="Calibri" pitchFamily="34" charset="-120"/>
               </a:rPr>
-              <a:t>BOARD SUMMARY</a:t>
+              <a:t>2. LANDFORMS OF THE MIDDLE COURSE</a:t>
             </a:r>
             <a:endParaRPr lang="en-US" sz="1400" dirty="0"/>
           </a:p>
@@ -10621,7 +11026,7 @@
                 <a:ea typeface="Times New Roman" pitchFamily="34" charset="-122"/>
                 <a:cs typeface="Times New Roman" pitchFamily="34" charset="-120"/>
               </a:rPr>
-              <a:t>1. Characteristics of the Middle Course</a:t>
+              <a:t>Activity 3: Answer 2</a:t>
             </a:r>
             <a:endParaRPr lang="en-US" sz="3600" dirty="0"/>
           </a:p>
@@ -10655,7 +11060,7 @@
               <a:buNone/>
             </a:pPr>
             <a:r>
-              <a:rPr lang="en-US" sz="4000" i="1" dirty="0">
+              <a:rPr lang="en-US" sz="4000" dirty="0">
                 <a:solidFill>
                   <a:srgbClr val="111111"/>
                 </a:solidFill>
@@ -10663,81 +11068,7 @@
                 <a:ea typeface="Times New Roman" pitchFamily="34" charset="-122"/>
                 <a:cs typeface="Times New Roman" pitchFamily="34" charset="-120"/>
               </a:rPr>
-              <a:t>The middle course has the following characteristics:</a:t>
-            </a:r>
-            <a:endParaRPr lang="en-US" sz="4000" dirty="0"/>
-          </a:p>
-          <a:p>
-            <a:pPr algn="l" indent="0" marL="0">
-              <a:spcAft>
-                <a:spcPts val="800"/>
-              </a:spcAft>
-              <a:buNone/>
-            </a:pPr>
-            <a:r>
-              <a:rPr lang="en-US" sz="4000" b="1" dirty="0">
-                <a:solidFill>
-                  <a:srgbClr val="111111"/>
-                </a:solidFill>
-                <a:latin typeface="Times New Roman" pitchFamily="34" charset="0"/>
-                <a:ea typeface="Times New Roman" pitchFamily="34" charset="-122"/>
-                <a:cs typeface="Times New Roman" pitchFamily="34" charset="-120"/>
-              </a:rPr>
-              <a:t>Slope: </a:t>
-            </a:r>
-            <a:pPr algn="l" indent="0" marL="0">
-              <a:spcAft>
-                <a:spcPts val="800"/>
-              </a:spcAft>
-              <a:buNone/>
-            </a:pPr>
-            <a:r>
-              <a:rPr lang="en-US" sz="4000" dirty="0">
-                <a:solidFill>
-                  <a:srgbClr val="111111"/>
-                </a:solidFill>
-                <a:latin typeface="Times New Roman" pitchFamily="34" charset="0"/>
-                <a:ea typeface="Times New Roman" pitchFamily="34" charset="-122"/>
-                <a:cs typeface="Times New Roman" pitchFamily="34" charset="-120"/>
-              </a:rPr>
-              <a:t>The slope is gentle.</a:t>
-            </a:r>
-            <a:endParaRPr lang="en-US" sz="4000" dirty="0"/>
-          </a:p>
-          <a:p>
-            <a:pPr algn="l" indent="0" marL="0">
-              <a:spcAft>
-                <a:spcPts val="800"/>
-              </a:spcAft>
-              <a:buNone/>
-            </a:pPr>
-            <a:r>
-              <a:rPr lang="en-US" sz="4000" b="1" dirty="0">
-                <a:solidFill>
-                  <a:srgbClr val="111111"/>
-                </a:solidFill>
-                <a:latin typeface="Times New Roman" pitchFamily="34" charset="0"/>
-                <a:ea typeface="Times New Roman" pitchFamily="34" charset="-122"/>
-                <a:cs typeface="Times New Roman" pitchFamily="34" charset="-120"/>
-              </a:rPr>
-              <a:t>Valley: </a:t>
-            </a:r>
-            <a:pPr algn="l" indent="0" marL="0">
-              <a:spcAft>
-                <a:spcPts val="800"/>
-              </a:spcAft>
-              <a:buNone/>
-            </a:pPr>
-            <a:r>
-              <a:rPr lang="en-US" sz="4000" dirty="0">
-                <a:solidFill>
-                  <a:srgbClr val="111111"/>
-                </a:solidFill>
-                <a:latin typeface="Times New Roman" pitchFamily="34" charset="0"/>
-                <a:ea typeface="Times New Roman" pitchFamily="34" charset="-122"/>
-                <a:cs typeface="Times New Roman" pitchFamily="34" charset="-120"/>
-              </a:rPr>
-              <a:t>The valley is wider with a flat floor.</a:t>
+              <a:t>On the inside.</a:t>
             </a:r>
             <a:endParaRPr lang="en-US" sz="4000" dirty="0"/>
           </a:p>
@@ -11923,7 +12254,7 @@
                 <a:ea typeface="Times New Roman" pitchFamily="34" charset="-122"/>
                 <a:cs typeface="Times New Roman" pitchFamily="34" charset="-120"/>
               </a:rPr>
-              <a:t>1. Characteristics of the Middle Course (continued)</a:t>
+              <a:t>Board Summary</a:t>
             </a:r>
             <a:endParaRPr lang="en-US" sz="3600" dirty="0"/>
           </a:p>
@@ -11965,8 +12296,11 @@
                 <a:ea typeface="Times New Roman" pitchFamily="34" charset="-122"/>
                 <a:cs typeface="Times New Roman" pitchFamily="34" charset="-120"/>
               </a:rPr>
-              <a:t>Main process: </a:t>
-            </a:r>
+              <a:t>Topic: Denudation Processes, Landforms and Impacts on Man</a:t>
+            </a:r>
+            <a:endParaRPr lang="en-US" sz="4000" dirty="0"/>
+          </a:p>
+          <a:p>
             <a:pPr algn="l" indent="0" marL="0">
               <a:spcAft>
                 <a:spcPts val="800"/>
@@ -11974,7 +12308,7 @@
               <a:buNone/>
             </a:pPr>
             <a:r>
-              <a:rPr lang="en-US" sz="4000" dirty="0">
+              <a:rPr lang="en-US" sz="4000" b="1" dirty="0">
                 <a:solidFill>
                   <a:srgbClr val="111111"/>
                 </a:solidFill>
@@ -11982,7 +12316,27 @@
                 <a:ea typeface="Times New Roman" pitchFamily="34" charset="-122"/>
                 <a:cs typeface="Times New Roman" pitchFamily="34" charset="-120"/>
               </a:rPr>
-              <a:t>The river cuts sideways into its banks by lateral erosion.</a:t>
+              <a:t>Sub-topic: The Work of Rivers on the Landscape and Impacts on Man</a:t>
+            </a:r>
+            <a:endParaRPr lang="en-US" sz="4000" dirty="0"/>
+          </a:p>
+          <a:p>
+            <a:pPr algn="l" indent="0" marL="0">
+              <a:spcAft>
+                <a:spcPts val="800"/>
+              </a:spcAft>
+              <a:buNone/>
+            </a:pPr>
+            <a:r>
+              <a:rPr lang="en-US" sz="4000" b="1" dirty="0">
+                <a:solidFill>
+                  <a:srgbClr val="990011"/>
+                </a:solidFill>
+                <a:latin typeface="Times New Roman" pitchFamily="34" charset="0"/>
+                <a:ea typeface="Times New Roman" pitchFamily="34" charset="-122"/>
+                <a:cs typeface="Times New Roman" pitchFamily="34" charset="-120"/>
+              </a:rPr>
+              <a:t>Lesson 20: The Middle Course of a River</a:t>
             </a:r>
             <a:endParaRPr lang="en-US" sz="4000" dirty="0"/>
           </a:p>
@@ -12117,7 +12471,7 @@
         <p:spPr>
           <a:xfrm>
             <a:off x="0" y="658368"/>
-            <a:ext cx="3840480" cy="5833872"/>
+            <a:ext cx="2468880" cy="5833872"/>
           </a:xfrm>
           <a:prstGeom prst="rect">
             <a:avLst/>
@@ -12132,8 +12486,8 @@
         </p:nvSpPr>
         <p:spPr>
           <a:xfrm>
-            <a:off x="4069080" y="1005840"/>
-            <a:ext cx="7802575" cy="731520"/>
+            <a:off x="2697480" y="1005840"/>
+            <a:ext cx="9174175" cy="731520"/>
           </a:xfrm>
           <a:prstGeom prst="rect">
             <a:avLst/>
@@ -12159,7 +12513,7 @@
                 <a:ea typeface="Times New Roman" pitchFamily="34" charset="-122"/>
                 <a:cs typeface="Times New Roman" pitchFamily="34" charset="-120"/>
               </a:rPr>
-              <a:t>2. Landforms of the Middle Course</a:t>
+              <a:t>DEFINITIONS</a:t>
             </a:r>
             <a:endParaRPr lang="en-US" sz="3600" dirty="0"/>
           </a:p>
@@ -12173,8 +12527,8 @@
         </p:nvSpPr>
         <p:spPr>
           <a:xfrm>
-            <a:off x="4069080" y="1783080"/>
-            <a:ext cx="7802575" cy="4663440"/>
+            <a:off x="2697480" y="1783080"/>
+            <a:ext cx="9174175" cy="4663440"/>
           </a:xfrm>
           <a:prstGeom prst="rect">
             <a:avLst/>
@@ -12201,7 +12555,7 @@
                 <a:ea typeface="Times New Roman" pitchFamily="34" charset="-122"/>
                 <a:cs typeface="Times New Roman" pitchFamily="34" charset="-120"/>
               </a:rPr>
-              <a:t>The middle course has the following landforms:</a:t>
+              <a:t>The key terms of this lesson are defined as follows:</a:t>
             </a:r>
             <a:endParaRPr lang="en-US" sz="4000" dirty="0"/>
           </a:p>
@@ -12221,7 +12575,7 @@
                 <a:ea typeface="Times New Roman" pitchFamily="34" charset="-122"/>
                 <a:cs typeface="Times New Roman" pitchFamily="34" charset="-120"/>
               </a:rPr>
-              <a:t>Meander: </a:t>
+              <a:t>Middle course: </a:t>
             </a:r>
             <a:pPr algn="l" indent="0" marL="0">
               <a:spcAft>
@@ -12238,7 +12592,7 @@
                 <a:ea typeface="Times New Roman" pitchFamily="34" charset="-122"/>
                 <a:cs typeface="Times New Roman" pitchFamily="34" charset="-120"/>
               </a:rPr>
-              <a:t>It is a large bend in a river.</a:t>
+              <a:t>It is the part of a river between the upper and the lower course, where the slope becomes gentle.</a:t>
             </a:r>
             <a:endParaRPr lang="en-US" sz="4000" dirty="0"/>
           </a:p>
@@ -12258,7 +12612,7 @@
                 <a:ea typeface="Times New Roman" pitchFamily="34" charset="-122"/>
                 <a:cs typeface="Times New Roman" pitchFamily="34" charset="-120"/>
               </a:rPr>
-              <a:t>River cliff: </a:t>
+              <a:t>Lateral erosion: </a:t>
             </a:r>
             <a:pPr algn="l" indent="0" marL="0">
               <a:spcAft>
@@ -12275,7 +12629,7 @@
                 <a:ea typeface="Times New Roman" pitchFamily="34" charset="-122"/>
                 <a:cs typeface="Times New Roman" pitchFamily="34" charset="-120"/>
               </a:rPr>
-              <a:t>It is a steep bank on the outside of a bend, where the fast water erodes.</a:t>
+              <a:t>It is the sideways cutting of a river into its banks.</a:t>
             </a:r>
             <a:endParaRPr lang="en-US" sz="4000" dirty="0"/>
           </a:p>
@@ -12410,7 +12764,7 @@
         <p:spPr>
           <a:xfrm>
             <a:off x="0" y="658368"/>
-            <a:ext cx="5120640" cy="5833872"/>
+            <a:ext cx="2468880" cy="5833872"/>
           </a:xfrm>
           <a:prstGeom prst="rect">
             <a:avLst/>
@@ -12425,8 +12779,8 @@
         </p:nvSpPr>
         <p:spPr>
           <a:xfrm>
-            <a:off x="5349240" y="1005840"/>
-            <a:ext cx="6522415" cy="731520"/>
+            <a:off x="2697480" y="1005840"/>
+            <a:ext cx="9174175" cy="731520"/>
           </a:xfrm>
           <a:prstGeom prst="rect">
             <a:avLst/>
@@ -12452,7 +12806,7 @@
                 <a:ea typeface="Times New Roman" pitchFamily="34" charset="-122"/>
                 <a:cs typeface="Times New Roman" pitchFamily="34" charset="-120"/>
               </a:rPr>
-              <a:t>2. Landforms of the Middle Course (continued)</a:t>
+              <a:t>1. Main Characteristics and Processes of the Middle Course</a:t>
             </a:r>
             <a:endParaRPr lang="en-US" sz="3600" dirty="0"/>
           </a:p>
@@ -12466,8 +12820,47 @@
         </p:nvSpPr>
         <p:spPr>
           <a:xfrm>
-            <a:off x="5349240" y="1783080"/>
-            <a:ext cx="6522415" cy="4663440"/>
+            <a:off x="2697480" y="1737360"/>
+            <a:ext cx="9174175" cy="457200"/>
+          </a:xfrm>
+          <a:prstGeom prst="rect">
+            <a:avLst/>
+          </a:prstGeom>
+          <a:noFill/>
+          <a:ln/>
+        </p:spPr>
+        <p:txBody>
+          <a:bodyPr wrap="square" lIns="0" tIns="0" rIns="0" bIns="0" rtlCol="0" anchor="ctr"/>
+          <a:lstStyle/>
+          <a:p>
+            <a:pPr algn="l" indent="0" marL="0">
+              <a:buNone/>
+            </a:pPr>
+            <a:r>
+              <a:rPr lang="en-US" sz="3200" b="1" dirty="0">
+                <a:solidFill>
+                  <a:srgbClr val="990011"/>
+                </a:solidFill>
+                <a:latin typeface="Times New Roman" pitchFamily="34" charset="0"/>
+                <a:ea typeface="Times New Roman" pitchFamily="34" charset="-122"/>
+                <a:cs typeface="Times New Roman" pitchFamily="34" charset="-120"/>
+              </a:rPr>
+              <a:t>A) Characteristics</a:t>
+            </a:r>
+            <a:endParaRPr lang="en-US" sz="3200" dirty="0"/>
+          </a:p>
+        </p:txBody>
+      </p:sp>
+      <p:sp>
+        <p:nvSpPr>
+          <p:cNvPr id="6" name="Text 3"/>
+          <p:cNvSpPr/>
+          <p:nvPr/>
+        </p:nvSpPr>
+        <p:spPr>
+          <a:xfrm>
+            <a:off x="2697480" y="2240280"/>
+            <a:ext cx="9174175" cy="4206240"/>
           </a:xfrm>
           <a:prstGeom prst="rect">
             <a:avLst/>
@@ -12486,7 +12879,7 @@
               <a:buNone/>
             </a:pPr>
             <a:r>
-              <a:rPr lang="en-US" sz="4000" b="1" dirty="0">
+              <a:rPr lang="en-US" sz="4000" i="1" dirty="0">
                 <a:solidFill>
                   <a:srgbClr val="111111"/>
                 </a:solidFill>
@@ -12494,8 +12887,11 @@
                 <a:ea typeface="Times New Roman" pitchFamily="34" charset="-122"/>
                 <a:cs typeface="Times New Roman" pitchFamily="34" charset="-120"/>
               </a:rPr>
-              <a:t>Slip-off slope: </a:t>
-            </a:r>
+              <a:t>The middle course has the following characteristics:</a:t>
+            </a:r>
+            <a:endParaRPr lang="en-US" sz="4000" dirty="0"/>
+          </a:p>
+          <a:p>
             <a:pPr algn="l" indent="0" marL="0">
               <a:spcAft>
                 <a:spcPts val="800"/>
@@ -12503,7 +12899,7 @@
               <a:buNone/>
             </a:pPr>
             <a:r>
-              <a:rPr lang="en-US" sz="4000" dirty="0">
+              <a:rPr lang="en-US" sz="4000" b="1" dirty="0">
                 <a:solidFill>
                   <a:srgbClr val="111111"/>
                 </a:solidFill>
@@ -12511,7 +12907,61 @@
                 <a:ea typeface="Times New Roman" pitchFamily="34" charset="-122"/>
                 <a:cs typeface="Times New Roman" pitchFamily="34" charset="-120"/>
               </a:rPr>
-              <a:t>It is a gentle bank on the inside of a bend, where the slow water deposits.</a:t>
+              <a:t>Gentle slope: </a:t>
+            </a:r>
+            <a:pPr algn="l" indent="0" marL="0">
+              <a:spcAft>
+                <a:spcPts val="800"/>
+              </a:spcAft>
+              <a:buNone/>
+            </a:pPr>
+            <a:r>
+              <a:rPr lang="en-US" sz="4000" dirty="0">
+                <a:solidFill>
+                  <a:srgbClr val="111111"/>
+                </a:solidFill>
+                <a:latin typeface="Times New Roman" pitchFamily="34" charset="0"/>
+                <a:ea typeface="Times New Roman" pitchFamily="34" charset="-122"/>
+                <a:cs typeface="Times New Roman" pitchFamily="34" charset="-120"/>
+              </a:rPr>
+              <a:t>The slope becomes gentle, and the water flows more smoothly.</a:t>
+            </a:r>
+            <a:endParaRPr lang="en-US" sz="4000" dirty="0"/>
+          </a:p>
+          <a:p>
+            <a:pPr algn="l" indent="0" marL="0">
+              <a:spcAft>
+                <a:spcPts val="800"/>
+              </a:spcAft>
+              <a:buNone/>
+            </a:pPr>
+            <a:r>
+              <a:rPr lang="en-US" sz="4000" b="1" dirty="0">
+                <a:solidFill>
+                  <a:srgbClr val="111111"/>
+                </a:solidFill>
+                <a:latin typeface="Times New Roman" pitchFamily="34" charset="0"/>
+                <a:ea typeface="Times New Roman" pitchFamily="34" charset="-122"/>
+                <a:cs typeface="Times New Roman" pitchFamily="34" charset="-120"/>
+              </a:rPr>
+              <a:t>Wider valley: </a:t>
+            </a:r>
+            <a:pPr algn="l" indent="0" marL="0">
+              <a:spcAft>
+                <a:spcPts val="800"/>
+              </a:spcAft>
+              <a:buNone/>
+            </a:pPr>
+            <a:r>
+              <a:rPr lang="en-US" sz="4000" dirty="0">
+                <a:solidFill>
+                  <a:srgbClr val="111111"/>
+                </a:solidFill>
+                <a:latin typeface="Times New Roman" pitchFamily="34" charset="0"/>
+                <a:ea typeface="Times New Roman" pitchFamily="34" charset="-122"/>
+                <a:cs typeface="Times New Roman" pitchFamily="34" charset="-120"/>
+              </a:rPr>
+              <a:t>The valley is wider and more open, with a flat floor.</a:t>
             </a:r>
             <a:endParaRPr lang="en-US" sz="4000" dirty="0"/>
           </a:p>
@@ -12629,48 +13079,9 @@
           </a:p>
         </p:txBody>
       </p:sp>
-      <p:sp>
-        <p:nvSpPr>
-          <p:cNvPr id="3" name="Text 1"/>
-          <p:cNvSpPr/>
-          <p:nvPr/>
-        </p:nvSpPr>
-        <p:spPr>
-          <a:xfrm>
-            <a:off x="457200" y="1005840"/>
-            <a:ext cx="11277295" cy="731520"/>
-          </a:xfrm>
-          <a:prstGeom prst="rect">
-            <a:avLst/>
-          </a:prstGeom>
-          <a:noFill/>
-          <a:ln/>
-        </p:spPr>
-        <p:txBody>
-          <a:bodyPr wrap="square" lIns="0" tIns="0" rIns="0" bIns="0" rtlCol="0" anchor="ctr"/>
-          <a:lstStyle/>
-          <a:p>
-            <a:pPr algn="ctr" indent="0" marL="0">
-              <a:buNone/>
-            </a:pPr>
-            <a:r>
-              <a:rPr lang="en-US" sz="3600" b="1" dirty="0">
-                <a:solidFill>
-                  <a:srgbClr val="990011"/>
-                </a:solidFill>
-                <a:latin typeface="Times New Roman" pitchFamily="34" charset="0"/>
-                <a:ea typeface="Times New Roman" pitchFamily="34" charset="-122"/>
-                <a:cs typeface="Times New Roman" pitchFamily="34" charset="-120"/>
-              </a:rPr>
-              <a:t>2. Landforms of the Middle Course</a:t>
-            </a:r>
-            <a:endParaRPr lang="en-US" sz="3600" dirty="0"/>
-          </a:p>
-        </p:txBody>
-      </p:sp>
       <p:pic>
         <p:nvPicPr>
-          <p:cNvPr id="4" name="Image 0" descr="/home/claude/f4/img/v2/meander_last.png">    </p:cNvPr>
+          <p:cNvPr id="3" name="Image 0" descr="/home/claude/f4/img/minesec_sheet.png">    </p:cNvPr>
           <p:cNvPicPr>
             <a:picLocks noChangeAspect="1"/>
           </p:cNvPicPr>
@@ -12684,8 +13095,8 @@
         </p:blipFill>
         <p:spPr>
           <a:xfrm>
-            <a:off x="629930" y="1783080"/>
-            <a:ext cx="10931835" cy="4270248"/>
+            <a:off x="0" y="658368"/>
+            <a:ext cx="5120640" cy="5833872"/>
           </a:xfrm>
           <a:prstGeom prst="rect">
             <a:avLst/>
@@ -12694,14 +13105,14 @@
       </p:pic>
       <p:sp>
         <p:nvSpPr>
-          <p:cNvPr id="5" name="Text 2"/>
+          <p:cNvPr id="4" name="Text 1"/>
           <p:cNvSpPr/>
           <p:nvPr/>
         </p:nvSpPr>
         <p:spPr>
           <a:xfrm>
-            <a:off x="457200" y="6089904"/>
-            <a:ext cx="11277295" cy="347472"/>
+            <a:off x="5349240" y="1005840"/>
+            <a:ext cx="6522415" cy="731520"/>
           </a:xfrm>
           <a:prstGeom prst="rect">
             <a:avLst/>
@@ -12710,24 +13121,161 @@
           <a:ln/>
         </p:spPr>
         <p:txBody>
-          <a:bodyPr wrap="square" lIns="0" tIns="0" rIns="0" bIns="0" rtlCol="0" anchor="ctr"/>
+          <a:bodyPr wrap="square" lIns="0" tIns="0" rIns="0" bIns="0" rtlCol="0" anchor="ctr">
+            <a:normAutofit/>
+          </a:bodyPr>
           <a:lstStyle/>
           <a:p>
             <a:pPr algn="ctr" indent="0" marL="0">
               <a:buNone/>
             </a:pPr>
             <a:r>
-              <a:rPr lang="en-US" sz="1800" i="1" dirty="0">
-                <a:solidFill>
-                  <a:srgbClr val="555555"/>
+              <a:rPr lang="en-US" sz="3600" b="1" dirty="0">
+                <a:solidFill>
+                  <a:srgbClr val="990011"/>
                 </a:solidFill>
                 <a:latin typeface="Times New Roman" pitchFamily="34" charset="0"/>
                 <a:ea typeface="Times New Roman" pitchFamily="34" charset="-122"/>
                 <a:cs typeface="Times New Roman" pitchFamily="34" charset="-120"/>
               </a:rPr>
-              <a:t>Illustration: a meander</a:t>
-            </a:r>
-            <a:endParaRPr lang="en-US" sz="1800" dirty="0"/>
+              <a:t>1. Main Characteristics and Processes of the Middle Course</a:t>
+            </a:r>
+            <a:endParaRPr lang="en-US" sz="3600" dirty="0"/>
+          </a:p>
+        </p:txBody>
+      </p:sp>
+      <p:sp>
+        <p:nvSpPr>
+          <p:cNvPr id="5" name="Text 2"/>
+          <p:cNvSpPr/>
+          <p:nvPr/>
+        </p:nvSpPr>
+        <p:spPr>
+          <a:xfrm>
+            <a:off x="5349240" y="1737360"/>
+            <a:ext cx="6522415" cy="457200"/>
+          </a:xfrm>
+          <a:prstGeom prst="rect">
+            <a:avLst/>
+          </a:prstGeom>
+          <a:noFill/>
+          <a:ln/>
+        </p:spPr>
+        <p:txBody>
+          <a:bodyPr wrap="square" lIns="0" tIns="0" rIns="0" bIns="0" rtlCol="0" anchor="ctr"/>
+          <a:lstStyle/>
+          <a:p>
+            <a:pPr algn="l" indent="0" marL="0">
+              <a:buNone/>
+            </a:pPr>
+            <a:r>
+              <a:rPr lang="en-US" sz="3200" b="1" dirty="0">
+                <a:solidFill>
+                  <a:srgbClr val="990011"/>
+                </a:solidFill>
+                <a:latin typeface="Times New Roman" pitchFamily="34" charset="0"/>
+                <a:ea typeface="Times New Roman" pitchFamily="34" charset="-122"/>
+                <a:cs typeface="Times New Roman" pitchFamily="34" charset="-120"/>
+              </a:rPr>
+              <a:t>A) Characteristics (continued)</a:t>
+            </a:r>
+            <a:endParaRPr lang="en-US" sz="3200" dirty="0"/>
+          </a:p>
+        </p:txBody>
+      </p:sp>
+      <p:sp>
+        <p:nvSpPr>
+          <p:cNvPr id="6" name="Text 3"/>
+          <p:cNvSpPr/>
+          <p:nvPr/>
+        </p:nvSpPr>
+        <p:spPr>
+          <a:xfrm>
+            <a:off x="5349240" y="2240280"/>
+            <a:ext cx="6522415" cy="4206240"/>
+          </a:xfrm>
+          <a:prstGeom prst="rect">
+            <a:avLst/>
+          </a:prstGeom>
+          <a:noFill/>
+          <a:ln/>
+        </p:spPr>
+        <p:txBody>
+          <a:bodyPr wrap="square" lIns="0" tIns="0" rIns="0" bIns="0" rtlCol="0" anchor="t"/>
+          <a:lstStyle/>
+          <a:p>
+            <a:pPr algn="l" indent="0" marL="0">
+              <a:spcAft>
+                <a:spcPts val="800"/>
+              </a:spcAft>
+              <a:buNone/>
+            </a:pPr>
+            <a:r>
+              <a:rPr lang="en-US" sz="4000" b="1" dirty="0">
+                <a:solidFill>
+                  <a:srgbClr val="111111"/>
+                </a:solidFill>
+                <a:latin typeface="Times New Roman" pitchFamily="34" charset="0"/>
+                <a:ea typeface="Times New Roman" pitchFamily="34" charset="-122"/>
+                <a:cs typeface="Times New Roman" pitchFamily="34" charset="-120"/>
+              </a:rPr>
+              <a:t>More water: </a:t>
+            </a:r>
+            <a:pPr algn="l" indent="0" marL="0">
+              <a:spcAft>
+                <a:spcPts val="800"/>
+              </a:spcAft>
+              <a:buNone/>
+            </a:pPr>
+            <a:r>
+              <a:rPr lang="en-US" sz="4000" dirty="0">
+                <a:solidFill>
+                  <a:srgbClr val="111111"/>
+                </a:solidFill>
+                <a:latin typeface="Times New Roman" pitchFamily="34" charset="0"/>
+                <a:ea typeface="Times New Roman" pitchFamily="34" charset="-122"/>
+                <a:cs typeface="Times New Roman" pitchFamily="34" charset="-120"/>
+              </a:rPr>
+              <a:t>Tributaries have joined the river, so its volume and load are bigger.</a:t>
+            </a:r>
+            <a:endParaRPr lang="en-US" sz="4000" dirty="0"/>
+          </a:p>
+          <a:p>
+            <a:pPr algn="l" indent="0" marL="0">
+              <a:spcAft>
+                <a:spcPts val="800"/>
+              </a:spcAft>
+              <a:buNone/>
+            </a:pPr>
+            <a:r>
+              <a:rPr lang="en-US" sz="4000" b="1" dirty="0">
+                <a:solidFill>
+                  <a:srgbClr val="111111"/>
+                </a:solidFill>
+                <a:latin typeface="Times New Roman" pitchFamily="34" charset="0"/>
+                <a:ea typeface="Times New Roman" pitchFamily="34" charset="-122"/>
+                <a:cs typeface="Times New Roman" pitchFamily="34" charset="-120"/>
+              </a:rPr>
+              <a:t>Lateral erosion: </a:t>
+            </a:r>
+            <a:pPr algn="l" indent="0" marL="0">
+              <a:spcAft>
+                <a:spcPts val="800"/>
+              </a:spcAft>
+              <a:buNone/>
+            </a:pPr>
+            <a:r>
+              <a:rPr lang="en-US" sz="4000" dirty="0">
+                <a:solidFill>
+                  <a:srgbClr val="111111"/>
+                </a:solidFill>
+                <a:latin typeface="Times New Roman" pitchFamily="34" charset="0"/>
+                <a:ea typeface="Times New Roman" pitchFamily="34" charset="-122"/>
+                <a:cs typeface="Times New Roman" pitchFamily="34" charset="-120"/>
+              </a:rPr>
+              <a:t>The river cuts sideways into its banks more than downwards.</a:t>
+            </a:r>
+            <a:endParaRPr lang="en-US" sz="4000" dirty="0"/>
           </a:p>
         </p:txBody>
       </p:sp>
@@ -12837,15 +13385,176 @@
                 <a:ea typeface="Calibri" pitchFamily="34" charset="-122"/>
                 <a:cs typeface="Calibri" pitchFamily="34" charset="-120"/>
               </a:rPr>
-              <a:t>FORMATIVE EVALUATION</a:t>
+              <a:t>BOARD SUMMARY</a:t>
             </a:r>
             <a:endParaRPr lang="en-US" sz="1400" dirty="0"/>
+          </a:p>
+        </p:txBody>
+      </p:sp>
+      <p:sp>
+        <p:nvSpPr>
+          <p:cNvPr id="3" name="Text 1"/>
+          <p:cNvSpPr/>
+          <p:nvPr/>
+        </p:nvSpPr>
+        <p:spPr>
+          <a:xfrm>
+            <a:off x="365760" y="1005840"/>
+            <a:ext cx="11460175" cy="731520"/>
+          </a:xfrm>
+          <a:prstGeom prst="rect">
+            <a:avLst/>
+          </a:prstGeom>
+          <a:noFill/>
+          <a:ln/>
+        </p:spPr>
+        <p:txBody>
+          <a:bodyPr wrap="square" lIns="0" tIns="0" rIns="0" bIns="0" rtlCol="0" anchor="ctr">
+            <a:normAutofit/>
+          </a:bodyPr>
+          <a:lstStyle/>
+          <a:p>
+            <a:pPr algn="ctr" indent="0" marL="0">
+              <a:buNone/>
+            </a:pPr>
+            <a:r>
+              <a:rPr lang="en-US" sz="3600" b="1" dirty="0">
+                <a:solidFill>
+                  <a:srgbClr val="990011"/>
+                </a:solidFill>
+                <a:latin typeface="Times New Roman" pitchFamily="34" charset="0"/>
+                <a:ea typeface="Times New Roman" pitchFamily="34" charset="-122"/>
+                <a:cs typeface="Times New Roman" pitchFamily="34" charset="-120"/>
+              </a:rPr>
+              <a:t>1. Main Characteristics and Processes of the Middle Course</a:t>
+            </a:r>
+            <a:endParaRPr lang="en-US" sz="3600" dirty="0"/>
+          </a:p>
+        </p:txBody>
+      </p:sp>
+      <p:sp>
+        <p:nvSpPr>
+          <p:cNvPr id="4" name="Text 2"/>
+          <p:cNvSpPr/>
+          <p:nvPr/>
+        </p:nvSpPr>
+        <p:spPr>
+          <a:xfrm>
+            <a:off x="365760" y="1737360"/>
+            <a:ext cx="5120640" cy="457200"/>
+          </a:xfrm>
+          <a:prstGeom prst="rect">
+            <a:avLst/>
+          </a:prstGeom>
+          <a:noFill/>
+          <a:ln/>
+        </p:spPr>
+        <p:txBody>
+          <a:bodyPr wrap="square" lIns="0" tIns="0" rIns="0" bIns="0" rtlCol="0" anchor="ctr">
+            <a:normAutofit/>
+          </a:bodyPr>
+          <a:lstStyle/>
+          <a:p>
+            <a:pPr algn="l" indent="0" marL="0">
+              <a:buNone/>
+            </a:pPr>
+            <a:r>
+              <a:rPr lang="en-US" sz="3000" b="1" dirty="0">
+                <a:solidFill>
+                  <a:srgbClr val="990011"/>
+                </a:solidFill>
+                <a:latin typeface="Times New Roman" pitchFamily="34" charset="0"/>
+                <a:ea typeface="Times New Roman" pitchFamily="34" charset="-122"/>
+                <a:cs typeface="Times New Roman" pitchFamily="34" charset="-120"/>
+              </a:rPr>
+              <a:t>B) Transport of the Load</a:t>
+            </a:r>
+            <a:endParaRPr lang="en-US" sz="3000" dirty="0"/>
+          </a:p>
+        </p:txBody>
+      </p:sp>
+      <p:sp>
+        <p:nvSpPr>
+          <p:cNvPr id="5" name="Text 3"/>
+          <p:cNvSpPr/>
+          <p:nvPr/>
+        </p:nvSpPr>
+        <p:spPr>
+          <a:xfrm>
+            <a:off x="365760" y="2240280"/>
+            <a:ext cx="4846320" cy="4160520"/>
+          </a:xfrm>
+          <a:prstGeom prst="rect">
+            <a:avLst/>
+          </a:prstGeom>
+          <a:noFill/>
+          <a:ln/>
+        </p:spPr>
+        <p:txBody>
+          <a:bodyPr wrap="square" lIns="0" tIns="0" rIns="0" bIns="0" rtlCol="0" anchor="t"/>
+          <a:lstStyle/>
+          <a:p>
+            <a:pPr algn="l" indent="0" marL="0">
+              <a:spcAft>
+                <a:spcPts val="800"/>
+              </a:spcAft>
+              <a:buNone/>
+            </a:pPr>
+            <a:r>
+              <a:rPr lang="en-US" sz="3600" i="1" dirty="0">
+                <a:solidFill>
+                  <a:srgbClr val="111111"/>
+                </a:solidFill>
+                <a:latin typeface="Times New Roman" pitchFamily="34" charset="0"/>
+                <a:ea typeface="Times New Roman" pitchFamily="34" charset="-122"/>
+                <a:cs typeface="Times New Roman" pitchFamily="34" charset="-120"/>
+              </a:rPr>
+              <a:t>The river carries its load in the following ways:</a:t>
+            </a:r>
+            <a:endParaRPr lang="en-US" sz="3600" dirty="0"/>
+          </a:p>
+          <a:p>
+            <a:pPr algn="l" indent="0" marL="0">
+              <a:spcAft>
+                <a:spcPts val="800"/>
+              </a:spcAft>
+              <a:buNone/>
+            </a:pPr>
+            <a:r>
+              <a:rPr lang="en-US" sz="3600" b="1" dirty="0">
+                <a:solidFill>
+                  <a:srgbClr val="111111"/>
+                </a:solidFill>
+                <a:latin typeface="Times New Roman" pitchFamily="34" charset="0"/>
+                <a:ea typeface="Times New Roman" pitchFamily="34" charset="-122"/>
+                <a:cs typeface="Times New Roman" pitchFamily="34" charset="-120"/>
+              </a:rPr>
+              <a:t>Traction: </a:t>
+            </a:r>
+            <a:pPr algn="l" indent="0" marL="0">
+              <a:spcAft>
+                <a:spcPts val="800"/>
+              </a:spcAft>
+              <a:buNone/>
+            </a:pPr>
+            <a:r>
+              <a:rPr lang="en-US" sz="3600" dirty="0">
+                <a:solidFill>
+                  <a:srgbClr val="111111"/>
+                </a:solidFill>
+                <a:latin typeface="Times New Roman" pitchFamily="34" charset="0"/>
+                <a:ea typeface="Times New Roman" pitchFamily="34" charset="-122"/>
+                <a:cs typeface="Times New Roman" pitchFamily="34" charset="-120"/>
+              </a:rPr>
+              <a:t>Large stones are rolled along the bed.</a:t>
+            </a:r>
+            <a:endParaRPr lang="en-US" sz="3600" dirty="0"/>
           </a:p>
         </p:txBody>
       </p:sp>
       <p:pic>
         <p:nvPicPr>
-          <p:cNvPr id="3" name="Image 0" descr="/home/claude/f4/img/minesec_sheet.png">    </p:cNvPr>
+          <p:cNvPr id="6" name="Image 0" descr="/home/claude/f4/img/v2/load_mid.png">    </p:cNvPr>
           <p:cNvPicPr>
             <a:picLocks noChangeAspect="1"/>
           </p:cNvPicPr>
@@ -12859,8 +13568,8 @@
         </p:blipFill>
         <p:spPr>
           <a:xfrm>
-            <a:off x="0" y="658368"/>
-            <a:ext cx="5120640" cy="5833872"/>
+            <a:off x="5349240" y="2617506"/>
+            <a:ext cx="6659575" cy="2601397"/>
           </a:xfrm>
           <a:prstGeom prst="rect">
             <a:avLst/>
@@ -12869,14 +13578,14 @@
       </p:pic>
       <p:sp>
         <p:nvSpPr>
-          <p:cNvPr id="4" name="Text 1"/>
+          <p:cNvPr id="7" name="Text 4"/>
           <p:cNvSpPr/>
           <p:nvPr/>
         </p:nvSpPr>
         <p:spPr>
           <a:xfrm>
-            <a:off x="5349240" y="1005840"/>
-            <a:ext cx="6522415" cy="731520"/>
+            <a:off x="5349240" y="6089904"/>
+            <a:ext cx="6659575" cy="347472"/>
           </a:xfrm>
           <a:prstGeom prst="rect">
             <a:avLst/>
@@ -12885,68 +13594,24 @@
           <a:ln/>
         </p:spPr>
         <p:txBody>
-          <a:bodyPr wrap="square" lIns="0" tIns="0" rIns="0" bIns="0" rtlCol="0" anchor="ctr">
-            <a:normAutofit/>
-          </a:bodyPr>
+          <a:bodyPr wrap="square" lIns="0" tIns="0" rIns="0" bIns="0" rtlCol="0" anchor="ctr"/>
           <a:lstStyle/>
           <a:p>
             <a:pPr algn="ctr" indent="0" marL="0">
               <a:buNone/>
             </a:pPr>
             <a:r>
-              <a:rPr lang="en-US" sz="3600" b="1" dirty="0">
-                <a:solidFill>
-                  <a:srgbClr val="990011"/>
+              <a:rPr lang="en-US" sz="1600" i="1" dirty="0">
+                <a:solidFill>
+                  <a:srgbClr val="555555"/>
                 </a:solidFill>
                 <a:latin typeface="Times New Roman" pitchFamily="34" charset="0"/>
                 <a:ea typeface="Times New Roman" pitchFamily="34" charset="-122"/>
                 <a:cs typeface="Times New Roman" pitchFamily="34" charset="-120"/>
               </a:rPr>
-              <a:t>Evaluation 1</a:t>
-            </a:r>
-            <a:endParaRPr lang="en-US" sz="3600" dirty="0"/>
-          </a:p>
-        </p:txBody>
-      </p:sp>
-      <p:sp>
-        <p:nvSpPr>
-          <p:cNvPr id="5" name="Text 2"/>
-          <p:cNvSpPr/>
-          <p:nvPr/>
-        </p:nvSpPr>
-        <p:spPr>
-          <a:xfrm>
-            <a:off x="5349240" y="1783080"/>
-            <a:ext cx="6522415" cy="4663440"/>
-          </a:xfrm>
-          <a:prstGeom prst="rect">
-            <a:avLst/>
-          </a:prstGeom>
-          <a:noFill/>
-          <a:ln/>
-        </p:spPr>
-        <p:txBody>
-          <a:bodyPr wrap="square" lIns="0" tIns="0" rIns="0" bIns="0" rtlCol="0" anchor="t"/>
-          <a:lstStyle/>
-          <a:p>
-            <a:pPr algn="l" indent="0" marL="0">
-              <a:spcAft>
-                <a:spcPts val="800"/>
-              </a:spcAft>
-              <a:buNone/>
-            </a:pPr>
-            <a:r>
-              <a:rPr lang="en-US" sz="4000" dirty="0">
-                <a:solidFill>
-                  <a:srgbClr val="111111"/>
-                </a:solidFill>
-                <a:latin typeface="Times New Roman" pitchFamily="34" charset="0"/>
-                <a:ea typeface="Times New Roman" pitchFamily="34" charset="-122"/>
-                <a:cs typeface="Times New Roman" pitchFamily="34" charset="-120"/>
-              </a:rPr>
-              <a:t>What is a meander?</a:t>
-            </a:r>
-            <a:endParaRPr lang="en-US" sz="4000" dirty="0"/>
+              <a:t>Illustration: how a river transports its load</a:t>
+            </a:r>
+            <a:endParaRPr lang="en-US" sz="1600" dirty="0"/>
           </a:p>
         </p:txBody>
       </p:sp>
@@ -13056,7 +13721,7 @@
                 <a:ea typeface="Calibri" pitchFamily="34" charset="-122"/>
                 <a:cs typeface="Calibri" pitchFamily="34" charset="-120"/>
               </a:rPr>
-              <a:t>FORMATIVE EVALUATION</a:t>
+              <a:t>BOARD SUMMARY</a:t>
             </a:r>
             <a:endParaRPr lang="en-US" sz="1400" dirty="0"/>
           </a:p>
@@ -13079,7 +13744,7 @@
         <p:spPr>
           <a:xfrm>
             <a:off x="0" y="658368"/>
-            <a:ext cx="5120640" cy="5833872"/>
+            <a:ext cx="2468880" cy="5833872"/>
           </a:xfrm>
           <a:prstGeom prst="rect">
             <a:avLst/>
@@ -13094,8 +13759,8 @@
         </p:nvSpPr>
         <p:spPr>
           <a:xfrm>
-            <a:off x="5349240" y="1005840"/>
-            <a:ext cx="6522415" cy="731520"/>
+            <a:off x="2697480" y="1005840"/>
+            <a:ext cx="9174175" cy="731520"/>
           </a:xfrm>
           <a:prstGeom prst="rect">
             <a:avLst/>
@@ -13121,7 +13786,7 @@
                 <a:ea typeface="Times New Roman" pitchFamily="34" charset="-122"/>
                 <a:cs typeface="Times New Roman" pitchFamily="34" charset="-120"/>
               </a:rPr>
-              <a:t>Expected Answer</a:t>
+              <a:t>1. Main Characteristics and Processes of the Middle Course</a:t>
             </a:r>
             <a:endParaRPr lang="en-US" sz="3600" dirty="0"/>
           </a:p>
@@ -13135,8 +13800,47 @@
         </p:nvSpPr>
         <p:spPr>
           <a:xfrm>
-            <a:off x="5349240" y="1783080"/>
-            <a:ext cx="6522415" cy="4663440"/>
+            <a:off x="2697480" y="1737360"/>
+            <a:ext cx="9174175" cy="457200"/>
+          </a:xfrm>
+          <a:prstGeom prst="rect">
+            <a:avLst/>
+          </a:prstGeom>
+          <a:noFill/>
+          <a:ln/>
+        </p:spPr>
+        <p:txBody>
+          <a:bodyPr wrap="square" lIns="0" tIns="0" rIns="0" bIns="0" rtlCol="0" anchor="ctr"/>
+          <a:lstStyle/>
+          <a:p>
+            <a:pPr algn="l" indent="0" marL="0">
+              <a:buNone/>
+            </a:pPr>
+            <a:r>
+              <a:rPr lang="en-US" sz="3200" b="1" dirty="0">
+                <a:solidFill>
+                  <a:srgbClr val="990011"/>
+                </a:solidFill>
+                <a:latin typeface="Times New Roman" pitchFamily="34" charset="0"/>
+                <a:ea typeface="Times New Roman" pitchFamily="34" charset="-122"/>
+                <a:cs typeface="Times New Roman" pitchFamily="34" charset="-120"/>
+              </a:rPr>
+              <a:t>B) Transport of the Load</a:t>
+            </a:r>
+            <a:endParaRPr lang="en-US" sz="3200" dirty="0"/>
+          </a:p>
+        </p:txBody>
+      </p:sp>
+      <p:sp>
+        <p:nvSpPr>
+          <p:cNvPr id="6" name="Text 3"/>
+          <p:cNvSpPr/>
+          <p:nvPr/>
+        </p:nvSpPr>
+        <p:spPr>
+          <a:xfrm>
+            <a:off x="2697480" y="2240280"/>
+            <a:ext cx="9174175" cy="4206240"/>
           </a:xfrm>
           <a:prstGeom prst="rect">
             <a:avLst/>
@@ -13155,7 +13859,7 @@
               <a:buNone/>
             </a:pPr>
             <a:r>
-              <a:rPr lang="en-US" sz="4000" dirty="0">
+              <a:rPr lang="en-US" sz="4000" b="1" dirty="0">
                 <a:solidFill>
                   <a:srgbClr val="111111"/>
                 </a:solidFill>
@@ -13163,7 +13867,98 @@
                 <a:ea typeface="Times New Roman" pitchFamily="34" charset="-122"/>
                 <a:cs typeface="Times New Roman" pitchFamily="34" charset="-120"/>
               </a:rPr>
-              <a:t>A big bend in a river.</a:t>
+              <a:t>Saltation: </a:t>
+            </a:r>
+            <a:pPr algn="l" indent="0" marL="0">
+              <a:spcAft>
+                <a:spcPts val="800"/>
+              </a:spcAft>
+              <a:buNone/>
+            </a:pPr>
+            <a:r>
+              <a:rPr lang="en-US" sz="4000" dirty="0">
+                <a:solidFill>
+                  <a:srgbClr val="111111"/>
+                </a:solidFill>
+                <a:latin typeface="Times New Roman" pitchFamily="34" charset="0"/>
+                <a:ea typeface="Times New Roman" pitchFamily="34" charset="-122"/>
+                <a:cs typeface="Times New Roman" pitchFamily="34" charset="-120"/>
+              </a:rPr>
+              <a:t>Small stones and sand bounce along the bed.</a:t>
+            </a:r>
+            <a:endParaRPr lang="en-US" sz="4000" dirty="0"/>
+          </a:p>
+          <a:p>
+            <a:pPr algn="l" indent="0" marL="0">
+              <a:spcAft>
+                <a:spcPts val="800"/>
+              </a:spcAft>
+              <a:buNone/>
+            </a:pPr>
+            <a:r>
+              <a:rPr lang="en-US" sz="4000" b="1" dirty="0">
+                <a:solidFill>
+                  <a:srgbClr val="111111"/>
+                </a:solidFill>
+                <a:latin typeface="Times New Roman" pitchFamily="34" charset="0"/>
+                <a:ea typeface="Times New Roman" pitchFamily="34" charset="-122"/>
+                <a:cs typeface="Times New Roman" pitchFamily="34" charset="-120"/>
+              </a:rPr>
+              <a:t>Suspension: </a:t>
+            </a:r>
+            <a:pPr algn="l" indent="0" marL="0">
+              <a:spcAft>
+                <a:spcPts val="800"/>
+              </a:spcAft>
+              <a:buNone/>
+            </a:pPr>
+            <a:r>
+              <a:rPr lang="en-US" sz="4000" dirty="0">
+                <a:solidFill>
+                  <a:srgbClr val="111111"/>
+                </a:solidFill>
+                <a:latin typeface="Times New Roman" pitchFamily="34" charset="0"/>
+                <a:ea typeface="Times New Roman" pitchFamily="34" charset="-122"/>
+                <a:cs typeface="Times New Roman" pitchFamily="34" charset="-120"/>
+              </a:rPr>
+              <a:t>Fine mud and clay are carried in the water, which looks brown.</a:t>
+            </a:r>
+            <a:endParaRPr lang="en-US" sz="4000" dirty="0"/>
+          </a:p>
+          <a:p>
+            <a:pPr algn="l" indent="0" marL="0">
+              <a:spcAft>
+                <a:spcPts val="800"/>
+              </a:spcAft>
+              <a:buNone/>
+            </a:pPr>
+            <a:r>
+              <a:rPr lang="en-US" sz="4000" b="1" dirty="0">
+                <a:solidFill>
+                  <a:srgbClr val="111111"/>
+                </a:solidFill>
+                <a:latin typeface="Times New Roman" pitchFamily="34" charset="0"/>
+                <a:ea typeface="Times New Roman" pitchFamily="34" charset="-122"/>
+                <a:cs typeface="Times New Roman" pitchFamily="34" charset="-120"/>
+              </a:rPr>
+              <a:t>Solution: </a:t>
+            </a:r>
+            <a:pPr algn="l" indent="0" marL="0">
+              <a:spcAft>
+                <a:spcPts val="800"/>
+              </a:spcAft>
+              <a:buNone/>
+            </a:pPr>
+            <a:r>
+              <a:rPr lang="en-US" sz="4000" dirty="0">
+                <a:solidFill>
+                  <a:srgbClr val="111111"/>
+                </a:solidFill>
+                <a:latin typeface="Times New Roman" pitchFamily="34" charset="0"/>
+                <a:ea typeface="Times New Roman" pitchFamily="34" charset="-122"/>
+                <a:cs typeface="Times New Roman" pitchFamily="34" charset="-120"/>
+              </a:rPr>
+              <a:t>Dissolved minerals are carried invisibly in the water.</a:t>
             </a:r>
             <a:endParaRPr lang="en-US" sz="4000" dirty="0"/>
           </a:p>
@@ -13275,15 +14070,135 @@
                 <a:ea typeface="Calibri" pitchFamily="34" charset="-122"/>
                 <a:cs typeface="Calibri" pitchFamily="34" charset="-120"/>
               </a:rPr>
-              <a:t>FORMATIVE EVALUATION</a:t>
+              <a:t>BOARD SUMMARY</a:t>
             </a:r>
             <a:endParaRPr lang="en-US" sz="1400" dirty="0"/>
+          </a:p>
+        </p:txBody>
+      </p:sp>
+      <p:sp>
+        <p:nvSpPr>
+          <p:cNvPr id="3" name="Text 1"/>
+          <p:cNvSpPr/>
+          <p:nvPr/>
+        </p:nvSpPr>
+        <p:spPr>
+          <a:xfrm>
+            <a:off x="365760" y="1005840"/>
+            <a:ext cx="11460175" cy="731520"/>
+          </a:xfrm>
+          <a:prstGeom prst="rect">
+            <a:avLst/>
+          </a:prstGeom>
+          <a:noFill/>
+          <a:ln/>
+        </p:spPr>
+        <p:txBody>
+          <a:bodyPr wrap="square" lIns="0" tIns="0" rIns="0" bIns="0" rtlCol="0" anchor="ctr">
+            <a:normAutofit/>
+          </a:bodyPr>
+          <a:lstStyle/>
+          <a:p>
+            <a:pPr algn="ctr" indent="0" marL="0">
+              <a:buNone/>
+            </a:pPr>
+            <a:r>
+              <a:rPr lang="en-US" sz="3600" b="1" dirty="0">
+                <a:solidFill>
+                  <a:srgbClr val="990011"/>
+                </a:solidFill>
+                <a:latin typeface="Times New Roman" pitchFamily="34" charset="0"/>
+                <a:ea typeface="Times New Roman" pitchFamily="34" charset="-122"/>
+                <a:cs typeface="Times New Roman" pitchFamily="34" charset="-120"/>
+              </a:rPr>
+              <a:t>2. Landforms of the Middle Course</a:t>
+            </a:r>
+            <a:endParaRPr lang="en-US" sz="3600" dirty="0"/>
+          </a:p>
+        </p:txBody>
+      </p:sp>
+      <p:sp>
+        <p:nvSpPr>
+          <p:cNvPr id="4" name="Text 2"/>
+          <p:cNvSpPr/>
+          <p:nvPr/>
+        </p:nvSpPr>
+        <p:spPr>
+          <a:xfrm>
+            <a:off x="365760" y="1783080"/>
+            <a:ext cx="4846320" cy="4617720"/>
+          </a:xfrm>
+          <a:prstGeom prst="rect">
+            <a:avLst/>
+          </a:prstGeom>
+          <a:noFill/>
+          <a:ln/>
+        </p:spPr>
+        <p:txBody>
+          <a:bodyPr wrap="square" lIns="0" tIns="0" rIns="0" bIns="0" rtlCol="0" anchor="t"/>
+          <a:lstStyle/>
+          <a:p>
+            <a:pPr algn="l" indent="0" marL="0">
+              <a:spcAft>
+                <a:spcPts val="800"/>
+              </a:spcAft>
+              <a:buNone/>
+            </a:pPr>
+            <a:r>
+              <a:rPr lang="en-US" sz="3400" i="1" dirty="0">
+                <a:solidFill>
+                  <a:srgbClr val="111111"/>
+                </a:solidFill>
+                <a:latin typeface="Times New Roman" pitchFamily="34" charset="0"/>
+                <a:ea typeface="Times New Roman" pitchFamily="34" charset="-122"/>
+                <a:cs typeface="Times New Roman" pitchFamily="34" charset="-120"/>
+              </a:rPr>
+              <a:t>The middle course has the following landforms:</a:t>
+            </a:r>
+            <a:endParaRPr lang="en-US" sz="3400" dirty="0"/>
+          </a:p>
+          <a:p>
+            <a:pPr algn="l" indent="0" marL="0">
+              <a:spcAft>
+                <a:spcPts val="800"/>
+              </a:spcAft>
+              <a:buNone/>
+            </a:pPr>
+            <a:r>
+              <a:rPr lang="en-US" sz="3400" b="1" dirty="0">
+                <a:solidFill>
+                  <a:srgbClr val="111111"/>
+                </a:solidFill>
+                <a:latin typeface="Times New Roman" pitchFamily="34" charset="0"/>
+                <a:ea typeface="Times New Roman" pitchFamily="34" charset="-122"/>
+                <a:cs typeface="Times New Roman" pitchFamily="34" charset="-120"/>
+              </a:rPr>
+              <a:t>Meander: </a:t>
+            </a:r>
+            <a:pPr algn="l" indent="0" marL="0">
+              <a:spcAft>
+                <a:spcPts val="800"/>
+              </a:spcAft>
+              <a:buNone/>
+            </a:pPr>
+            <a:r>
+              <a:rPr lang="en-US" sz="3400" dirty="0">
+                <a:solidFill>
+                  <a:srgbClr val="111111"/>
+                </a:solidFill>
+                <a:latin typeface="Times New Roman" pitchFamily="34" charset="0"/>
+                <a:ea typeface="Times New Roman" pitchFamily="34" charset="-122"/>
+                <a:cs typeface="Times New Roman" pitchFamily="34" charset="-120"/>
+              </a:rPr>
+              <a:t>It is a large bend in a river, formed by erosion on the outside and deposition on the inside of the bend.</a:t>
+            </a:r>
+            <a:endParaRPr lang="en-US" sz="3400" dirty="0"/>
           </a:p>
         </p:txBody>
       </p:sp>
       <p:pic>
         <p:nvPicPr>
-          <p:cNvPr id="3" name="Image 0" descr="/home/claude/f4/img/minesec_sheet.png">    </p:cNvPr>
+          <p:cNvPr id="5" name="Image 0" descr="/home/claude/f4/img/v2/meander_last.png">    </p:cNvPr>
           <p:cNvPicPr>
             <a:picLocks noChangeAspect="1"/>
           </p:cNvPicPr>
@@ -13297,8 +14212,8 @@
         </p:blipFill>
         <p:spPr>
           <a:xfrm>
-            <a:off x="0" y="658368"/>
-            <a:ext cx="5120640" cy="5833872"/>
+            <a:off x="5349240" y="2617506"/>
+            <a:ext cx="6659575" cy="2601397"/>
           </a:xfrm>
           <a:prstGeom prst="rect">
             <a:avLst/>
@@ -13307,14 +14222,14 @@
       </p:pic>
       <p:sp>
         <p:nvSpPr>
-          <p:cNvPr id="4" name="Text 1"/>
+          <p:cNvPr id="6" name="Text 3"/>
           <p:cNvSpPr/>
           <p:nvPr/>
         </p:nvSpPr>
         <p:spPr>
           <a:xfrm>
-            <a:off x="5349240" y="1005840"/>
-            <a:ext cx="6522415" cy="731520"/>
+            <a:off x="5349240" y="6089904"/>
+            <a:ext cx="6659575" cy="347472"/>
           </a:xfrm>
           <a:prstGeom prst="rect">
             <a:avLst/>
@@ -13323,68 +14238,24 @@
           <a:ln/>
         </p:spPr>
         <p:txBody>
-          <a:bodyPr wrap="square" lIns="0" tIns="0" rIns="0" bIns="0" rtlCol="0" anchor="ctr">
-            <a:normAutofit/>
-          </a:bodyPr>
+          <a:bodyPr wrap="square" lIns="0" tIns="0" rIns="0" bIns="0" rtlCol="0" anchor="ctr"/>
           <a:lstStyle/>
           <a:p>
             <a:pPr algn="ctr" indent="0" marL="0">
               <a:buNone/>
             </a:pPr>
             <a:r>
-              <a:rPr lang="en-US" sz="3600" b="1" dirty="0">
-                <a:solidFill>
-                  <a:srgbClr val="990011"/>
+              <a:rPr lang="en-US" sz="1600" i="1" dirty="0">
+                <a:solidFill>
+                  <a:srgbClr val="555555"/>
                 </a:solidFill>
                 <a:latin typeface="Times New Roman" pitchFamily="34" charset="0"/>
                 <a:ea typeface="Times New Roman" pitchFamily="34" charset="-122"/>
                 <a:cs typeface="Times New Roman" pitchFamily="34" charset="-120"/>
               </a:rPr>
-              <a:t>Evaluation 2</a:t>
-            </a:r>
-            <a:endParaRPr lang="en-US" sz="3600" dirty="0"/>
-          </a:p>
-        </p:txBody>
-      </p:sp>
-      <p:sp>
-        <p:nvSpPr>
-          <p:cNvPr id="5" name="Text 2"/>
-          <p:cNvSpPr/>
-          <p:nvPr/>
-        </p:nvSpPr>
-        <p:spPr>
-          <a:xfrm>
-            <a:off x="5349240" y="1783080"/>
-            <a:ext cx="6522415" cy="4663440"/>
-          </a:xfrm>
-          <a:prstGeom prst="rect">
-            <a:avLst/>
-          </a:prstGeom>
-          <a:noFill/>
-          <a:ln/>
-        </p:spPr>
-        <p:txBody>
-          <a:bodyPr wrap="square" lIns="0" tIns="0" rIns="0" bIns="0" rtlCol="0" anchor="t"/>
-          <a:lstStyle/>
-          <a:p>
-            <a:pPr algn="l" indent="0" marL="0">
-              <a:spcAft>
-                <a:spcPts val="800"/>
-              </a:spcAft>
-              <a:buNone/>
-            </a:pPr>
-            <a:r>
-              <a:rPr lang="en-US" sz="4000" dirty="0">
-                <a:solidFill>
-                  <a:srgbClr val="111111"/>
-                </a:solidFill>
-                <a:latin typeface="Times New Roman" pitchFamily="34" charset="0"/>
-                <a:ea typeface="Times New Roman" pitchFamily="34" charset="-122"/>
-                <a:cs typeface="Times New Roman" pitchFamily="34" charset="-120"/>
-              </a:rPr>
-              <a:t>Why is the outside of a bend steep?</a:t>
-            </a:r>
-            <a:endParaRPr lang="en-US" sz="4000" dirty="0"/>
+              <a:t>Illustration: a meander</a:t>
+            </a:r>
+            <a:endParaRPr lang="en-US" sz="1600" dirty="0"/>
           </a:p>
         </p:txBody>
       </p:sp>
@@ -13494,15 +14365,115 @@
                 <a:ea typeface="Calibri" pitchFamily="34" charset="-122"/>
                 <a:cs typeface="Calibri" pitchFamily="34" charset="-120"/>
               </a:rPr>
-              <a:t>FORMATIVE EVALUATION</a:t>
+              <a:t>BOARD SUMMARY</a:t>
             </a:r>
             <a:endParaRPr lang="en-US" sz="1400" dirty="0"/>
+          </a:p>
+        </p:txBody>
+      </p:sp>
+      <p:sp>
+        <p:nvSpPr>
+          <p:cNvPr id="3" name="Text 1"/>
+          <p:cNvSpPr/>
+          <p:nvPr/>
+        </p:nvSpPr>
+        <p:spPr>
+          <a:xfrm>
+            <a:off x="365760" y="1005840"/>
+            <a:ext cx="11460175" cy="731520"/>
+          </a:xfrm>
+          <a:prstGeom prst="rect">
+            <a:avLst/>
+          </a:prstGeom>
+          <a:noFill/>
+          <a:ln/>
+        </p:spPr>
+        <p:txBody>
+          <a:bodyPr wrap="square" lIns="0" tIns="0" rIns="0" bIns="0" rtlCol="0" anchor="ctr">
+            <a:normAutofit/>
+          </a:bodyPr>
+          <a:lstStyle/>
+          <a:p>
+            <a:pPr algn="ctr" indent="0" marL="0">
+              <a:buNone/>
+            </a:pPr>
+            <a:r>
+              <a:rPr lang="en-US" sz="3600" b="1" dirty="0">
+                <a:solidFill>
+                  <a:srgbClr val="990011"/>
+                </a:solidFill>
+                <a:latin typeface="Times New Roman" pitchFamily="34" charset="0"/>
+                <a:ea typeface="Times New Roman" pitchFamily="34" charset="-122"/>
+                <a:cs typeface="Times New Roman" pitchFamily="34" charset="-120"/>
+              </a:rPr>
+              <a:t>2. Landforms of the Middle Course</a:t>
+            </a:r>
+            <a:endParaRPr lang="en-US" sz="3600" dirty="0"/>
+          </a:p>
+        </p:txBody>
+      </p:sp>
+      <p:sp>
+        <p:nvSpPr>
+          <p:cNvPr id="4" name="Text 2"/>
+          <p:cNvSpPr/>
+          <p:nvPr/>
+        </p:nvSpPr>
+        <p:spPr>
+          <a:xfrm>
+            <a:off x="365760" y="1783080"/>
+            <a:ext cx="4846320" cy="4617720"/>
+          </a:xfrm>
+          <a:prstGeom prst="rect">
+            <a:avLst/>
+          </a:prstGeom>
+          <a:noFill/>
+          <a:ln/>
+        </p:spPr>
+        <p:txBody>
+          <a:bodyPr wrap="square" lIns="0" tIns="0" rIns="0" bIns="0" rtlCol="0" anchor="t"/>
+          <a:lstStyle/>
+          <a:p>
+            <a:pPr algn="l" indent="0" marL="0">
+              <a:spcAft>
+                <a:spcPts val="800"/>
+              </a:spcAft>
+              <a:buNone/>
+            </a:pPr>
+            <a:r>
+              <a:rPr lang="en-US" sz="3600" b="1" dirty="0">
+                <a:solidFill>
+                  <a:srgbClr val="111111"/>
+                </a:solidFill>
+                <a:latin typeface="Times New Roman" pitchFamily="34" charset="0"/>
+                <a:ea typeface="Times New Roman" pitchFamily="34" charset="-122"/>
+                <a:cs typeface="Times New Roman" pitchFamily="34" charset="-120"/>
+              </a:rPr>
+              <a:t>River cliff: </a:t>
+            </a:r>
+            <a:pPr algn="l" indent="0" marL="0">
+              <a:spcAft>
+                <a:spcPts val="800"/>
+              </a:spcAft>
+              <a:buNone/>
+            </a:pPr>
+            <a:r>
+              <a:rPr lang="en-US" sz="3600" dirty="0">
+                <a:solidFill>
+                  <a:srgbClr val="111111"/>
+                </a:solidFill>
+                <a:latin typeface="Times New Roman" pitchFamily="34" charset="0"/>
+                <a:ea typeface="Times New Roman" pitchFamily="34" charset="-122"/>
+                <a:cs typeface="Times New Roman" pitchFamily="34" charset="-120"/>
+              </a:rPr>
+              <a:t>It is a steep bank on the outside of a bend, where the fast, deep water erodes.</a:t>
+            </a:r>
+            <a:endParaRPr lang="en-US" sz="3600" dirty="0"/>
           </a:p>
         </p:txBody>
       </p:sp>
       <p:pic>
         <p:nvPicPr>
-          <p:cNvPr id="3" name="Image 0" descr="/home/claude/f4/img/minesec_sheet.png">    </p:cNvPr>
+          <p:cNvPr id="5" name="Image 0" descr="/home/claude/f4/img/v2/rivercliff_big.png">    </p:cNvPr>
           <p:cNvPicPr>
             <a:picLocks noChangeAspect="1"/>
           </p:cNvPicPr>
@@ -13516,8 +14487,8 @@
         </p:blipFill>
         <p:spPr>
           <a:xfrm>
-            <a:off x="0" y="658368"/>
-            <a:ext cx="5120640" cy="5833872"/>
+            <a:off x="5349240" y="2617506"/>
+            <a:ext cx="6659575" cy="2601397"/>
           </a:xfrm>
           <a:prstGeom prst="rect">
             <a:avLst/>
@@ -13526,14 +14497,14 @@
       </p:pic>
       <p:sp>
         <p:nvSpPr>
-          <p:cNvPr id="4" name="Text 1"/>
+          <p:cNvPr id="6" name="Text 3"/>
           <p:cNvSpPr/>
           <p:nvPr/>
         </p:nvSpPr>
         <p:spPr>
           <a:xfrm>
-            <a:off x="5349240" y="1005840"/>
-            <a:ext cx="6522415" cy="731520"/>
+            <a:off x="5349240" y="6089904"/>
+            <a:ext cx="6659575" cy="347472"/>
           </a:xfrm>
           <a:prstGeom prst="rect">
             <a:avLst/>
@@ -13542,68 +14513,24 @@
           <a:ln/>
         </p:spPr>
         <p:txBody>
-          <a:bodyPr wrap="square" lIns="0" tIns="0" rIns="0" bIns="0" rtlCol="0" anchor="ctr">
-            <a:normAutofit/>
-          </a:bodyPr>
+          <a:bodyPr wrap="square" lIns="0" tIns="0" rIns="0" bIns="0" rtlCol="0" anchor="ctr"/>
           <a:lstStyle/>
           <a:p>
             <a:pPr algn="ctr" indent="0" marL="0">
               <a:buNone/>
             </a:pPr>
             <a:r>
-              <a:rPr lang="en-US" sz="3600" b="1" dirty="0">
-                <a:solidFill>
-                  <a:srgbClr val="990011"/>
+              <a:rPr lang="en-US" sz="1600" i="1" dirty="0">
+                <a:solidFill>
+                  <a:srgbClr val="555555"/>
                 </a:solidFill>
                 <a:latin typeface="Times New Roman" pitchFamily="34" charset="0"/>
                 <a:ea typeface="Times New Roman" pitchFamily="34" charset="-122"/>
                 <a:cs typeface="Times New Roman" pitchFamily="34" charset="-120"/>
               </a:rPr>
-              <a:t>Expected Answer</a:t>
-            </a:r>
-            <a:endParaRPr lang="en-US" sz="3600" dirty="0"/>
-          </a:p>
-        </p:txBody>
-      </p:sp>
-      <p:sp>
-        <p:nvSpPr>
-          <p:cNvPr id="5" name="Text 2"/>
-          <p:cNvSpPr/>
-          <p:nvPr/>
-        </p:nvSpPr>
-        <p:spPr>
-          <a:xfrm>
-            <a:off x="5349240" y="1783080"/>
-            <a:ext cx="6522415" cy="4663440"/>
-          </a:xfrm>
-          <a:prstGeom prst="rect">
-            <a:avLst/>
-          </a:prstGeom>
-          <a:noFill/>
-          <a:ln/>
-        </p:spPr>
-        <p:txBody>
-          <a:bodyPr wrap="square" lIns="0" tIns="0" rIns="0" bIns="0" rtlCol="0" anchor="t"/>
-          <a:lstStyle/>
-          <a:p>
-            <a:pPr algn="l" indent="0" marL="0">
-              <a:spcAft>
-                <a:spcPts val="800"/>
-              </a:spcAft>
-              <a:buNone/>
-            </a:pPr>
-            <a:r>
-              <a:rPr lang="en-US" sz="4000" dirty="0">
-                <a:solidFill>
-                  <a:srgbClr val="111111"/>
-                </a:solidFill>
-                <a:latin typeface="Times New Roman" pitchFamily="34" charset="0"/>
-                <a:ea typeface="Times New Roman" pitchFamily="34" charset="-122"/>
-                <a:cs typeface="Times New Roman" pitchFamily="34" charset="-120"/>
-              </a:rPr>
-              <a:t>The fast water erodes it.</a:t>
-            </a:r>
-            <a:endParaRPr lang="en-US" sz="4000" dirty="0"/>
+              <a:t>Illustration: river cliff and slip-off slope</a:t>
+            </a:r>
+            <a:endParaRPr lang="en-US" sz="1600" dirty="0"/>
           </a:p>
         </p:txBody>
       </p:sp>
@@ -13713,7 +14640,7 @@
                 <a:ea typeface="Calibri" pitchFamily="34" charset="-122"/>
                 <a:cs typeface="Calibri" pitchFamily="34" charset="-120"/>
               </a:rPr>
-              <a:t>REMEDIATION</a:t>
+              <a:t>BOARD SUMMARY</a:t>
             </a:r>
             <a:endParaRPr lang="en-US" sz="1400" dirty="0"/>
           </a:p>
@@ -13736,7 +14663,7 @@
         <p:spPr>
           <a:xfrm>
             <a:off x="0" y="658368"/>
-            <a:ext cx="2468880" cy="5833872"/>
+            <a:ext cx="3840480" cy="5833872"/>
           </a:xfrm>
           <a:prstGeom prst="rect">
             <a:avLst/>
@@ -13751,8 +14678,8 @@
         </p:nvSpPr>
         <p:spPr>
           <a:xfrm>
-            <a:off x="2697480" y="1005840"/>
-            <a:ext cx="9174175" cy="731520"/>
+            <a:off x="4069080" y="1005840"/>
+            <a:ext cx="7802575" cy="731520"/>
           </a:xfrm>
           <a:prstGeom prst="rect">
             <a:avLst/>
@@ -13778,7 +14705,7 @@
                 <a:ea typeface="Times New Roman" pitchFamily="34" charset="-122"/>
                 <a:cs typeface="Times New Roman" pitchFamily="34" charset="-120"/>
               </a:rPr>
-              <a:t>Remediation</a:t>
+              <a:t>2. Landforms of the Middle Course</a:t>
             </a:r>
             <a:endParaRPr lang="en-US" sz="3600" dirty="0"/>
           </a:p>
@@ -13792,8 +14719,8 @@
         </p:nvSpPr>
         <p:spPr>
           <a:xfrm>
-            <a:off x="2697480" y="1783080"/>
-            <a:ext cx="9174175" cy="4663440"/>
+            <a:off x="4069080" y="1783080"/>
+            <a:ext cx="7802575" cy="4663440"/>
           </a:xfrm>
           <a:prstGeom prst="rect">
             <a:avLst/>
@@ -13820,18 +14747,13 @@
                 <a:ea typeface="Times New Roman" pitchFamily="34" charset="-122"/>
                 <a:cs typeface="Times New Roman" pitchFamily="34" charset="-120"/>
               </a:rPr>
-              <a:t>Fill in the blanks:</a:t>
-            </a:r>
-            <a:endParaRPr lang="en-US" sz="4000" dirty="0"/>
-          </a:p>
-          <a:p>
-            <a:pPr algn="l" marL="342900" indent="-342900">
+              <a:t>Slip-off slope: </a:t>
+            </a:r>
+            <a:pPr algn="l" indent="0" marL="0">
               <a:spcAft>
                 <a:spcPts val="800"/>
               </a:spcAft>
-              <a:buSzPct val="100000"/>
-              <a:buFont typeface="+mj-lt"/>
-              <a:buAutoNum type="arabicPeriod" startAt="1"/>
+              <a:buNone/>
             </a:pPr>
             <a:r>
               <a:rPr lang="en-US" sz="4000" dirty="0">
@@ -13842,21 +14764,19 @@
                 <a:ea typeface="Times New Roman" pitchFamily="34" charset="-122"/>
                 <a:cs typeface="Times New Roman" pitchFamily="34" charset="-120"/>
               </a:rPr>
-              <a:t>A big bend in a river is a ______.</a:t>
+              <a:t>It is a gentle bank on the inside of a bend, where the slow water deposits sand and gravel.</a:t>
             </a:r>
             <a:endParaRPr lang="en-US" sz="4000" dirty="0"/>
           </a:p>
           <a:p>
-            <a:pPr algn="l" marL="342900" indent="-342900">
+            <a:pPr algn="l" indent="0" marL="0">
               <a:spcAft>
                 <a:spcPts val="800"/>
               </a:spcAft>
-              <a:buSzPct val="100000"/>
-              <a:buFont typeface="+mj-lt"/>
-              <a:buAutoNum type="arabicPeriod" startAt="1"/>
+              <a:buNone/>
             </a:pPr>
             <a:r>
-              <a:rPr lang="en-US" sz="4000" dirty="0">
+              <a:rPr lang="en-US" sz="4000" b="1" dirty="0">
                 <a:solidFill>
                   <a:srgbClr val="111111"/>
                 </a:solidFill>
@@ -13864,18 +14784,13 @@
                 <a:ea typeface="Times New Roman" pitchFamily="34" charset="-122"/>
                 <a:cs typeface="Times New Roman" pitchFamily="34" charset="-120"/>
               </a:rPr>
-              <a:t>The steep bank on the outside is a river ______.</a:t>
-            </a:r>
-            <a:endParaRPr lang="en-US" sz="4000" dirty="0"/>
-          </a:p>
-          <a:p>
-            <a:pPr algn="l" marL="342900" indent="-342900">
+              <a:t>Open V-shaped valley: </a:t>
+            </a:r>
+            <a:pPr algn="l" indent="0" marL="0">
               <a:spcAft>
                 <a:spcPts val="800"/>
               </a:spcAft>
-              <a:buSzPct val="100000"/>
-              <a:buFont typeface="+mj-lt"/>
-              <a:buAutoNum type="arabicPeriod" startAt="1"/>
+              <a:buNone/>
             </a:pPr>
             <a:r>
               <a:rPr lang="en-US" sz="4000" dirty="0">
@@ -13886,7 +14801,7 @@
                 <a:ea typeface="Times New Roman" pitchFamily="34" charset="-122"/>
                 <a:cs typeface="Times New Roman" pitchFamily="34" charset="-120"/>
               </a:rPr>
-              <a:t>The gentle bank on the inside is a slip-off ______.</a:t>
+              <a:t>The valley becomes wider, with gentler sides and a narrow flat floor.</a:t>
             </a:r>
             <a:endParaRPr lang="en-US" sz="4000" dirty="0"/>
           </a:p>
@@ -13998,7 +14913,7 @@
                 <a:ea typeface="Calibri" pitchFamily="34" charset="-122"/>
                 <a:cs typeface="Calibri" pitchFamily="34" charset="-120"/>
               </a:rPr>
-              <a:t>HOMEWORK</a:t>
+              <a:t>FORMATIVE EVALUATION</a:t>
             </a:r>
             <a:endParaRPr lang="en-US" sz="1400" dirty="0"/>
           </a:p>
@@ -14063,7 +14978,7 @@
                 <a:ea typeface="Times New Roman" pitchFamily="34" charset="-122"/>
                 <a:cs typeface="Times New Roman" pitchFamily="34" charset="-120"/>
               </a:rPr>
-              <a:t>Homework</a:t>
+              <a:t>Evaluation 1</a:t>
             </a:r>
             <a:endParaRPr lang="en-US" sz="3600" dirty="0"/>
           </a:p>
@@ -14105,7 +15020,7 @@
                 <a:ea typeface="Times New Roman" pitchFamily="34" charset="-122"/>
                 <a:cs typeface="Times New Roman" pitchFamily="34" charset="-120"/>
               </a:rPr>
-              <a:t>Look at a map of the Niger Delta or the Nile Delta in your atlas. Draw its shape and name the sea it reaches.</a:t>
+              <a:t>What is a meander?</a:t>
             </a:r>
             <a:endParaRPr lang="en-US" sz="4000" dirty="0"/>
           </a:p>
@@ -14456,7 +15371,7 @@
                 <a:ea typeface="Calibri" pitchFamily="34" charset="-122"/>
                 <a:cs typeface="Calibri" pitchFamily="34" charset="-120"/>
               </a:rPr>
-              <a:t>NEXT LESSON</a:t>
+              <a:t>FORMATIVE EVALUATION</a:t>
             </a:r>
             <a:endParaRPr lang="en-US" sz="1400" dirty="0"/>
           </a:p>
@@ -14521,7 +15436,7 @@
                 <a:ea typeface="Times New Roman" pitchFamily="34" charset="-122"/>
                 <a:cs typeface="Times New Roman" pitchFamily="34" charset="-120"/>
               </a:rPr>
-              <a:t>Next Lesson</a:t>
+              <a:t>Expected Answer</a:t>
             </a:r>
             <a:endParaRPr lang="en-US" sz="3600" dirty="0"/>
           </a:p>
@@ -14545,17 +15460,17 @@
           <a:ln/>
         </p:spPr>
         <p:txBody>
-          <a:bodyPr wrap="square" lIns="0" tIns="0" rIns="0" bIns="0" rtlCol="0" anchor="ctr"/>
-          <a:lstStyle/>
-          <a:p>
-            <a:pPr algn="ctr" indent="0" marL="0">
+          <a:bodyPr wrap="square" lIns="0" tIns="0" rIns="0" bIns="0" rtlCol="0" anchor="t"/>
+          <a:lstStyle/>
+          <a:p>
+            <a:pPr algn="l" indent="0" marL="0">
               <a:spcAft>
                 <a:spcPts val="800"/>
               </a:spcAft>
               <a:buNone/>
             </a:pPr>
             <a:r>
-              <a:rPr lang="en-US" sz="4000" b="1" dirty="0">
+              <a:rPr lang="en-US" sz="4000" dirty="0">
                 <a:solidFill>
                   <a:srgbClr val="111111"/>
                 </a:solidFill>
@@ -14563,27 +15478,7 @@
                 <a:ea typeface="Times New Roman" pitchFamily="34" charset="-122"/>
                 <a:cs typeface="Times New Roman" pitchFamily="34" charset="-120"/>
               </a:rPr>
-              <a:t>Our next lesson will be on:</a:t>
-            </a:r>
-            <a:endParaRPr lang="en-US" sz="4000" dirty="0"/>
-          </a:p>
-          <a:p>
-            <a:pPr algn="ctr" indent="0" marL="0">
-              <a:spcAft>
-                <a:spcPts val="800"/>
-              </a:spcAft>
-              <a:buNone/>
-            </a:pPr>
-            <a:r>
-              <a:rPr lang="en-US" sz="4000" b="1" dirty="0">
-                <a:solidFill>
-                  <a:srgbClr val="990011"/>
-                </a:solidFill>
-                <a:latin typeface="Times New Roman" pitchFamily="34" charset="0"/>
-                <a:ea typeface="Times New Roman" pitchFamily="34" charset="-122"/>
-                <a:cs typeface="Times New Roman" pitchFamily="34" charset="-120"/>
-              </a:rPr>
-              <a:t>Lesson 21: The Lower Course of a River</a:t>
+              <a:t>A big bend in a river.</a:t>
             </a:r>
             <a:endParaRPr lang="en-US" sz="4000" dirty="0"/>
           </a:p>
@@ -14695,6 +15590,1187 @@
                 <a:ea typeface="Calibri" pitchFamily="34" charset="-122"/>
                 <a:cs typeface="Calibri" pitchFamily="34" charset="-120"/>
               </a:rPr>
+              <a:t>FORMATIVE EVALUATION</a:t>
+            </a:r>
+            <a:endParaRPr lang="en-US" sz="1400" dirty="0"/>
+          </a:p>
+        </p:txBody>
+      </p:sp>
+      <p:pic>
+        <p:nvPicPr>
+          <p:cNvPr id="3" name="Image 0" descr="/home/claude/f4/img/minesec_sheet.png">    </p:cNvPr>
+          <p:cNvPicPr>
+            <a:picLocks noChangeAspect="1"/>
+          </p:cNvPicPr>
+          <p:nvPr/>
+        </p:nvPicPr>
+        <p:blipFill>
+          <a:blip r:embed="rId1"/>
+          <a:stretch>
+            <a:fillRect/>
+          </a:stretch>
+        </p:blipFill>
+        <p:spPr>
+          <a:xfrm>
+            <a:off x="0" y="658368"/>
+            <a:ext cx="5120640" cy="5833872"/>
+          </a:xfrm>
+          <a:prstGeom prst="rect">
+            <a:avLst/>
+          </a:prstGeom>
+        </p:spPr>
+      </p:pic>
+      <p:sp>
+        <p:nvSpPr>
+          <p:cNvPr id="4" name="Text 1"/>
+          <p:cNvSpPr/>
+          <p:nvPr/>
+        </p:nvSpPr>
+        <p:spPr>
+          <a:xfrm>
+            <a:off x="5349240" y="1005840"/>
+            <a:ext cx="6522415" cy="731520"/>
+          </a:xfrm>
+          <a:prstGeom prst="rect">
+            <a:avLst/>
+          </a:prstGeom>
+          <a:noFill/>
+          <a:ln/>
+        </p:spPr>
+        <p:txBody>
+          <a:bodyPr wrap="square" lIns="0" tIns="0" rIns="0" bIns="0" rtlCol="0" anchor="ctr">
+            <a:normAutofit/>
+          </a:bodyPr>
+          <a:lstStyle/>
+          <a:p>
+            <a:pPr algn="ctr" indent="0" marL="0">
+              <a:buNone/>
+            </a:pPr>
+            <a:r>
+              <a:rPr lang="en-US" sz="3600" b="1" dirty="0">
+                <a:solidFill>
+                  <a:srgbClr val="990011"/>
+                </a:solidFill>
+                <a:latin typeface="Times New Roman" pitchFamily="34" charset="0"/>
+                <a:ea typeface="Times New Roman" pitchFamily="34" charset="-122"/>
+                <a:cs typeface="Times New Roman" pitchFamily="34" charset="-120"/>
+              </a:rPr>
+              <a:t>Evaluation 2</a:t>
+            </a:r>
+            <a:endParaRPr lang="en-US" sz="3600" dirty="0"/>
+          </a:p>
+        </p:txBody>
+      </p:sp>
+      <p:sp>
+        <p:nvSpPr>
+          <p:cNvPr id="5" name="Text 2"/>
+          <p:cNvSpPr/>
+          <p:nvPr/>
+        </p:nvSpPr>
+        <p:spPr>
+          <a:xfrm>
+            <a:off x="5349240" y="1783080"/>
+            <a:ext cx="6522415" cy="4663440"/>
+          </a:xfrm>
+          <a:prstGeom prst="rect">
+            <a:avLst/>
+          </a:prstGeom>
+          <a:noFill/>
+          <a:ln/>
+        </p:spPr>
+        <p:txBody>
+          <a:bodyPr wrap="square" lIns="0" tIns="0" rIns="0" bIns="0" rtlCol="0" anchor="t"/>
+          <a:lstStyle/>
+          <a:p>
+            <a:pPr algn="l" indent="0" marL="0">
+              <a:spcAft>
+                <a:spcPts val="800"/>
+              </a:spcAft>
+              <a:buNone/>
+            </a:pPr>
+            <a:r>
+              <a:rPr lang="en-US" sz="4000" dirty="0">
+                <a:solidFill>
+                  <a:srgbClr val="111111"/>
+                </a:solidFill>
+                <a:latin typeface="Times New Roman" pitchFamily="34" charset="0"/>
+                <a:ea typeface="Times New Roman" pitchFamily="34" charset="-122"/>
+                <a:cs typeface="Times New Roman" pitchFamily="34" charset="-120"/>
+              </a:rPr>
+              <a:t>Why is the outside of a bend steep?</a:t>
+            </a:r>
+            <a:endParaRPr lang="en-US" sz="4000" dirty="0"/>
+          </a:p>
+        </p:txBody>
+      </p:sp>
+      <p:sp>
+        <p:nvSpPr>
+          <p:cNvPr id="25" name="Slide Number Placeholder 0"/>
+          <p:cNvSpPr>
+            <a:spLocks noGrp="1"/>
+          </p:cNvSpPr>
+          <p:nvPr>
+            <p:ph type="sldNum" sz="quarter" idx="4294967295"/>
+          </p:nvPr>
+        </p:nvSpPr>
+        <p:spPr>
+          <a:xfrm>
+            <a:off x="27432" y="91440"/>
+            <a:ext cx="585216" cy="475488"/>
+          </a:xfrm>
+          <a:prstGeom prst="rect">
+            <a:avLst/>
+          </a:prstGeom>
+          <a:extLst>
+            <a:ext uri="{C572A759-6A51-4108-AA02-DFA0A04FC94B}">
+              <ma14:wrappingTextBoxFlag xmlns:ma14="http://schemas.microsoft.com/office/mac/drawingml/2011/main" val="0"/>
+            </a:ext>
+          </a:extLst>
+        </p:spPr>
+        <p:txBody>
+          <a:bodyPr/>
+          <a:lstStyle>
+            <a:lvl1pPr>
+              <a:defRPr sz="2000">
+                <a:solidFill>
+                  <a:srgbClr val="FFFFFF"/>
+                </a:solidFill>
+                <a:latin typeface="Calibri"/>
+                <a:ea typeface="Calibri"/>
+                <a:cs typeface="Calibri"/>
+              </a:defRPr>
+            </a:lvl1pPr>
+          </a:lstStyle>
+          <a:p>
+            <a:pPr algn="ctr"/>
+            <a:fld id="{F7021451-1387-4CA6-816F-3879F97B5CBC}" type="slidenum">
+              <a:rPr b="1" lang="en-US"/>
+              <a:t>41</a:t>
+            </a:fld>
+            <a:endParaRPr lang="en-US"/>
+          </a:p>
+        </p:txBody>
+      </p:sp>
+    </p:spTree>
+  </p:cSld>
+  <p:clrMapOvr>
+    <a:masterClrMapping/>
+  </p:clrMapOvr>
+</p:sld>
+</file>
+
+<file path=ppt/slides/slide42.xml><?xml version="1.0" encoding="utf-8"?>
+<p:sld xmlns:a="http://schemas.openxmlformats.org/drawingml/2006/main" xmlns:r="http://schemas.openxmlformats.org/officeDocument/2006/relationships" xmlns:p="http://schemas.openxmlformats.org/presentationml/2006/main">
+  <p:cSld name="Slide 42">
+    <p:spTree>
+      <p:nvGrpSpPr>
+        <p:cNvPr id="1" name=""/>
+        <p:cNvGrpSpPr/>
+        <p:nvPr/>
+      </p:nvGrpSpPr>
+      <p:grpSpPr>
+        <a:xfrm>
+          <a:off x="0" y="0"/>
+          <a:ext cx="0" cy="0"/>
+          <a:chOff x="0" y="0"/>
+          <a:chExt cx="0" cy="0"/>
+        </a:xfrm>
+      </p:grpSpPr>
+      <p:sp>
+        <p:nvSpPr>
+          <p:cNvPr id="2" name="Text 0"/>
+          <p:cNvSpPr/>
+          <p:nvPr/>
+        </p:nvSpPr>
+        <p:spPr>
+          <a:xfrm>
+            <a:off x="457200" y="713232"/>
+            <a:ext cx="11368735" cy="274320"/>
+          </a:xfrm>
+          <a:prstGeom prst="rect">
+            <a:avLst/>
+          </a:prstGeom>
+          <a:noFill/>
+          <a:ln/>
+        </p:spPr>
+        <p:txBody>
+          <a:bodyPr wrap="square" lIns="0" tIns="0" rIns="0" bIns="0" rtlCol="0" anchor="ctr"/>
+          <a:lstStyle/>
+          <a:p>
+            <a:pPr algn="r" indent="0" marL="0">
+              <a:buNone/>
+            </a:pPr>
+            <a:r>
+              <a:rPr lang="en-US" sz="1400" b="1" dirty="0">
+                <a:solidFill>
+                  <a:srgbClr val="1C3F6E"/>
+                </a:solidFill>
+                <a:latin typeface="Calibri" pitchFamily="34" charset="0"/>
+                <a:ea typeface="Calibri" pitchFamily="34" charset="-122"/>
+                <a:cs typeface="Calibri" pitchFamily="34" charset="-120"/>
+              </a:rPr>
+              <a:t>FORMATIVE EVALUATION</a:t>
+            </a:r>
+            <a:endParaRPr lang="en-US" sz="1400" dirty="0"/>
+          </a:p>
+        </p:txBody>
+      </p:sp>
+      <p:pic>
+        <p:nvPicPr>
+          <p:cNvPr id="3" name="Image 0" descr="/home/claude/f4/img/minesec_sheet.png">    </p:cNvPr>
+          <p:cNvPicPr>
+            <a:picLocks noChangeAspect="1"/>
+          </p:cNvPicPr>
+          <p:nvPr/>
+        </p:nvPicPr>
+        <p:blipFill>
+          <a:blip r:embed="rId1"/>
+          <a:stretch>
+            <a:fillRect/>
+          </a:stretch>
+        </p:blipFill>
+        <p:spPr>
+          <a:xfrm>
+            <a:off x="0" y="658368"/>
+            <a:ext cx="5120640" cy="5833872"/>
+          </a:xfrm>
+          <a:prstGeom prst="rect">
+            <a:avLst/>
+          </a:prstGeom>
+        </p:spPr>
+      </p:pic>
+      <p:sp>
+        <p:nvSpPr>
+          <p:cNvPr id="4" name="Text 1"/>
+          <p:cNvSpPr/>
+          <p:nvPr/>
+        </p:nvSpPr>
+        <p:spPr>
+          <a:xfrm>
+            <a:off x="5349240" y="1005840"/>
+            <a:ext cx="6522415" cy="731520"/>
+          </a:xfrm>
+          <a:prstGeom prst="rect">
+            <a:avLst/>
+          </a:prstGeom>
+          <a:noFill/>
+          <a:ln/>
+        </p:spPr>
+        <p:txBody>
+          <a:bodyPr wrap="square" lIns="0" tIns="0" rIns="0" bIns="0" rtlCol="0" anchor="ctr">
+            <a:normAutofit/>
+          </a:bodyPr>
+          <a:lstStyle/>
+          <a:p>
+            <a:pPr algn="ctr" indent="0" marL="0">
+              <a:buNone/>
+            </a:pPr>
+            <a:r>
+              <a:rPr lang="en-US" sz="3600" b="1" dirty="0">
+                <a:solidFill>
+                  <a:srgbClr val="990011"/>
+                </a:solidFill>
+                <a:latin typeface="Times New Roman" pitchFamily="34" charset="0"/>
+                <a:ea typeface="Times New Roman" pitchFamily="34" charset="-122"/>
+                <a:cs typeface="Times New Roman" pitchFamily="34" charset="-120"/>
+              </a:rPr>
+              <a:t>Expected Answer</a:t>
+            </a:r>
+            <a:endParaRPr lang="en-US" sz="3600" dirty="0"/>
+          </a:p>
+        </p:txBody>
+      </p:sp>
+      <p:sp>
+        <p:nvSpPr>
+          <p:cNvPr id="5" name="Text 2"/>
+          <p:cNvSpPr/>
+          <p:nvPr/>
+        </p:nvSpPr>
+        <p:spPr>
+          <a:xfrm>
+            <a:off x="5349240" y="1783080"/>
+            <a:ext cx="6522415" cy="4663440"/>
+          </a:xfrm>
+          <a:prstGeom prst="rect">
+            <a:avLst/>
+          </a:prstGeom>
+          <a:noFill/>
+          <a:ln/>
+        </p:spPr>
+        <p:txBody>
+          <a:bodyPr wrap="square" lIns="0" tIns="0" rIns="0" bIns="0" rtlCol="0" anchor="t"/>
+          <a:lstStyle/>
+          <a:p>
+            <a:pPr algn="l" indent="0" marL="0">
+              <a:spcAft>
+                <a:spcPts val="800"/>
+              </a:spcAft>
+              <a:buNone/>
+            </a:pPr>
+            <a:r>
+              <a:rPr lang="en-US" sz="4000" dirty="0">
+                <a:solidFill>
+                  <a:srgbClr val="111111"/>
+                </a:solidFill>
+                <a:latin typeface="Times New Roman" pitchFamily="34" charset="0"/>
+                <a:ea typeface="Times New Roman" pitchFamily="34" charset="-122"/>
+                <a:cs typeface="Times New Roman" pitchFamily="34" charset="-120"/>
+              </a:rPr>
+              <a:t>The fast water erodes it.</a:t>
+            </a:r>
+            <a:endParaRPr lang="en-US" sz="4000" dirty="0"/>
+          </a:p>
+        </p:txBody>
+      </p:sp>
+      <p:sp>
+        <p:nvSpPr>
+          <p:cNvPr id="25" name="Slide Number Placeholder 0"/>
+          <p:cNvSpPr>
+            <a:spLocks noGrp="1"/>
+          </p:cNvSpPr>
+          <p:nvPr>
+            <p:ph type="sldNum" sz="quarter" idx="4294967295"/>
+          </p:nvPr>
+        </p:nvSpPr>
+        <p:spPr>
+          <a:xfrm>
+            <a:off x="27432" y="91440"/>
+            <a:ext cx="585216" cy="475488"/>
+          </a:xfrm>
+          <a:prstGeom prst="rect">
+            <a:avLst/>
+          </a:prstGeom>
+          <a:extLst>
+            <a:ext uri="{C572A759-6A51-4108-AA02-DFA0A04FC94B}">
+              <ma14:wrappingTextBoxFlag xmlns:ma14="http://schemas.microsoft.com/office/mac/drawingml/2011/main" val="0"/>
+            </a:ext>
+          </a:extLst>
+        </p:spPr>
+        <p:txBody>
+          <a:bodyPr/>
+          <a:lstStyle>
+            <a:lvl1pPr>
+              <a:defRPr sz="2000">
+                <a:solidFill>
+                  <a:srgbClr val="FFFFFF"/>
+                </a:solidFill>
+                <a:latin typeface="Calibri"/>
+                <a:ea typeface="Calibri"/>
+                <a:cs typeface="Calibri"/>
+              </a:defRPr>
+            </a:lvl1pPr>
+          </a:lstStyle>
+          <a:p>
+            <a:pPr algn="ctr"/>
+            <a:fld id="{F7021451-1387-4CA6-816F-3879F97B5CBC}" type="slidenum">
+              <a:rPr b="1" lang="en-US"/>
+              <a:t>42</a:t>
+            </a:fld>
+            <a:endParaRPr lang="en-US"/>
+          </a:p>
+        </p:txBody>
+      </p:sp>
+    </p:spTree>
+  </p:cSld>
+  <p:clrMapOvr>
+    <a:masterClrMapping/>
+  </p:clrMapOvr>
+</p:sld>
+</file>
+
+<file path=ppt/slides/slide43.xml><?xml version="1.0" encoding="utf-8"?>
+<p:sld xmlns:a="http://schemas.openxmlformats.org/drawingml/2006/main" xmlns:r="http://schemas.openxmlformats.org/officeDocument/2006/relationships" xmlns:p="http://schemas.openxmlformats.org/presentationml/2006/main">
+  <p:cSld name="Slide 43">
+    <p:spTree>
+      <p:nvGrpSpPr>
+        <p:cNvPr id="1" name=""/>
+        <p:cNvGrpSpPr/>
+        <p:nvPr/>
+      </p:nvGrpSpPr>
+      <p:grpSpPr>
+        <a:xfrm>
+          <a:off x="0" y="0"/>
+          <a:ext cx="0" cy="0"/>
+          <a:chOff x="0" y="0"/>
+          <a:chExt cx="0" cy="0"/>
+        </a:xfrm>
+      </p:grpSpPr>
+      <p:sp>
+        <p:nvSpPr>
+          <p:cNvPr id="2" name="Text 0"/>
+          <p:cNvSpPr/>
+          <p:nvPr/>
+        </p:nvSpPr>
+        <p:spPr>
+          <a:xfrm>
+            <a:off x="457200" y="713232"/>
+            <a:ext cx="11368735" cy="274320"/>
+          </a:xfrm>
+          <a:prstGeom prst="rect">
+            <a:avLst/>
+          </a:prstGeom>
+          <a:noFill/>
+          <a:ln/>
+        </p:spPr>
+        <p:txBody>
+          <a:bodyPr wrap="square" lIns="0" tIns="0" rIns="0" bIns="0" rtlCol="0" anchor="ctr"/>
+          <a:lstStyle/>
+          <a:p>
+            <a:pPr algn="r" indent="0" marL="0">
+              <a:buNone/>
+            </a:pPr>
+            <a:r>
+              <a:rPr lang="en-US" sz="1400" b="1" dirty="0">
+                <a:solidFill>
+                  <a:srgbClr val="1C3F6E"/>
+                </a:solidFill>
+                <a:latin typeface="Calibri" pitchFamily="34" charset="0"/>
+                <a:ea typeface="Calibri" pitchFamily="34" charset="-122"/>
+                <a:cs typeface="Calibri" pitchFamily="34" charset="-120"/>
+              </a:rPr>
+              <a:t>REMEDIATION</a:t>
+            </a:r>
+            <a:endParaRPr lang="en-US" sz="1400" dirty="0"/>
+          </a:p>
+        </p:txBody>
+      </p:sp>
+      <p:pic>
+        <p:nvPicPr>
+          <p:cNvPr id="3" name="Image 0" descr="/home/claude/f4/img/minesec_sheet.png">    </p:cNvPr>
+          <p:cNvPicPr>
+            <a:picLocks noChangeAspect="1"/>
+          </p:cNvPicPr>
+          <p:nvPr/>
+        </p:nvPicPr>
+        <p:blipFill>
+          <a:blip r:embed="rId1"/>
+          <a:stretch>
+            <a:fillRect/>
+          </a:stretch>
+        </p:blipFill>
+        <p:spPr>
+          <a:xfrm>
+            <a:off x="0" y="658368"/>
+            <a:ext cx="2468880" cy="5833872"/>
+          </a:xfrm>
+          <a:prstGeom prst="rect">
+            <a:avLst/>
+          </a:prstGeom>
+        </p:spPr>
+      </p:pic>
+      <p:sp>
+        <p:nvSpPr>
+          <p:cNvPr id="4" name="Text 1"/>
+          <p:cNvSpPr/>
+          <p:nvPr/>
+        </p:nvSpPr>
+        <p:spPr>
+          <a:xfrm>
+            <a:off x="2697480" y="1005840"/>
+            <a:ext cx="9174175" cy="731520"/>
+          </a:xfrm>
+          <a:prstGeom prst="rect">
+            <a:avLst/>
+          </a:prstGeom>
+          <a:noFill/>
+          <a:ln/>
+        </p:spPr>
+        <p:txBody>
+          <a:bodyPr wrap="square" lIns="0" tIns="0" rIns="0" bIns="0" rtlCol="0" anchor="ctr">
+            <a:normAutofit/>
+          </a:bodyPr>
+          <a:lstStyle/>
+          <a:p>
+            <a:pPr algn="ctr" indent="0" marL="0">
+              <a:buNone/>
+            </a:pPr>
+            <a:r>
+              <a:rPr lang="en-US" sz="3600" b="1" dirty="0">
+                <a:solidFill>
+                  <a:srgbClr val="990011"/>
+                </a:solidFill>
+                <a:latin typeface="Times New Roman" pitchFamily="34" charset="0"/>
+                <a:ea typeface="Times New Roman" pitchFamily="34" charset="-122"/>
+                <a:cs typeface="Times New Roman" pitchFamily="34" charset="-120"/>
+              </a:rPr>
+              <a:t>Remediation</a:t>
+            </a:r>
+            <a:endParaRPr lang="en-US" sz="3600" dirty="0"/>
+          </a:p>
+        </p:txBody>
+      </p:sp>
+      <p:sp>
+        <p:nvSpPr>
+          <p:cNvPr id="5" name="Text 2"/>
+          <p:cNvSpPr/>
+          <p:nvPr/>
+        </p:nvSpPr>
+        <p:spPr>
+          <a:xfrm>
+            <a:off x="2697480" y="1783080"/>
+            <a:ext cx="9174175" cy="4663440"/>
+          </a:xfrm>
+          <a:prstGeom prst="rect">
+            <a:avLst/>
+          </a:prstGeom>
+          <a:noFill/>
+          <a:ln/>
+        </p:spPr>
+        <p:txBody>
+          <a:bodyPr wrap="square" lIns="0" tIns="0" rIns="0" bIns="0" rtlCol="0" anchor="t"/>
+          <a:lstStyle/>
+          <a:p>
+            <a:pPr algn="l" indent="0" marL="0">
+              <a:spcAft>
+                <a:spcPts val="800"/>
+              </a:spcAft>
+              <a:buNone/>
+            </a:pPr>
+            <a:r>
+              <a:rPr lang="en-US" sz="4000" b="1" dirty="0">
+                <a:solidFill>
+                  <a:srgbClr val="111111"/>
+                </a:solidFill>
+                <a:latin typeface="Times New Roman" pitchFamily="34" charset="0"/>
+                <a:ea typeface="Times New Roman" pitchFamily="34" charset="-122"/>
+                <a:cs typeface="Times New Roman" pitchFamily="34" charset="-120"/>
+              </a:rPr>
+              <a:t>Fill in the blanks:</a:t>
+            </a:r>
+            <a:endParaRPr lang="en-US" sz="4000" dirty="0"/>
+          </a:p>
+          <a:p>
+            <a:pPr algn="l" marL="342900" indent="-342900">
+              <a:spcAft>
+                <a:spcPts val="800"/>
+              </a:spcAft>
+              <a:buSzPct val="100000"/>
+              <a:buFont typeface="+mj-lt"/>
+              <a:buAutoNum type="arabicPeriod" startAt="1"/>
+            </a:pPr>
+            <a:r>
+              <a:rPr lang="en-US" sz="4000" dirty="0">
+                <a:solidFill>
+                  <a:srgbClr val="111111"/>
+                </a:solidFill>
+                <a:latin typeface="Times New Roman" pitchFamily="34" charset="0"/>
+                <a:ea typeface="Times New Roman" pitchFamily="34" charset="-122"/>
+                <a:cs typeface="Times New Roman" pitchFamily="34" charset="-120"/>
+              </a:rPr>
+              <a:t>A big bend in a river is a ______.</a:t>
+            </a:r>
+            <a:endParaRPr lang="en-US" sz="4000" dirty="0"/>
+          </a:p>
+          <a:p>
+            <a:pPr algn="l" marL="342900" indent="-342900">
+              <a:spcAft>
+                <a:spcPts val="800"/>
+              </a:spcAft>
+              <a:buSzPct val="100000"/>
+              <a:buFont typeface="+mj-lt"/>
+              <a:buAutoNum type="arabicPeriod" startAt="1"/>
+            </a:pPr>
+            <a:r>
+              <a:rPr lang="en-US" sz="4000" dirty="0">
+                <a:solidFill>
+                  <a:srgbClr val="111111"/>
+                </a:solidFill>
+                <a:latin typeface="Times New Roman" pitchFamily="34" charset="0"/>
+                <a:ea typeface="Times New Roman" pitchFamily="34" charset="-122"/>
+                <a:cs typeface="Times New Roman" pitchFamily="34" charset="-120"/>
+              </a:rPr>
+              <a:t>The steep bank on the outside is a river ______.</a:t>
+            </a:r>
+            <a:endParaRPr lang="en-US" sz="4000" dirty="0"/>
+          </a:p>
+          <a:p>
+            <a:pPr algn="l" marL="342900" indent="-342900">
+              <a:spcAft>
+                <a:spcPts val="800"/>
+              </a:spcAft>
+              <a:buSzPct val="100000"/>
+              <a:buFont typeface="+mj-lt"/>
+              <a:buAutoNum type="arabicPeriod" startAt="1"/>
+            </a:pPr>
+            <a:r>
+              <a:rPr lang="en-US" sz="4000" dirty="0">
+                <a:solidFill>
+                  <a:srgbClr val="111111"/>
+                </a:solidFill>
+                <a:latin typeface="Times New Roman" pitchFamily="34" charset="0"/>
+                <a:ea typeface="Times New Roman" pitchFamily="34" charset="-122"/>
+                <a:cs typeface="Times New Roman" pitchFamily="34" charset="-120"/>
+              </a:rPr>
+              <a:t>The gentle bank on the inside is a slip-off ______.</a:t>
+            </a:r>
+            <a:endParaRPr lang="en-US" sz="4000" dirty="0"/>
+          </a:p>
+        </p:txBody>
+      </p:sp>
+      <p:sp>
+        <p:nvSpPr>
+          <p:cNvPr id="25" name="Slide Number Placeholder 0"/>
+          <p:cNvSpPr>
+            <a:spLocks noGrp="1"/>
+          </p:cNvSpPr>
+          <p:nvPr>
+            <p:ph type="sldNum" sz="quarter" idx="4294967295"/>
+          </p:nvPr>
+        </p:nvSpPr>
+        <p:spPr>
+          <a:xfrm>
+            <a:off x="27432" y="91440"/>
+            <a:ext cx="585216" cy="475488"/>
+          </a:xfrm>
+          <a:prstGeom prst="rect">
+            <a:avLst/>
+          </a:prstGeom>
+          <a:extLst>
+            <a:ext uri="{C572A759-6A51-4108-AA02-DFA0A04FC94B}">
+              <ma14:wrappingTextBoxFlag xmlns:ma14="http://schemas.microsoft.com/office/mac/drawingml/2011/main" val="0"/>
+            </a:ext>
+          </a:extLst>
+        </p:spPr>
+        <p:txBody>
+          <a:bodyPr/>
+          <a:lstStyle>
+            <a:lvl1pPr>
+              <a:defRPr sz="2000">
+                <a:solidFill>
+                  <a:srgbClr val="FFFFFF"/>
+                </a:solidFill>
+                <a:latin typeface="Calibri"/>
+                <a:ea typeface="Calibri"/>
+                <a:cs typeface="Calibri"/>
+              </a:defRPr>
+            </a:lvl1pPr>
+          </a:lstStyle>
+          <a:p>
+            <a:pPr algn="ctr"/>
+            <a:fld id="{F7021451-1387-4CA6-816F-3879F97B5CBC}" type="slidenum">
+              <a:rPr b="1" lang="en-US"/>
+              <a:t>43</a:t>
+            </a:fld>
+            <a:endParaRPr lang="en-US"/>
+          </a:p>
+        </p:txBody>
+      </p:sp>
+    </p:spTree>
+  </p:cSld>
+  <p:clrMapOvr>
+    <a:masterClrMapping/>
+  </p:clrMapOvr>
+</p:sld>
+</file>
+
+<file path=ppt/slides/slide44.xml><?xml version="1.0" encoding="utf-8"?>
+<p:sld xmlns:a="http://schemas.openxmlformats.org/drawingml/2006/main" xmlns:r="http://schemas.openxmlformats.org/officeDocument/2006/relationships" xmlns:p="http://schemas.openxmlformats.org/presentationml/2006/main">
+  <p:cSld name="Slide 44">
+    <p:spTree>
+      <p:nvGrpSpPr>
+        <p:cNvPr id="1" name=""/>
+        <p:cNvGrpSpPr/>
+        <p:nvPr/>
+      </p:nvGrpSpPr>
+      <p:grpSpPr>
+        <a:xfrm>
+          <a:off x="0" y="0"/>
+          <a:ext cx="0" cy="0"/>
+          <a:chOff x="0" y="0"/>
+          <a:chExt cx="0" cy="0"/>
+        </a:xfrm>
+      </p:grpSpPr>
+      <p:sp>
+        <p:nvSpPr>
+          <p:cNvPr id="2" name="Text 0"/>
+          <p:cNvSpPr/>
+          <p:nvPr/>
+        </p:nvSpPr>
+        <p:spPr>
+          <a:xfrm>
+            <a:off x="457200" y="713232"/>
+            <a:ext cx="11368735" cy="274320"/>
+          </a:xfrm>
+          <a:prstGeom prst="rect">
+            <a:avLst/>
+          </a:prstGeom>
+          <a:noFill/>
+          <a:ln/>
+        </p:spPr>
+        <p:txBody>
+          <a:bodyPr wrap="square" lIns="0" tIns="0" rIns="0" bIns="0" rtlCol="0" anchor="ctr"/>
+          <a:lstStyle/>
+          <a:p>
+            <a:pPr algn="r" indent="0" marL="0">
+              <a:buNone/>
+            </a:pPr>
+            <a:r>
+              <a:rPr lang="en-US" sz="1400" b="1" dirty="0">
+                <a:solidFill>
+                  <a:srgbClr val="1C3F6E"/>
+                </a:solidFill>
+                <a:latin typeface="Calibri" pitchFamily="34" charset="0"/>
+                <a:ea typeface="Calibri" pitchFamily="34" charset="-122"/>
+                <a:cs typeface="Calibri" pitchFamily="34" charset="-120"/>
+              </a:rPr>
+              <a:t>HOMEWORK</a:t>
+            </a:r>
+            <a:endParaRPr lang="en-US" sz="1400" dirty="0"/>
+          </a:p>
+        </p:txBody>
+      </p:sp>
+      <p:pic>
+        <p:nvPicPr>
+          <p:cNvPr id="3" name="Image 0" descr="/home/claude/f4/img/minesec_sheet.png">    </p:cNvPr>
+          <p:cNvPicPr>
+            <a:picLocks noChangeAspect="1"/>
+          </p:cNvPicPr>
+          <p:nvPr/>
+        </p:nvPicPr>
+        <p:blipFill>
+          <a:blip r:embed="rId1"/>
+          <a:stretch>
+            <a:fillRect/>
+          </a:stretch>
+        </p:blipFill>
+        <p:spPr>
+          <a:xfrm>
+            <a:off x="0" y="658368"/>
+            <a:ext cx="5120640" cy="5833872"/>
+          </a:xfrm>
+          <a:prstGeom prst="rect">
+            <a:avLst/>
+          </a:prstGeom>
+        </p:spPr>
+      </p:pic>
+      <p:sp>
+        <p:nvSpPr>
+          <p:cNvPr id="4" name="Text 1"/>
+          <p:cNvSpPr/>
+          <p:nvPr/>
+        </p:nvSpPr>
+        <p:spPr>
+          <a:xfrm>
+            <a:off x="5349240" y="1005840"/>
+            <a:ext cx="6522415" cy="731520"/>
+          </a:xfrm>
+          <a:prstGeom prst="rect">
+            <a:avLst/>
+          </a:prstGeom>
+          <a:noFill/>
+          <a:ln/>
+        </p:spPr>
+        <p:txBody>
+          <a:bodyPr wrap="square" lIns="0" tIns="0" rIns="0" bIns="0" rtlCol="0" anchor="ctr">
+            <a:normAutofit/>
+          </a:bodyPr>
+          <a:lstStyle/>
+          <a:p>
+            <a:pPr algn="ctr" indent="0" marL="0">
+              <a:buNone/>
+            </a:pPr>
+            <a:r>
+              <a:rPr lang="en-US" sz="3600" b="1" dirty="0">
+                <a:solidFill>
+                  <a:srgbClr val="990011"/>
+                </a:solidFill>
+                <a:latin typeface="Times New Roman" pitchFamily="34" charset="0"/>
+                <a:ea typeface="Times New Roman" pitchFamily="34" charset="-122"/>
+                <a:cs typeface="Times New Roman" pitchFamily="34" charset="-120"/>
+              </a:rPr>
+              <a:t>Homework</a:t>
+            </a:r>
+            <a:endParaRPr lang="en-US" sz="3600" dirty="0"/>
+          </a:p>
+        </p:txBody>
+      </p:sp>
+      <p:sp>
+        <p:nvSpPr>
+          <p:cNvPr id="5" name="Text 2"/>
+          <p:cNvSpPr/>
+          <p:nvPr/>
+        </p:nvSpPr>
+        <p:spPr>
+          <a:xfrm>
+            <a:off x="5349240" y="1783080"/>
+            <a:ext cx="6522415" cy="4663440"/>
+          </a:xfrm>
+          <a:prstGeom prst="rect">
+            <a:avLst/>
+          </a:prstGeom>
+          <a:noFill/>
+          <a:ln/>
+        </p:spPr>
+        <p:txBody>
+          <a:bodyPr wrap="square" lIns="0" tIns="0" rIns="0" bIns="0" rtlCol="0" anchor="t"/>
+          <a:lstStyle/>
+          <a:p>
+            <a:pPr algn="l" indent="0" marL="0">
+              <a:spcAft>
+                <a:spcPts val="800"/>
+              </a:spcAft>
+              <a:buNone/>
+            </a:pPr>
+            <a:r>
+              <a:rPr lang="en-US" sz="4000" dirty="0">
+                <a:solidFill>
+                  <a:srgbClr val="111111"/>
+                </a:solidFill>
+                <a:latin typeface="Times New Roman" pitchFamily="34" charset="0"/>
+                <a:ea typeface="Times New Roman" pitchFamily="34" charset="-122"/>
+                <a:cs typeface="Times New Roman" pitchFamily="34" charset="-120"/>
+              </a:rPr>
+              <a:t>Look at a map of the Niger Delta or the Nile Delta in your atlas. Draw its shape and name the sea it reaches.</a:t>
+            </a:r>
+            <a:endParaRPr lang="en-US" sz="4000" dirty="0"/>
+          </a:p>
+        </p:txBody>
+      </p:sp>
+      <p:sp>
+        <p:nvSpPr>
+          <p:cNvPr id="25" name="Slide Number Placeholder 0"/>
+          <p:cNvSpPr>
+            <a:spLocks noGrp="1"/>
+          </p:cNvSpPr>
+          <p:nvPr>
+            <p:ph type="sldNum" sz="quarter" idx="4294967295"/>
+          </p:nvPr>
+        </p:nvSpPr>
+        <p:spPr>
+          <a:xfrm>
+            <a:off x="27432" y="91440"/>
+            <a:ext cx="585216" cy="475488"/>
+          </a:xfrm>
+          <a:prstGeom prst="rect">
+            <a:avLst/>
+          </a:prstGeom>
+          <a:extLst>
+            <a:ext uri="{C572A759-6A51-4108-AA02-DFA0A04FC94B}">
+              <ma14:wrappingTextBoxFlag xmlns:ma14="http://schemas.microsoft.com/office/mac/drawingml/2011/main" val="0"/>
+            </a:ext>
+          </a:extLst>
+        </p:spPr>
+        <p:txBody>
+          <a:bodyPr/>
+          <a:lstStyle>
+            <a:lvl1pPr>
+              <a:defRPr sz="2000">
+                <a:solidFill>
+                  <a:srgbClr val="FFFFFF"/>
+                </a:solidFill>
+                <a:latin typeface="Calibri"/>
+                <a:ea typeface="Calibri"/>
+                <a:cs typeface="Calibri"/>
+              </a:defRPr>
+            </a:lvl1pPr>
+          </a:lstStyle>
+          <a:p>
+            <a:pPr algn="ctr"/>
+            <a:fld id="{F7021451-1387-4CA6-816F-3879F97B5CBC}" type="slidenum">
+              <a:rPr b="1" lang="en-US"/>
+              <a:t>44</a:t>
+            </a:fld>
+            <a:endParaRPr lang="en-US"/>
+          </a:p>
+        </p:txBody>
+      </p:sp>
+    </p:spTree>
+  </p:cSld>
+  <p:clrMapOvr>
+    <a:masterClrMapping/>
+  </p:clrMapOvr>
+</p:sld>
+</file>
+
+<file path=ppt/slides/slide45.xml><?xml version="1.0" encoding="utf-8"?>
+<p:sld xmlns:a="http://schemas.openxmlformats.org/drawingml/2006/main" xmlns:r="http://schemas.openxmlformats.org/officeDocument/2006/relationships" xmlns:p="http://schemas.openxmlformats.org/presentationml/2006/main">
+  <p:cSld name="Slide 45">
+    <p:spTree>
+      <p:nvGrpSpPr>
+        <p:cNvPr id="1" name=""/>
+        <p:cNvGrpSpPr/>
+        <p:nvPr/>
+      </p:nvGrpSpPr>
+      <p:grpSpPr>
+        <a:xfrm>
+          <a:off x="0" y="0"/>
+          <a:ext cx="0" cy="0"/>
+          <a:chOff x="0" y="0"/>
+          <a:chExt cx="0" cy="0"/>
+        </a:xfrm>
+      </p:grpSpPr>
+      <p:sp>
+        <p:nvSpPr>
+          <p:cNvPr id="2" name="Text 0"/>
+          <p:cNvSpPr/>
+          <p:nvPr/>
+        </p:nvSpPr>
+        <p:spPr>
+          <a:xfrm>
+            <a:off x="457200" y="713232"/>
+            <a:ext cx="11368735" cy="274320"/>
+          </a:xfrm>
+          <a:prstGeom prst="rect">
+            <a:avLst/>
+          </a:prstGeom>
+          <a:noFill/>
+          <a:ln/>
+        </p:spPr>
+        <p:txBody>
+          <a:bodyPr wrap="square" lIns="0" tIns="0" rIns="0" bIns="0" rtlCol="0" anchor="ctr"/>
+          <a:lstStyle/>
+          <a:p>
+            <a:pPr algn="r" indent="0" marL="0">
+              <a:buNone/>
+            </a:pPr>
+            <a:r>
+              <a:rPr lang="en-US" sz="1400" b="1" dirty="0">
+                <a:solidFill>
+                  <a:srgbClr val="1C3F6E"/>
+                </a:solidFill>
+                <a:latin typeface="Calibri" pitchFamily="34" charset="0"/>
+                <a:ea typeface="Calibri" pitchFamily="34" charset="-122"/>
+                <a:cs typeface="Calibri" pitchFamily="34" charset="-120"/>
+              </a:rPr>
+              <a:t>NEXT LESSON</a:t>
+            </a:r>
+            <a:endParaRPr lang="en-US" sz="1400" dirty="0"/>
+          </a:p>
+        </p:txBody>
+      </p:sp>
+      <p:pic>
+        <p:nvPicPr>
+          <p:cNvPr id="3" name="Image 0" descr="/home/claude/f4/img/minesec_sheet.png">    </p:cNvPr>
+          <p:cNvPicPr>
+            <a:picLocks noChangeAspect="1"/>
+          </p:cNvPicPr>
+          <p:nvPr/>
+        </p:nvPicPr>
+        <p:blipFill>
+          <a:blip r:embed="rId1"/>
+          <a:stretch>
+            <a:fillRect/>
+          </a:stretch>
+        </p:blipFill>
+        <p:spPr>
+          <a:xfrm>
+            <a:off x="0" y="658368"/>
+            <a:ext cx="5120640" cy="5833872"/>
+          </a:xfrm>
+          <a:prstGeom prst="rect">
+            <a:avLst/>
+          </a:prstGeom>
+        </p:spPr>
+      </p:pic>
+      <p:sp>
+        <p:nvSpPr>
+          <p:cNvPr id="4" name="Text 1"/>
+          <p:cNvSpPr/>
+          <p:nvPr/>
+        </p:nvSpPr>
+        <p:spPr>
+          <a:xfrm>
+            <a:off x="5349240" y="1005840"/>
+            <a:ext cx="6522415" cy="731520"/>
+          </a:xfrm>
+          <a:prstGeom prst="rect">
+            <a:avLst/>
+          </a:prstGeom>
+          <a:noFill/>
+          <a:ln/>
+        </p:spPr>
+        <p:txBody>
+          <a:bodyPr wrap="square" lIns="0" tIns="0" rIns="0" bIns="0" rtlCol="0" anchor="ctr">
+            <a:normAutofit/>
+          </a:bodyPr>
+          <a:lstStyle/>
+          <a:p>
+            <a:pPr algn="ctr" indent="0" marL="0">
+              <a:buNone/>
+            </a:pPr>
+            <a:r>
+              <a:rPr lang="en-US" sz="3600" b="1" dirty="0">
+                <a:solidFill>
+                  <a:srgbClr val="990011"/>
+                </a:solidFill>
+                <a:latin typeface="Times New Roman" pitchFamily="34" charset="0"/>
+                <a:ea typeface="Times New Roman" pitchFamily="34" charset="-122"/>
+                <a:cs typeface="Times New Roman" pitchFamily="34" charset="-120"/>
+              </a:rPr>
+              <a:t>Next Lesson</a:t>
+            </a:r>
+            <a:endParaRPr lang="en-US" sz="3600" dirty="0"/>
+          </a:p>
+        </p:txBody>
+      </p:sp>
+      <p:sp>
+        <p:nvSpPr>
+          <p:cNvPr id="5" name="Text 2"/>
+          <p:cNvSpPr/>
+          <p:nvPr/>
+        </p:nvSpPr>
+        <p:spPr>
+          <a:xfrm>
+            <a:off x="5349240" y="1783080"/>
+            <a:ext cx="6522415" cy="4663440"/>
+          </a:xfrm>
+          <a:prstGeom prst="rect">
+            <a:avLst/>
+          </a:prstGeom>
+          <a:noFill/>
+          <a:ln/>
+        </p:spPr>
+        <p:txBody>
+          <a:bodyPr wrap="square" lIns="0" tIns="0" rIns="0" bIns="0" rtlCol="0" anchor="ctr"/>
+          <a:lstStyle/>
+          <a:p>
+            <a:pPr algn="ctr" indent="0" marL="0">
+              <a:spcAft>
+                <a:spcPts val="800"/>
+              </a:spcAft>
+              <a:buNone/>
+            </a:pPr>
+            <a:r>
+              <a:rPr lang="en-US" sz="4000" b="1" dirty="0">
+                <a:solidFill>
+                  <a:srgbClr val="111111"/>
+                </a:solidFill>
+                <a:latin typeface="Times New Roman" pitchFamily="34" charset="0"/>
+                <a:ea typeface="Times New Roman" pitchFamily="34" charset="-122"/>
+                <a:cs typeface="Times New Roman" pitchFamily="34" charset="-120"/>
+              </a:rPr>
+              <a:t>Our next lesson will be on:</a:t>
+            </a:r>
+            <a:endParaRPr lang="en-US" sz="4000" dirty="0"/>
+          </a:p>
+          <a:p>
+            <a:pPr algn="ctr" indent="0" marL="0">
+              <a:spcAft>
+                <a:spcPts val="800"/>
+              </a:spcAft>
+              <a:buNone/>
+            </a:pPr>
+            <a:r>
+              <a:rPr lang="en-US" sz="4000" b="1" dirty="0">
+                <a:solidFill>
+                  <a:srgbClr val="990011"/>
+                </a:solidFill>
+                <a:latin typeface="Times New Roman" pitchFamily="34" charset="0"/>
+                <a:ea typeface="Times New Roman" pitchFamily="34" charset="-122"/>
+                <a:cs typeface="Times New Roman" pitchFamily="34" charset="-120"/>
+              </a:rPr>
+              <a:t>Lesson 21: The Lower Course of a River</a:t>
+            </a:r>
+            <a:endParaRPr lang="en-US" sz="4000" dirty="0"/>
+          </a:p>
+        </p:txBody>
+      </p:sp>
+      <p:sp>
+        <p:nvSpPr>
+          <p:cNvPr id="25" name="Slide Number Placeholder 0"/>
+          <p:cNvSpPr>
+            <a:spLocks noGrp="1"/>
+          </p:cNvSpPr>
+          <p:nvPr>
+            <p:ph type="sldNum" sz="quarter" idx="4294967295"/>
+          </p:nvPr>
+        </p:nvSpPr>
+        <p:spPr>
+          <a:xfrm>
+            <a:off x="27432" y="91440"/>
+            <a:ext cx="585216" cy="475488"/>
+          </a:xfrm>
+          <a:prstGeom prst="rect">
+            <a:avLst/>
+          </a:prstGeom>
+          <a:extLst>
+            <a:ext uri="{C572A759-6A51-4108-AA02-DFA0A04FC94B}">
+              <ma14:wrappingTextBoxFlag xmlns:ma14="http://schemas.microsoft.com/office/mac/drawingml/2011/main" val="0"/>
+            </a:ext>
+          </a:extLst>
+        </p:spPr>
+        <p:txBody>
+          <a:bodyPr/>
+          <a:lstStyle>
+            <a:lvl1pPr>
+              <a:defRPr sz="2000">
+                <a:solidFill>
+                  <a:srgbClr val="FFFFFF"/>
+                </a:solidFill>
+                <a:latin typeface="Calibri"/>
+                <a:ea typeface="Calibri"/>
+                <a:cs typeface="Calibri"/>
+              </a:defRPr>
+            </a:lvl1pPr>
+          </a:lstStyle>
+          <a:p>
+            <a:pPr algn="ctr"/>
+            <a:fld id="{F7021451-1387-4CA6-816F-3879F97B5CBC}" type="slidenum">
+              <a:rPr b="1" lang="en-US"/>
+              <a:t>45</a:t>
+            </a:fld>
+            <a:endParaRPr lang="en-US"/>
+          </a:p>
+        </p:txBody>
+      </p:sp>
+    </p:spTree>
+  </p:cSld>
+  <p:clrMapOvr>
+    <a:masterClrMapping/>
+  </p:clrMapOvr>
+</p:sld>
+</file>
+
+<file path=ppt/slides/slide46.xml><?xml version="1.0" encoding="utf-8"?>
+<p:sld xmlns:a="http://schemas.openxmlformats.org/drawingml/2006/main" xmlns:r="http://schemas.openxmlformats.org/officeDocument/2006/relationships" xmlns:p="http://schemas.openxmlformats.org/presentationml/2006/main">
+  <p:cSld name="Slide 46">
+    <p:spTree>
+      <p:nvGrpSpPr>
+        <p:cNvPr id="1" name=""/>
+        <p:cNvGrpSpPr/>
+        <p:nvPr/>
+      </p:nvGrpSpPr>
+      <p:grpSpPr>
+        <a:xfrm>
+          <a:off x="0" y="0"/>
+          <a:ext cx="0" cy="0"/>
+          <a:chOff x="0" y="0"/>
+          <a:chExt cx="0" cy="0"/>
+        </a:xfrm>
+      </p:grpSpPr>
+      <p:sp>
+        <p:nvSpPr>
+          <p:cNvPr id="2" name="Text 0"/>
+          <p:cNvSpPr/>
+          <p:nvPr/>
+        </p:nvSpPr>
+        <p:spPr>
+          <a:xfrm>
+            <a:off x="457200" y="713232"/>
+            <a:ext cx="11368735" cy="274320"/>
+          </a:xfrm>
+          <a:prstGeom prst="rect">
+            <a:avLst/>
+          </a:prstGeom>
+          <a:noFill/>
+          <a:ln/>
+        </p:spPr>
+        <p:txBody>
+          <a:bodyPr wrap="square" lIns="0" tIns="0" rIns="0" bIns="0" rtlCol="0" anchor="ctr"/>
+          <a:lstStyle/>
+          <a:p>
+            <a:pPr algn="r" indent="0" marL="0">
+              <a:buNone/>
+            </a:pPr>
+            <a:r>
+              <a:rPr lang="en-US" sz="1400" b="1" dirty="0">
+                <a:solidFill>
+                  <a:srgbClr val="1C3F6E"/>
+                </a:solidFill>
+                <a:latin typeface="Calibri" pitchFamily="34" charset="0"/>
+                <a:ea typeface="Calibri" pitchFamily="34" charset="-122"/>
+                <a:cs typeface="Calibri" pitchFamily="34" charset="-120"/>
+              </a:rPr>
               <a:t>BILINGUAL GAME</a:t>
             </a:r>
             <a:endParaRPr lang="en-US" sz="1400" dirty="0"/>
@@ -14742,7 +16818,7 @@
       </p:sp>
       <p:graphicFrame>
         <p:nvGraphicFramePr>
-          <p:cNvPr id="42" name="Table 0"/>
+          <p:cNvPr id="47" name="Table 0"/>
           <p:cNvGraphicFramePr>
             <a:graphicFrameLocks noGrp="1"/>
           </p:cNvGraphicFramePr>
@@ -16054,7 +18130,7 @@
             <a:pPr algn="ctr"/>
             <a:fld id="{F7021451-1387-4CA6-816F-3879F97B5CBC}" type="slidenum">
               <a:rPr b="1" lang="en-US"/>
-              <a:t>41</a:t>
+              <a:t>46</a:t>
             </a:fld>
             <a:endParaRPr lang="en-US"/>
           </a:p>
@@ -16068,9 +18144,9 @@
 </p:sld>
 </file>
 
-<file path=ppt/slides/slide42.xml><?xml version="1.0" encoding="utf-8"?>
+<file path=ppt/slides/slide47.xml><?xml version="1.0" encoding="utf-8"?>
 <p:sld xmlns:a="http://schemas.openxmlformats.org/drawingml/2006/main" xmlns:r="http://schemas.openxmlformats.org/officeDocument/2006/relationships" xmlns:p="http://schemas.openxmlformats.org/presentationml/2006/main">
-  <p:cSld name="Slide 42">
+  <p:cSld name="Slide 47">
     <p:spTree>
       <p:nvGrpSpPr>
         <p:cNvPr id="1" name=""/>
@@ -16165,7 +18241,7 @@
       </p:sp>
       <p:graphicFrame>
         <p:nvGraphicFramePr>
-          <p:cNvPr id="43" name="Table 0"/>
+          <p:cNvPr id="48" name="Table 0"/>
           <p:cNvGraphicFramePr>
             <a:graphicFrameLocks noGrp="1"/>
           </p:cNvGraphicFramePr>
@@ -16787,7 +18863,7 @@
             <a:pPr algn="ctr"/>
             <a:fld id="{F7021451-1387-4CA6-816F-3879F97B5CBC}" type="slidenum">
               <a:rPr b="1" lang="en-US"/>
-              <a:t>42</a:t>
+              <a:t>47</a:t>
             </a:fld>
             <a:endParaRPr lang="en-US"/>
           </a:p>
@@ -16801,9 +18877,9 @@
 </p:sld>
 </file>
 
-<file path=ppt/slides/slide43.xml><?xml version="1.0" encoding="utf-8"?>
+<file path=ppt/slides/slide48.xml><?xml version="1.0" encoding="utf-8"?>
 <p:sld xmlns:a="http://schemas.openxmlformats.org/drawingml/2006/main" xmlns:r="http://schemas.openxmlformats.org/officeDocument/2006/relationships" xmlns:p="http://schemas.openxmlformats.org/presentationml/2006/main">
-  <p:cSld name="Slide 43">
+  <p:cSld name="Slide 48">
     <p:spTree>
       <p:nvGrpSpPr>
         <p:cNvPr id="1" name=""/>
@@ -16898,7 +18974,7 @@
       </p:sp>
       <p:graphicFrame>
         <p:nvGraphicFramePr>
-          <p:cNvPr id="44" name="Table 0"/>
+          <p:cNvPr id="49" name="Table 0"/>
           <p:cNvGraphicFramePr>
             <a:graphicFrameLocks noGrp="1"/>
           </p:cNvGraphicFramePr>
@@ -17008,7 +19084,7 @@
                           <a:ea typeface="Calibri" pitchFamily="34" charset="-122"/>
                           <a:cs typeface="Calibri" pitchFamily="34" charset="-120"/>
                         </a:rPr>
-                        <a:t>Characteristics of the Middle Course; Landforms of the Middle Course.</a:t>
+                        <a:t>DEFINITIONS; Characteristics; Transport of the Load; Landforms of the Middle Course.</a:t>
                       </a:r>
                       <a:endParaRPr lang="en-US" sz="1600" dirty="0">
                         <a:latin typeface="Calibri" charset="0"/>
@@ -17658,7 +19734,7 @@
             <a:pPr algn="ctr"/>
             <a:fld id="{F7021451-1387-4CA6-816F-3879F97B5CBC}" type="slidenum">
               <a:rPr b="1" lang="en-US"/>
-              <a:t>43</a:t>
+              <a:t>48</a:t>
             </a:fld>
             <a:endParaRPr lang="en-US"/>
           </a:p>
@@ -17672,9 +19748,9 @@
 </p:sld>
 </file>
 
-<file path=ppt/slides/slide44.xml><?xml version="1.0" encoding="utf-8"?>
+<file path=ppt/slides/slide49.xml><?xml version="1.0" encoding="utf-8"?>
 <p:sld xmlns:a="http://schemas.openxmlformats.org/drawingml/2006/main" xmlns:r="http://schemas.openxmlformats.org/officeDocument/2006/relationships" xmlns:p="http://schemas.openxmlformats.org/presentationml/2006/main">
-  <p:cSld name="Slide 44">
+  <p:cSld name="Slide 49">
     <p:spTree>
       <p:nvGrpSpPr>
         <p:cNvPr id="1" name=""/>
@@ -17851,7 +19927,7 @@
                 <a:ea typeface="Calibri" pitchFamily="34" charset="-122"/>
                 <a:cs typeface="Calibri" pitchFamily="34" charset="-120"/>
               </a:rPr>
-              <a:t>Activity 2 is an animation (GIF): it plays automatically in slide-show mode.</a:t>
+              <a:t>Activities 1 and 3 are animations (GIF): it plays automatically in slide-show mode.</a:t>
             </a:r>
             <a:endParaRPr lang="en-US" sz="2000" dirty="0"/>
           </a:p>
@@ -17872,7 +19948,7 @@
                 <a:ea typeface="Calibri" pitchFamily="34" charset="-122"/>
                 <a:cs typeface="Calibri" pitchFamily="34" charset="-120"/>
               </a:rPr>
-              <a:t>Without the projector (Activity 1): draw a snake-like river on the board.</a:t>
+              <a:t>Without the projector (Activity 1): roll a stone along a table.</a:t>
             </a:r>
             <a:endParaRPr lang="en-US" sz="2000" dirty="0"/>
           </a:p>
@@ -17893,7 +19969,7 @@
                 <a:ea typeface="Calibri" pitchFamily="34" charset="-122"/>
                 <a:cs typeface="Calibri" pitchFamily="34" charset="-120"/>
               </a:rPr>
-              <a:t>Without the projector (Activity 2): draw a bend and mark the outside and the inside.</a:t>
+              <a:t>Without the projector (Activity 2): draw a winding river on the board.</a:t>
             </a:r>
             <a:endParaRPr lang="en-US" sz="2000" dirty="0"/>
           </a:p>
@@ -17914,7 +19990,7 @@
                 <a:ea typeface="Calibri" pitchFamily="34" charset="-122"/>
                 <a:cs typeface="Calibri" pitchFamily="34" charset="-120"/>
               </a:rPr>
-              <a:t>Without the projector (Activity 3): describe the banks of the Benue at Garoua.</a:t>
+              <a:t>Without the projector (Activity 3): mark the fast and slow water on the drawing.</a:t>
             </a:r>
             <a:endParaRPr lang="en-US" sz="2000" dirty="0"/>
           </a:p>
@@ -17962,290 +20038,7 @@
             <a:pPr algn="ctr"/>
             <a:fld id="{F7021451-1387-4CA6-816F-3879F97B5CBC}" type="slidenum">
               <a:rPr b="1" lang="en-US"/>
-              <a:t>44</a:t>
-            </a:fld>
-            <a:endParaRPr lang="en-US"/>
-          </a:p>
-        </p:txBody>
-      </p:sp>
-    </p:spTree>
-  </p:cSld>
-  <p:clrMapOvr>
-    <a:masterClrMapping/>
-  </p:clrMapOvr>
-</p:sld>
-</file>
-
-<file path=ppt/slides/slide45.xml><?xml version="1.0" encoding="utf-8"?>
-<p:sld xmlns:a="http://schemas.openxmlformats.org/drawingml/2006/main" xmlns:r="http://schemas.openxmlformats.org/officeDocument/2006/relationships" xmlns:p="http://schemas.openxmlformats.org/presentationml/2006/main">
-  <p:cSld name="Slide 45">
-    <p:spTree>
-      <p:nvGrpSpPr>
-        <p:cNvPr id="1" name=""/>
-        <p:cNvGrpSpPr/>
-        <p:nvPr/>
-      </p:nvGrpSpPr>
-      <p:grpSpPr>
-        <a:xfrm>
-          <a:off x="0" y="0"/>
-          <a:ext cx="0" cy="0"/>
-          <a:chOff x="0" y="0"/>
-          <a:chExt cx="0" cy="0"/>
-        </a:xfrm>
-      </p:grpSpPr>
-      <p:sp>
-        <p:nvSpPr>
-          <p:cNvPr id="2" name="Text 0"/>
-          <p:cNvSpPr/>
-          <p:nvPr/>
-        </p:nvSpPr>
-        <p:spPr>
-          <a:xfrm>
-            <a:off x="457200" y="713232"/>
-            <a:ext cx="11368735" cy="274320"/>
-          </a:xfrm>
-          <a:prstGeom prst="rect">
-            <a:avLst/>
-          </a:prstGeom>
-          <a:noFill/>
-          <a:ln/>
-        </p:spPr>
-        <p:txBody>
-          <a:bodyPr wrap="square" lIns="0" tIns="0" rIns="0" bIns="0" rtlCol="0" anchor="ctr"/>
-          <a:lstStyle/>
-          <a:p>
-            <a:pPr algn="r" indent="0" marL="0">
-              <a:buNone/>
-            </a:pPr>
-            <a:r>
-              <a:rPr lang="en-US" sz="1400" b="1" dirty="0">
-                <a:solidFill>
-                  <a:srgbClr val="1C3F6E"/>
-                </a:solidFill>
-                <a:latin typeface="Calibri" pitchFamily="34" charset="0"/>
-                <a:ea typeface="Calibri" pitchFamily="34" charset="-122"/>
-                <a:cs typeface="Calibri" pitchFamily="34" charset="-120"/>
-              </a:rPr>
-              <a:t>REFERENCES</a:t>
-            </a:r>
-            <a:endParaRPr lang="en-US" sz="1400" dirty="0"/>
-          </a:p>
-        </p:txBody>
-      </p:sp>
-      <p:pic>
-        <p:nvPicPr>
-          <p:cNvPr id="3" name="Image 0" descr="/home/claude/f4/img/minesec_sheet.png">    </p:cNvPr>
-          <p:cNvPicPr>
-            <a:picLocks noChangeAspect="1"/>
-          </p:cNvPicPr>
-          <p:nvPr/>
-        </p:nvPicPr>
-        <p:blipFill>
-          <a:blip r:embed="rId1"/>
-          <a:stretch>
-            <a:fillRect/>
-          </a:stretch>
-        </p:blipFill>
-        <p:spPr>
-          <a:xfrm>
-            <a:off x="0" y="658368"/>
-            <a:ext cx="5120640" cy="5833872"/>
-          </a:xfrm>
-          <a:prstGeom prst="rect">
-            <a:avLst/>
-          </a:prstGeom>
-        </p:spPr>
-      </p:pic>
-      <p:sp>
-        <p:nvSpPr>
-          <p:cNvPr id="4" name="Text 1"/>
-          <p:cNvSpPr/>
-          <p:nvPr/>
-        </p:nvSpPr>
-        <p:spPr>
-          <a:xfrm>
-            <a:off x="5349240" y="1005840"/>
-            <a:ext cx="6522415" cy="731520"/>
-          </a:xfrm>
-          <a:prstGeom prst="rect">
-            <a:avLst/>
-          </a:prstGeom>
-          <a:noFill/>
-          <a:ln/>
-        </p:spPr>
-        <p:txBody>
-          <a:bodyPr wrap="square" lIns="0" tIns="0" rIns="0" bIns="0" rtlCol="0" anchor="ctr">
-            <a:normAutofit/>
-          </a:bodyPr>
-          <a:lstStyle/>
-          <a:p>
-            <a:pPr algn="ctr" indent="0" marL="0">
-              <a:buNone/>
-            </a:pPr>
-            <a:r>
-              <a:rPr lang="en-US" sz="3600" b="1" dirty="0">
-                <a:solidFill>
-                  <a:srgbClr val="990011"/>
-                </a:solidFill>
-                <a:latin typeface="Times New Roman" pitchFamily="34" charset="0"/>
-                <a:ea typeface="Times New Roman" pitchFamily="34" charset="-122"/>
-                <a:cs typeface="Times New Roman" pitchFamily="34" charset="-120"/>
-              </a:rPr>
-              <a:t>References</a:t>
-            </a:r>
-            <a:endParaRPr lang="en-US" sz="3600" dirty="0"/>
-          </a:p>
-        </p:txBody>
-      </p:sp>
-      <p:sp>
-        <p:nvSpPr>
-          <p:cNvPr id="5" name="Text 2"/>
-          <p:cNvSpPr/>
-          <p:nvPr/>
-        </p:nvSpPr>
-        <p:spPr>
-          <a:xfrm>
-            <a:off x="5349240" y="1783080"/>
-            <a:ext cx="6522415" cy="4663440"/>
-          </a:xfrm>
-          <a:prstGeom prst="rect">
-            <a:avLst/>
-          </a:prstGeom>
-          <a:noFill/>
-          <a:ln/>
-        </p:spPr>
-        <p:txBody>
-          <a:bodyPr wrap="square" lIns="0" tIns="0" rIns="0" bIns="0" rtlCol="0" anchor="t"/>
-          <a:lstStyle/>
-          <a:p>
-            <a:pPr algn="l" marL="342900" indent="-342900">
-              <a:spcAft>
-                <a:spcPts val="800"/>
-              </a:spcAft>
-              <a:buSzPct val="100000"/>
-              <a:buChar char="•"/>
-            </a:pPr>
-            <a:r>
-              <a:rPr lang="en-US" sz="1800" dirty="0">
-                <a:solidFill>
-                  <a:srgbClr val="111111"/>
-                </a:solidFill>
-                <a:latin typeface="Calibri" pitchFamily="34" charset="0"/>
-                <a:ea typeface="Calibri" pitchFamily="34" charset="-122"/>
-                <a:cs typeface="Calibri" pitchFamily="34" charset="-120"/>
-              </a:rPr>
-              <a:t>National Geography Syllabus (MINESEC), Form 4 — Denudation Processes, Landforms and Impacts on Man.</a:t>
-            </a:r>
-            <a:endParaRPr lang="en-US" sz="1800" dirty="0"/>
-          </a:p>
-          <a:p>
-            <a:pPr algn="l" marL="342900" indent="-342900">
-              <a:spcAft>
-                <a:spcPts val="800"/>
-              </a:spcAft>
-              <a:buSzPct val="100000"/>
-              <a:buChar char="•"/>
-            </a:pPr>
-            <a:r>
-              <a:rPr lang="en-US" sz="1800" dirty="0">
-                <a:solidFill>
-                  <a:srgbClr val="111111"/>
-                </a:solidFill>
-                <a:latin typeface="Calibri" pitchFamily="34" charset="0"/>
-                <a:ea typeface="Calibri" pitchFamily="34" charset="-122"/>
-                <a:cs typeface="Calibri" pitchFamily="34" charset="-120"/>
-              </a:rPr>
-              <a:t>Teacher's lesson notes (Form 4), checked and corrected where necessary.</a:t>
-            </a:r>
-            <a:endParaRPr lang="en-US" sz="1800" dirty="0"/>
-          </a:p>
-          <a:p>
-            <a:pPr algn="l" marL="342900" indent="-342900">
-              <a:spcAft>
-                <a:spcPts val="800"/>
-              </a:spcAft>
-              <a:buSzPct val="100000"/>
-              <a:buChar char="•"/>
-            </a:pPr>
-            <a:r>
-              <a:rPr lang="en-US" sz="1800" dirty="0">
-                <a:solidFill>
-                  <a:srgbClr val="111111"/>
-                </a:solidFill>
-                <a:latin typeface="Calibri" pitchFamily="34" charset="0"/>
-                <a:ea typeface="Calibri" pitchFamily="34" charset="-122"/>
-                <a:cs typeface="Calibri" pitchFamily="34" charset="-120"/>
-              </a:rPr>
-              <a:t>Photo, Activity 1: “Ox-bow” by colinjackson1972, CC BY-NC 2.0, via Flickr (https://www.flickr.com/photos/8253719@N04/2329293239)</a:t>
-            </a:r>
-            <a:endParaRPr lang="en-US" sz="1800" dirty="0"/>
-          </a:p>
-          <a:p>
-            <a:pPr algn="l" marL="342900" indent="-342900">
-              <a:spcAft>
-                <a:spcPts val="800"/>
-              </a:spcAft>
-              <a:buSzPct val="100000"/>
-              <a:buChar char="•"/>
-            </a:pPr>
-            <a:r>
-              <a:rPr lang="en-US" sz="1800" dirty="0">
-                <a:solidFill>
-                  <a:srgbClr val="111111"/>
-                </a:solidFill>
-                <a:latin typeface="Calibri" pitchFamily="34" charset="0"/>
-                <a:ea typeface="Calibri" pitchFamily="34" charset="-122"/>
-                <a:cs typeface="Calibri" pitchFamily="34" charset="-120"/>
-              </a:rPr>
-              <a:t>Diagrams and animations: drawn for this lesson (Geography Department).</a:t>
-            </a:r>
-            <a:endParaRPr lang="en-US" sz="1800" dirty="0"/>
-          </a:p>
-        </p:txBody>
-      </p:sp>
-      <p:sp>
-        <p:nvSpPr>
-          <p:cNvPr id="25" name="Slide Number Placeholder 0"/>
-          <p:cNvSpPr>
-            <a:spLocks noGrp="1"/>
-          </p:cNvSpPr>
-          <p:nvPr>
-            <p:ph type="sldNum" sz="quarter" idx="4294967295"/>
-          </p:nvPr>
-        </p:nvSpPr>
-        <p:spPr>
-          <a:xfrm>
-            <a:off x="27432" y="91440"/>
-            <a:ext cx="585216" cy="475488"/>
-          </a:xfrm>
-          <a:prstGeom prst="rect">
-            <a:avLst/>
-          </a:prstGeom>
-          <a:extLst>
-            <a:ext uri="{C572A759-6A51-4108-AA02-DFA0A04FC94B}">
-              <ma14:wrappingTextBoxFlag xmlns:ma14="http://schemas.microsoft.com/office/mac/drawingml/2011/main" val="0"/>
-            </a:ext>
-          </a:extLst>
-        </p:spPr>
-        <p:txBody>
-          <a:bodyPr/>
-          <a:lstStyle>
-            <a:lvl1pPr>
-              <a:defRPr sz="2000">
-                <a:solidFill>
-                  <a:srgbClr val="FFFFFF"/>
-                </a:solidFill>
-                <a:latin typeface="Calibri"/>
-                <a:ea typeface="Calibri"/>
-                <a:cs typeface="Calibri"/>
-              </a:defRPr>
-            </a:lvl1pPr>
-          </a:lstStyle>
-          <a:p>
-            <a:pPr algn="ctr"/>
-            <a:fld id="{F7021451-1387-4CA6-816F-3879F97B5CBC}" type="slidenum">
-              <a:rPr b="1" lang="en-US"/>
-              <a:t>45</a:t>
+              <a:t>49</a:t>
             </a:fld>
             <a:endParaRPr lang="en-US"/>
           </a:p>
@@ -18465,6 +20258,289 @@
             <a:fld id="{F7021451-1387-4CA6-816F-3879F97B5CBC}" type="slidenum">
               <a:rPr b="1" lang="en-US"/>
               <a:t>5</a:t>
+            </a:fld>
+            <a:endParaRPr lang="en-US"/>
+          </a:p>
+        </p:txBody>
+      </p:sp>
+    </p:spTree>
+  </p:cSld>
+  <p:clrMapOvr>
+    <a:masterClrMapping/>
+  </p:clrMapOvr>
+</p:sld>
+</file>
+
+<file path=ppt/slides/slide50.xml><?xml version="1.0" encoding="utf-8"?>
+<p:sld xmlns:a="http://schemas.openxmlformats.org/drawingml/2006/main" xmlns:r="http://schemas.openxmlformats.org/officeDocument/2006/relationships" xmlns:p="http://schemas.openxmlformats.org/presentationml/2006/main">
+  <p:cSld name="Slide 50">
+    <p:spTree>
+      <p:nvGrpSpPr>
+        <p:cNvPr id="1" name=""/>
+        <p:cNvGrpSpPr/>
+        <p:nvPr/>
+      </p:nvGrpSpPr>
+      <p:grpSpPr>
+        <a:xfrm>
+          <a:off x="0" y="0"/>
+          <a:ext cx="0" cy="0"/>
+          <a:chOff x="0" y="0"/>
+          <a:chExt cx="0" cy="0"/>
+        </a:xfrm>
+      </p:grpSpPr>
+      <p:sp>
+        <p:nvSpPr>
+          <p:cNvPr id="2" name="Text 0"/>
+          <p:cNvSpPr/>
+          <p:nvPr/>
+        </p:nvSpPr>
+        <p:spPr>
+          <a:xfrm>
+            <a:off x="457200" y="713232"/>
+            <a:ext cx="11368735" cy="274320"/>
+          </a:xfrm>
+          <a:prstGeom prst="rect">
+            <a:avLst/>
+          </a:prstGeom>
+          <a:noFill/>
+          <a:ln/>
+        </p:spPr>
+        <p:txBody>
+          <a:bodyPr wrap="square" lIns="0" tIns="0" rIns="0" bIns="0" rtlCol="0" anchor="ctr"/>
+          <a:lstStyle/>
+          <a:p>
+            <a:pPr algn="r" indent="0" marL="0">
+              <a:buNone/>
+            </a:pPr>
+            <a:r>
+              <a:rPr lang="en-US" sz="1400" b="1" dirty="0">
+                <a:solidFill>
+                  <a:srgbClr val="1C3F6E"/>
+                </a:solidFill>
+                <a:latin typeface="Calibri" pitchFamily="34" charset="0"/>
+                <a:ea typeface="Calibri" pitchFamily="34" charset="-122"/>
+                <a:cs typeface="Calibri" pitchFamily="34" charset="-120"/>
+              </a:rPr>
+              <a:t>REFERENCES</a:t>
+            </a:r>
+            <a:endParaRPr lang="en-US" sz="1400" dirty="0"/>
+          </a:p>
+        </p:txBody>
+      </p:sp>
+      <p:pic>
+        <p:nvPicPr>
+          <p:cNvPr id="3" name="Image 0" descr="/home/claude/f4/img/minesec_sheet.png">    </p:cNvPr>
+          <p:cNvPicPr>
+            <a:picLocks noChangeAspect="1"/>
+          </p:cNvPicPr>
+          <p:nvPr/>
+        </p:nvPicPr>
+        <p:blipFill>
+          <a:blip r:embed="rId1"/>
+          <a:stretch>
+            <a:fillRect/>
+          </a:stretch>
+        </p:blipFill>
+        <p:spPr>
+          <a:xfrm>
+            <a:off x="0" y="658368"/>
+            <a:ext cx="5120640" cy="5833872"/>
+          </a:xfrm>
+          <a:prstGeom prst="rect">
+            <a:avLst/>
+          </a:prstGeom>
+        </p:spPr>
+      </p:pic>
+      <p:sp>
+        <p:nvSpPr>
+          <p:cNvPr id="4" name="Text 1"/>
+          <p:cNvSpPr/>
+          <p:nvPr/>
+        </p:nvSpPr>
+        <p:spPr>
+          <a:xfrm>
+            <a:off x="5349240" y="1005840"/>
+            <a:ext cx="6522415" cy="731520"/>
+          </a:xfrm>
+          <a:prstGeom prst="rect">
+            <a:avLst/>
+          </a:prstGeom>
+          <a:noFill/>
+          <a:ln/>
+        </p:spPr>
+        <p:txBody>
+          <a:bodyPr wrap="square" lIns="0" tIns="0" rIns="0" bIns="0" rtlCol="0" anchor="ctr">
+            <a:normAutofit/>
+          </a:bodyPr>
+          <a:lstStyle/>
+          <a:p>
+            <a:pPr algn="ctr" indent="0" marL="0">
+              <a:buNone/>
+            </a:pPr>
+            <a:r>
+              <a:rPr lang="en-US" sz="3600" b="1" dirty="0">
+                <a:solidFill>
+                  <a:srgbClr val="990011"/>
+                </a:solidFill>
+                <a:latin typeface="Times New Roman" pitchFamily="34" charset="0"/>
+                <a:ea typeface="Times New Roman" pitchFamily="34" charset="-122"/>
+                <a:cs typeface="Times New Roman" pitchFamily="34" charset="-120"/>
+              </a:rPr>
+              <a:t>References</a:t>
+            </a:r>
+            <a:endParaRPr lang="en-US" sz="3600" dirty="0"/>
+          </a:p>
+        </p:txBody>
+      </p:sp>
+      <p:sp>
+        <p:nvSpPr>
+          <p:cNvPr id="5" name="Text 2"/>
+          <p:cNvSpPr/>
+          <p:nvPr/>
+        </p:nvSpPr>
+        <p:spPr>
+          <a:xfrm>
+            <a:off x="5349240" y="1783080"/>
+            <a:ext cx="6522415" cy="4663440"/>
+          </a:xfrm>
+          <a:prstGeom prst="rect">
+            <a:avLst/>
+          </a:prstGeom>
+          <a:noFill/>
+          <a:ln/>
+        </p:spPr>
+        <p:txBody>
+          <a:bodyPr wrap="square" lIns="0" tIns="0" rIns="0" bIns="0" rtlCol="0" anchor="t"/>
+          <a:lstStyle/>
+          <a:p>
+            <a:pPr algn="l" marL="342900" indent="-342900">
+              <a:spcAft>
+                <a:spcPts val="800"/>
+              </a:spcAft>
+              <a:buSzPct val="100000"/>
+              <a:buChar char="•"/>
+            </a:pPr>
+            <a:r>
+              <a:rPr lang="en-US" sz="1800" dirty="0">
+                <a:solidFill>
+                  <a:srgbClr val="111111"/>
+                </a:solidFill>
+                <a:latin typeface="Calibri" pitchFamily="34" charset="0"/>
+                <a:ea typeface="Calibri" pitchFamily="34" charset="-122"/>
+                <a:cs typeface="Calibri" pitchFamily="34" charset="-120"/>
+              </a:rPr>
+              <a:t>National Geography Syllabus (MINESEC), Form 4 — Denudation Processes, Landforms and Impacts on Man.</a:t>
+            </a:r>
+            <a:endParaRPr lang="en-US" sz="1800" dirty="0"/>
+          </a:p>
+          <a:p>
+            <a:pPr algn="l" marL="342900" indent="-342900">
+              <a:spcAft>
+                <a:spcPts val="800"/>
+              </a:spcAft>
+              <a:buSzPct val="100000"/>
+              <a:buChar char="•"/>
+            </a:pPr>
+            <a:r>
+              <a:rPr lang="en-US" sz="1800" dirty="0">
+                <a:solidFill>
+                  <a:srgbClr val="111111"/>
+                </a:solidFill>
+                <a:latin typeface="Calibri" pitchFamily="34" charset="0"/>
+                <a:ea typeface="Calibri" pitchFamily="34" charset="-122"/>
+                <a:cs typeface="Calibri" pitchFamily="34" charset="-120"/>
+              </a:rPr>
+              <a:t>Teacher's lesson notes (Form 4), checked and corrected where necessary.</a:t>
+            </a:r>
+            <a:endParaRPr lang="en-US" sz="1800" dirty="0"/>
+          </a:p>
+          <a:p>
+            <a:pPr algn="l" marL="342900" indent="-342900">
+              <a:spcAft>
+                <a:spcPts val="800"/>
+              </a:spcAft>
+              <a:buSzPct val="100000"/>
+              <a:buChar char="•"/>
+            </a:pPr>
+            <a:r>
+              <a:rPr lang="en-US" sz="1800" dirty="0">
+                <a:solidFill>
+                  <a:srgbClr val="111111"/>
+                </a:solidFill>
+                <a:latin typeface="Calibri" pitchFamily="34" charset="0"/>
+                <a:ea typeface="Calibri" pitchFamily="34" charset="-122"/>
+                <a:cs typeface="Calibri" pitchFamily="34" charset="-120"/>
+              </a:rPr>
+              <a:t>Photo, Activity 2: “Ox-bow” by colinjackson1972, CC BY-NC 2.0, via Flickr (https://www.flickr.com/photos/8253719@N04/2329293239)</a:t>
+            </a:r>
+            <a:endParaRPr lang="en-US" sz="1800" dirty="0"/>
+          </a:p>
+          <a:p>
+            <a:pPr algn="l" marL="342900" indent="-342900">
+              <a:spcAft>
+                <a:spcPts val="800"/>
+              </a:spcAft>
+              <a:buSzPct val="100000"/>
+              <a:buChar char="•"/>
+            </a:pPr>
+            <a:r>
+              <a:rPr lang="en-US" sz="1800" dirty="0">
+                <a:solidFill>
+                  <a:srgbClr val="111111"/>
+                </a:solidFill>
+                <a:latin typeface="Calibri" pitchFamily="34" charset="0"/>
+                <a:ea typeface="Calibri" pitchFamily="34" charset="-122"/>
+                <a:cs typeface="Calibri" pitchFamily="34" charset="-120"/>
+              </a:rPr>
+              <a:t>Diagrams and animations: drawn for this lesson (Geography Department).</a:t>
+            </a:r>
+            <a:endParaRPr lang="en-US" sz="1800" dirty="0"/>
+          </a:p>
+        </p:txBody>
+      </p:sp>
+      <p:sp>
+        <p:nvSpPr>
+          <p:cNvPr id="25" name="Slide Number Placeholder 0"/>
+          <p:cNvSpPr>
+            <a:spLocks noGrp="1"/>
+          </p:cNvSpPr>
+          <p:nvPr>
+            <p:ph type="sldNum" sz="quarter" idx="4294967295"/>
+          </p:nvPr>
+        </p:nvSpPr>
+        <p:spPr>
+          <a:xfrm>
+            <a:off x="27432" y="91440"/>
+            <a:ext cx="585216" cy="475488"/>
+          </a:xfrm>
+          <a:prstGeom prst="rect">
+            <a:avLst/>
+          </a:prstGeom>
+          <a:extLst>
+            <a:ext uri="{C572A759-6A51-4108-AA02-DFA0A04FC94B}">
+              <ma14:wrappingTextBoxFlag xmlns:ma14="http://schemas.microsoft.com/office/mac/drawingml/2011/main" val="0"/>
+            </a:ext>
+          </a:extLst>
+        </p:spPr>
+        <p:txBody>
+          <a:bodyPr/>
+          <a:lstStyle>
+            <a:lvl1pPr>
+              <a:defRPr sz="2000">
+                <a:solidFill>
+                  <a:srgbClr val="FFFFFF"/>
+                </a:solidFill>
+                <a:latin typeface="Calibri"/>
+                <a:ea typeface="Calibri"/>
+                <a:cs typeface="Calibri"/>
+              </a:defRPr>
+            </a:lvl1pPr>
+          </a:lstStyle>
+          <a:p>
+            <a:pPr algn="ctr"/>
+            <a:fld id="{F7021451-1387-4CA6-816F-3879F97B5CBC}" type="slidenum">
+              <a:rPr b="1" lang="en-US"/>
+              <a:t>50</a:t>
             </a:fld>
             <a:endParaRPr lang="en-US"/>
           </a:p>

--- a/lecons/F3/24_FORM4_LESSON20_Middle_Course.pptx
+++ b/lecons/F3/24_FORM4_LESSON20_Middle_Course.pptx
@@ -12288,7 +12288,7 @@
               <a:buNone/>
             </a:pPr>
             <a:r>
-              <a:rPr lang="en-US" sz="4000" b="1" dirty="0">
+              <a:rPr lang="en-US" sz="3200" b="1" dirty="0">
                 <a:solidFill>
                   <a:srgbClr val="111111"/>
                 </a:solidFill>
@@ -12298,7 +12298,7 @@
               </a:rPr>
               <a:t>Topic: Denudation Processes, Landforms and Impacts on Man</a:t>
             </a:r>
-            <a:endParaRPr lang="en-US" sz="4000" dirty="0"/>
+            <a:endParaRPr lang="en-US" sz="3200" dirty="0"/>
           </a:p>
           <a:p>
             <a:pPr algn="l" indent="0" marL="0">
@@ -12308,7 +12308,7 @@
               <a:buNone/>
             </a:pPr>
             <a:r>
-              <a:rPr lang="en-US" sz="4000" b="1" dirty="0">
+              <a:rPr lang="en-US" sz="3200" b="1" dirty="0">
                 <a:solidFill>
                   <a:srgbClr val="111111"/>
                 </a:solidFill>
@@ -12318,7 +12318,7 @@
               </a:rPr>
               <a:t>Sub-topic: The Work of Rivers on the Landscape and Impacts on Man</a:t>
             </a:r>
-            <a:endParaRPr lang="en-US" sz="4000" dirty="0"/>
+            <a:endParaRPr lang="en-US" sz="3200" dirty="0"/>
           </a:p>
           <a:p>
             <a:pPr algn="l" indent="0" marL="0">
@@ -12328,7 +12328,7 @@
               <a:buNone/>
             </a:pPr>
             <a:r>
-              <a:rPr lang="en-US" sz="4000" b="1" dirty="0">
+              <a:rPr lang="en-US" sz="3200" b="1" dirty="0">
                 <a:solidFill>
                   <a:srgbClr val="990011"/>
                 </a:solidFill>
@@ -12338,7 +12338,7 @@
               </a:rPr>
               <a:t>Lesson 20: The Middle Course of a River</a:t>
             </a:r>
-            <a:endParaRPr lang="en-US" sz="4000" dirty="0"/>
+            <a:endParaRPr lang="en-US" sz="3200" dirty="0"/>
           </a:p>
         </p:txBody>
       </p:sp>

--- a/lecons/F3/24_FORM4_LESSON20_Middle_Course.pptx
+++ b/lecons/F3/24_FORM4_LESSON20_Middle_Course.pptx
@@ -3455,7 +3455,7 @@
           <a:p>
             <a:r>
               <a:rPr lang="en-US" dirty="0"/>
-              <a:t>Before we start the new lesson, let us correct the homework I gave you at the end of Lesson 19: The Upper Course of a River. The question was: Stand on the Benue Bridge in Garoua or look at a photo of it. Draw the river and its bends, and mark where the water seems fastest. Take out your exercise books.</a:t>
+              <a:t>Before we start the new lesson, let us correct the homework I gave you at the end of Lesson 19: The Upper Course of a River. The question was: Define a meander. Take out your exercise books.</a:t>
             </a:r>
             <a:endParaRPr lang="en-US" dirty="0"/>
           </a:p>
@@ -3895,7 +3895,7 @@
           <a:p>
             <a:r>
               <a:rPr lang="en-US" dirty="0"/>
-              <a:t>For your homework: Look at a map of the Niger Delta or the Nile Delta in your atlas. Draw its shape and name the sea it reaches. We shall correct it at the beginning of our next lesson.</a:t>
+              <a:t>For your homework: Name two landforms of the lower course of a river. We shall correct it at the beginning of our next lesson.</a:t>
             </a:r>
             <a:endParaRPr lang="en-US" dirty="0"/>
           </a:p>
@@ -4423,7 +4423,7 @@
           <a:p>
             <a:r>
               <a:rPr lang="en-US" dirty="0"/>
-              <a:t>Here is a good answer. The drawing should show the Benue with bends (meanders) and sandbanks. The water is fastest on the outside of each bend and in the middle of the channel. Compare it with your own answer and correct your work in red.</a:t>
+              <a:t>Here is a good answer. It is a large bend in a river. Compare it with your own answer and correct your work in red.</a:t>
             </a:r>
             <a:endParaRPr lang="en-US" dirty="0"/>
           </a:p>
@@ -15259,7 +15259,7 @@
                 <a:ea typeface="Times New Roman" pitchFamily="34" charset="-122"/>
                 <a:cs typeface="Times New Roman" pitchFamily="34" charset="-120"/>
               </a:rPr>
-              <a:t>Stand on the Benue Bridge in Garoua or look at a photo of it. Draw the river and its bends, and mark where the water seems fastest.</a:t>
+              <a:t>Define a meander.</a:t>
             </a:r>
             <a:endParaRPr lang="en-US" sz="4000" dirty="0"/>
           </a:p>
@@ -16420,7 +16420,7 @@
                 <a:ea typeface="Times New Roman" pitchFamily="34" charset="-122"/>
                 <a:cs typeface="Times New Roman" pitchFamily="34" charset="-120"/>
               </a:rPr>
-              <a:t>Look at a map of the Niger Delta or the Nile Delta in your atlas. Draw its shape and name the sea it reaches.</a:t>
+              <a:t>Name two landforms of the lower course of a river.</a:t>
             </a:r>
             <a:endParaRPr lang="en-US" sz="4000" dirty="0"/>
           </a:p>
@@ -19360,7 +19360,7 @@
                           <a:ea typeface="Calibri" pitchFamily="34" charset="-122"/>
                           <a:cs typeface="Calibri" pitchFamily="34" charset="-120"/>
                         </a:rPr>
-                        <a:t>Look at a map of the Niger Delta or the Nile Delta in your atlas. Draw its shape and name the sea it reaches.</a:t>
+                        <a:t>Name two landforms of the lower course of a river.</a:t>
                       </a:r>
                       <a:endParaRPr lang="en-US" sz="1600" dirty="0">
                         <a:latin typeface="Calibri" charset="0"/>
@@ -20209,7 +20209,7 @@
                 <a:ea typeface="Times New Roman" pitchFamily="34" charset="-122"/>
                 <a:cs typeface="Times New Roman" pitchFamily="34" charset="-120"/>
               </a:rPr>
-              <a:t>The drawing should show the Benue with bends (meanders) and sandbanks. The water is fastest on the outside of each bend and in the middle of the channel.</a:t>
+              <a:t>It is a large bend in a river.</a:t>
             </a:r>
             <a:endParaRPr lang="en-US" sz="4000" dirty="0"/>
           </a:p>
